--- a/fig/paper/Figure1.pptx
+++ b/fig/paper/Figure1.pptx
@@ -1294,7 +1294,7 @@
           <a:p>
             <a:fld id="{FC063745-338C-6544-A5D2-E98827DF5448}" type="datetimeFigureOut">
               <a:rPr lang="fr-FR" smtClean="0"/>
-              <a:t>08/12/2025</a:t>
+              <a:t>01/04/2026</a:t>
             </a:fld>
             <a:endParaRPr lang="fr-FR"/>
           </a:p>
@@ -1692,7 +1692,7 @@
           <a:p>
             <a:fld id="{313D89CB-2992-504C-8485-488CC4F9911A}" type="datetime1">
               <a:rPr lang="fr-FR" smtClean="0"/>
-              <a:t>08/12/2025</a:t>
+              <a:t>01/04/2026</a:t>
             </a:fld>
             <a:endParaRPr lang="fr-FR"/>
           </a:p>
@@ -1862,7 +1862,7 @@
           <a:p>
             <a:fld id="{2BD3FA36-0741-BA4C-B4B5-15DB72BF03A1}" type="datetime1">
               <a:rPr lang="fr-FR" smtClean="0"/>
-              <a:t>08/12/2025</a:t>
+              <a:t>01/04/2026</a:t>
             </a:fld>
             <a:endParaRPr lang="fr-FR"/>
           </a:p>
@@ -2042,7 +2042,7 @@
           <a:p>
             <a:fld id="{05CC4263-710C-0844-9D48-8CC43FD5ED7E}" type="datetime1">
               <a:rPr lang="fr-FR" smtClean="0"/>
-              <a:t>08/12/2025</a:t>
+              <a:t>01/04/2026</a:t>
             </a:fld>
             <a:endParaRPr lang="fr-FR"/>
           </a:p>
@@ -2212,7 +2212,7 @@
           <a:p>
             <a:fld id="{6D246230-44E5-7149-A9C0-9697288E77C8}" type="datetime1">
               <a:rPr lang="fr-FR" smtClean="0"/>
-              <a:t>08/12/2025</a:t>
+              <a:t>01/04/2026</a:t>
             </a:fld>
             <a:endParaRPr lang="fr-FR"/>
           </a:p>
@@ -2458,7 +2458,7 @@
           <a:p>
             <a:fld id="{B2E6C6B8-87C5-9042-8379-57F3FAAEA27C}" type="datetime1">
               <a:rPr lang="fr-FR" smtClean="0"/>
-              <a:t>08/12/2025</a:t>
+              <a:t>01/04/2026</a:t>
             </a:fld>
             <a:endParaRPr lang="fr-FR"/>
           </a:p>
@@ -2690,7 +2690,7 @@
           <a:p>
             <a:fld id="{743B3B7F-FB76-574A-A50A-1B727FB2048E}" type="datetime1">
               <a:rPr lang="fr-FR" smtClean="0"/>
-              <a:t>08/12/2025</a:t>
+              <a:t>01/04/2026</a:t>
             </a:fld>
             <a:endParaRPr lang="fr-FR"/>
           </a:p>
@@ -3057,7 +3057,7 @@
           <a:p>
             <a:fld id="{7EC74428-84BA-3B4B-B43B-C65A92789810}" type="datetime1">
               <a:rPr lang="fr-FR" smtClean="0"/>
-              <a:t>08/12/2025</a:t>
+              <a:t>01/04/2026</a:t>
             </a:fld>
             <a:endParaRPr lang="fr-FR"/>
           </a:p>
@@ -3175,7 +3175,7 @@
           <a:p>
             <a:fld id="{45F830CD-A919-E446-A668-AE81763E5C43}" type="datetime1">
               <a:rPr lang="fr-FR" smtClean="0"/>
-              <a:t>08/12/2025</a:t>
+              <a:t>01/04/2026</a:t>
             </a:fld>
             <a:endParaRPr lang="fr-FR"/>
           </a:p>
@@ -3270,7 +3270,7 @@
           <a:p>
             <a:fld id="{71FB997D-B6C7-6B4B-B04D-489C2B815439}" type="datetime1">
               <a:rPr lang="fr-FR" smtClean="0"/>
-              <a:t>08/12/2025</a:t>
+              <a:t>01/04/2026</a:t>
             </a:fld>
             <a:endParaRPr lang="fr-FR"/>
           </a:p>
@@ -3547,7 +3547,7 @@
           <a:p>
             <a:fld id="{58312FBC-18EE-0C4F-A90A-8E31346EA436}" type="datetime1">
               <a:rPr lang="fr-FR" smtClean="0"/>
-              <a:t>08/12/2025</a:t>
+              <a:t>01/04/2026</a:t>
             </a:fld>
             <a:endParaRPr lang="fr-FR"/>
           </a:p>
@@ -3804,7 +3804,7 @@
           <a:p>
             <a:fld id="{507D74E3-20C5-3843-8BB5-9F1E31E1AB26}" type="datetime1">
               <a:rPr lang="fr-FR" smtClean="0"/>
-              <a:t>08/12/2025</a:t>
+              <a:t>01/04/2026</a:t>
             </a:fld>
             <a:endParaRPr lang="fr-FR"/>
           </a:p>
@@ -4017,7 +4017,7 @@
           <a:p>
             <a:fld id="{BFC8098D-FEF3-9840-8384-7EB58056CD3E}" type="datetime1">
               <a:rPr lang="fr-FR" smtClean="0"/>
-              <a:t>08/12/2025</a:t>
+              <a:t>01/04/2026</a:t>
             </a:fld>
             <a:endParaRPr lang="fr-FR"/>
           </a:p>
@@ -11109,10 +11109,10 @@
           <p:nvPr/>
         </p:nvPicPr>
         <p:blipFill>
-          <a:blip r:embed="rId2">
+          <a:blip>
             <a:extLst>
               <a:ext uri="{96DAC541-7B7A-43D3-8B79-37D633B846F1}">
-                <asvg:svgBlip xmlns:asvg="http://schemas.microsoft.com/office/drawing/2016/SVG/main" r:embed="rId3"/>
+                <asvg:svgBlip xmlns:asvg="http://schemas.microsoft.com/office/drawing/2016/SVG/main" r:embed="rId2"/>
               </a:ext>
             </a:extLst>
           </a:blip>
@@ -11227,10 +11227,10 @@
           <p:nvPr/>
         </p:nvPicPr>
         <p:blipFill>
-          <a:blip r:embed="rId4">
+          <a:blip>
             <a:extLst>
               <a:ext uri="{96DAC541-7B7A-43D3-8B79-37D633B846F1}">
-                <asvg:svgBlip xmlns:asvg="http://schemas.microsoft.com/office/drawing/2016/SVG/main" r:embed="rId5"/>
+                <asvg:svgBlip xmlns:asvg="http://schemas.microsoft.com/office/drawing/2016/SVG/main" r:embed="rId3"/>
               </a:ext>
             </a:extLst>
           </a:blip>
@@ -13359,10 +13359,10 @@
                 <p:nvPr/>
               </p:nvPicPr>
               <p:blipFill>
-                <a:blip r:embed="rId6">
+                <a:blip>
                   <a:extLst>
                     <a:ext uri="{96DAC541-7B7A-43D3-8B79-37D633B846F1}">
-                      <asvg:svgBlip xmlns:asvg="http://schemas.microsoft.com/office/drawing/2016/SVG/main" r:embed="rId7"/>
+                      <asvg:svgBlip xmlns:asvg="http://schemas.microsoft.com/office/drawing/2016/SVG/main" r:embed="rId4"/>
                     </a:ext>
                   </a:extLst>
                 </a:blip>
@@ -13504,10 +13504,10 @@
                 <p:nvPr/>
               </p:nvPicPr>
               <p:blipFill>
-                <a:blip r:embed="rId8">
+                <a:blip>
                   <a:extLst>
                     <a:ext uri="{96DAC541-7B7A-43D3-8B79-37D633B846F1}">
-                      <asvg:svgBlip xmlns:asvg="http://schemas.microsoft.com/office/drawing/2016/SVG/main" r:embed="rId9"/>
+                      <asvg:svgBlip xmlns:asvg="http://schemas.microsoft.com/office/drawing/2016/SVG/main" r:embed="rId5"/>
                     </a:ext>
                   </a:extLst>
                 </a:blip>
@@ -13692,7 +13692,7 @@
             </p:xfrm>
             <a:graphic>
               <a:graphicData uri="http://schemas.openxmlformats.org/drawingml/2006/chart">
-                <c:chart xmlns:c="http://schemas.openxmlformats.org/drawingml/2006/chart" xmlns:r="http://schemas.openxmlformats.org/officeDocument/2006/relationships" r:id="rId10"/>
+                <c:chart xmlns:c="http://schemas.openxmlformats.org/drawingml/2006/chart" xmlns:r="http://schemas.openxmlformats.org/officeDocument/2006/relationships" r:id="rId6"/>
               </a:graphicData>
             </a:graphic>
           </p:graphicFrame>
@@ -13867,8 +13867,8 @@
             </a:p>
           </p:txBody>
         </p:sp>
-        <mc:AlternateContent xmlns:mc="http://schemas.openxmlformats.org/markup-compatibility/2006" xmlns:a14="http://schemas.microsoft.com/office/drawing/2010/main">
-          <mc:Choice Requires="a14">
+        <mc:AlternateContent xmlns:mc="http://schemas.openxmlformats.org/markup-compatibility/2006">
+          <mc:Choice xmlns:a14="http://schemas.microsoft.com/office/drawing/2010/main" Requires="a14">
             <p:sp>
               <p:nvSpPr>
                 <p:cNvPr id="31" name="ZoneTexte 30">
@@ -13904,17 +13904,17 @@
                         <m:jc m:val="centerGroup"/>
                       </m:oMathParaPr>
                       <m:oMath xmlns:m="http://schemas.openxmlformats.org/officeDocument/2006/math">
-                        <m:sSub>
-                          <m:sSubPr>
+                        <m:sSubSup>
+                          <m:sSubSupPr>
                             <m:ctrlPr>
-                              <a:rPr lang="fr-FR" sz="1013" i="1">
+                              <a:rPr lang="fr-FR" sz="1013" i="1" smtClean="0">
                                 <a:solidFill>
                                   <a:schemeClr val="accent2"/>
                                 </a:solidFill>
                                 <a:latin typeface="Cambria Math" panose="02040503050406030204" pitchFamily="18" charset="0"/>
                               </a:rPr>
                             </m:ctrlPr>
-                          </m:sSubPr>
+                          </m:sSubSupPr>
                           <m:e>
                             <m:r>
                               <a:rPr lang="fr-FR" sz="1013" i="1">
@@ -13928,7 +13928,7 @@
                           </m:e>
                           <m:sub>
                             <m:r>
-                              <a:rPr lang="fr-FR" sz="1013" i="1">
+                              <a:rPr lang="fr-FR" sz="1013" b="0" i="1" smtClean="0">
                                 <a:solidFill>
                                   <a:schemeClr val="accent2"/>
                                 </a:solidFill>
@@ -13936,17 +13936,10 @@
                               </a:rPr>
                               <m:t>𝑐</m:t>
                             </m:r>
+                          </m:sub>
+                          <m:sup>
                             <m:r>
-                              <a:rPr lang="fr-FR" sz="1013" i="1">
-                                <a:solidFill>
-                                  <a:schemeClr val="accent2"/>
-                                </a:solidFill>
-                                <a:latin typeface="Cambria Math" panose="02040503050406030204" pitchFamily="18" charset="0"/>
-                              </a:rPr>
-                              <m:t>,</m:t>
-                            </m:r>
-                            <m:r>
-                              <a:rPr lang="fr-FR" sz="1013" i="1">
+                              <a:rPr lang="fr-FR" sz="1013" b="0" i="1" smtClean="0">
                                 <a:solidFill>
                                   <a:schemeClr val="accent2"/>
                                 </a:solidFill>
@@ -13954,8 +13947,8 @@
                               </a:rPr>
                               <m:t>𝑗</m:t>
                             </m:r>
-                          </m:sub>
-                        </m:sSub>
+                          </m:sup>
+                        </m:sSubSup>
                         <m:d>
                           <m:dPr>
                             <m:ctrlPr>
@@ -14037,13 +14030,13 @@
                           </m:naryPr>
                           <m:sub>
                             <m:r>
-                              <a:rPr lang="fr-FR" sz="1013" i="1">
+                              <a:rPr lang="fr-FR" sz="1013" b="0" i="1" smtClean="0">
                                 <a:solidFill>
                                   <a:schemeClr val="accent2"/>
                                 </a:solidFill>
                                 <a:latin typeface="Cambria Math" panose="02040503050406030204" pitchFamily="18" charset="0"/>
                               </a:rPr>
-                              <m:t>𝑘</m:t>
+                              <m:t>𝑙</m:t>
                             </m:r>
                             <m:r>
                               <a:rPr lang="fr-FR" sz="1013" i="1">
@@ -14054,20 +14047,20 @@
                               </a:rPr>
                               <m:t>∈</m:t>
                             </m:r>
-                            <m:sSub>
-                              <m:sSubPr>
+                            <m:sSup>
+                              <m:sSupPr>
                                 <m:ctrlPr>
-                                  <a:rPr lang="fr-FR" sz="1013" i="1">
+                                  <a:rPr lang="fr-FR" sz="1013" b="0" i="1" smtClean="0">
                                     <a:solidFill>
                                       <a:schemeClr val="accent2"/>
                                     </a:solidFill>
                                     <a:latin typeface="Cambria Math" panose="02040503050406030204" pitchFamily="18" charset="0"/>
                                   </a:rPr>
                                 </m:ctrlPr>
-                              </m:sSubPr>
+                              </m:sSupPr>
                               <m:e>
                                 <m:r>
-                                  <a:rPr lang="fr-FR" sz="1013" i="1">
+                                  <a:rPr lang="fr-FR" sz="1013" b="0" i="1" smtClean="0">
                                     <a:solidFill>
                                       <a:schemeClr val="accent2"/>
                                     </a:solidFill>
@@ -14076,9 +14069,9 @@
                                   <m:t>𝐶</m:t>
                                 </m:r>
                               </m:e>
-                              <m:sub>
+                              <m:sup>
                                 <m:r>
-                                  <a:rPr lang="fr-FR" sz="1013" i="1">
+                                  <a:rPr lang="fr-FR" sz="1013" b="0" i="1" smtClean="0">
                                     <a:solidFill>
                                       <a:schemeClr val="accent2"/>
                                     </a:solidFill>
@@ -14086,8 +14079,8 @@
                                   </a:rPr>
                                   <m:t>𝑗</m:t>
                                 </m:r>
-                              </m:sub>
-                            </m:sSub>
+                              </m:sup>
+                            </m:sSup>
                             <m:r>
                               <a:rPr lang="fr-FR" sz="1013" i="1">
                                 <a:solidFill>
@@ -14150,40 +14143,15 @@
                                   </a:rPr>
                                   <m:t>{</m:t>
                                 </m:r>
-                                <m:sSub>
-                                  <m:sSubPr>
-                                    <m:ctrlPr>
-                                      <a:rPr lang="fr-FR" sz="1013" i="1">
-                                        <a:solidFill>
-                                          <a:schemeClr val="accent2"/>
-                                        </a:solidFill>
-                                        <a:latin typeface="Cambria Math" panose="02040503050406030204" pitchFamily="18" charset="0"/>
-                                      </a:rPr>
-                                    </m:ctrlPr>
-                                  </m:sSubPr>
-                                  <m:e>
-                                    <m:r>
-                                      <a:rPr lang="fr-FR" sz="1013" i="1">
-                                        <a:solidFill>
-                                          <a:schemeClr val="accent2"/>
-                                        </a:solidFill>
-                                        <a:latin typeface="Cambria Math" panose="02040503050406030204" pitchFamily="18" charset="0"/>
-                                      </a:rPr>
-                                      <m:t>𝐷</m:t>
-                                    </m:r>
-                                  </m:e>
-                                  <m:sub>
-                                    <m:r>
-                                      <a:rPr lang="fr-FR" sz="1013" i="1">
-                                        <a:solidFill>
-                                          <a:schemeClr val="accent2"/>
-                                        </a:solidFill>
-                                        <a:latin typeface="Cambria Math" panose="02040503050406030204" pitchFamily="18" charset="0"/>
-                                      </a:rPr>
-                                      <m:t>𝑘</m:t>
-                                    </m:r>
-                                  </m:sub>
-                                </m:sSub>
+                                <m:r>
+                                  <a:rPr lang="fr-FR" sz="1013" b="0" i="1" smtClean="0">
+                                    <a:solidFill>
+                                      <a:schemeClr val="accent2"/>
+                                    </a:solidFill>
+                                    <a:latin typeface="Cambria Math" panose="02040503050406030204" pitchFamily="18" charset="0"/>
+                                  </a:rPr>
+                                  <m:t>𝐷</m:t>
+                                </m:r>
                                 <m:d>
                                   <m:dPr>
                                     <m:ctrlPr>
@@ -14196,6 +14164,24 @@
                                     </m:ctrlPr>
                                   </m:dPr>
                                   <m:e>
+                                    <m:r>
+                                      <a:rPr lang="fr-FR" sz="1013" b="0" i="1" smtClean="0">
+                                        <a:solidFill>
+                                          <a:schemeClr val="accent2"/>
+                                        </a:solidFill>
+                                        <a:latin typeface="Cambria Math" panose="02040503050406030204" pitchFamily="18" charset="0"/>
+                                      </a:rPr>
+                                      <m:t>𝑙</m:t>
+                                    </m:r>
+                                    <m:r>
+                                      <a:rPr lang="fr-FR" sz="1013" b="0" i="1" smtClean="0">
+                                        <a:solidFill>
+                                          <a:schemeClr val="accent2"/>
+                                        </a:solidFill>
+                                        <a:latin typeface="Cambria Math" panose="02040503050406030204" pitchFamily="18" charset="0"/>
+                                      </a:rPr>
+                                      <m:t>,</m:t>
+                                    </m:r>
                                     <m:r>
                                       <a:rPr lang="fr-FR" sz="1013" i="1">
                                         <a:solidFill>
@@ -14246,7 +14232,7 @@
               </p:txBody>
             </p:sp>
           </mc:Choice>
-          <mc:Fallback xmlns="">
+          <mc:Fallback>
             <p:sp>
               <p:nvSpPr>
                 <p:cNvPr id="31" name="ZoneTexte 30">
@@ -14270,7 +14256,7 @@
                   <a:avLst/>
                 </a:prstGeom>
                 <a:blipFill>
-                  <a:blip r:embed="rId11"/>
+                  <a:blip r:embed="rId7"/>
                   <a:stretch>
                     <a:fillRect t="-95122" b="-131707"/>
                   </a:stretch>
@@ -14308,7 +14294,7 @@
               <p:spPr>
                 <a:xfrm>
                   <a:off x="3224511" y="4295281"/>
-                  <a:ext cx="2468153" cy="477375"/>
+                  <a:ext cx="2468153" cy="511358"/>
                 </a:xfrm>
                 <a:prstGeom prst="rect">
                   <a:avLst/>
@@ -14328,8 +14314,8 @@
                         <m:jc m:val="centerGroup"/>
                       </m:oMathParaPr>
                       <m:oMath xmlns:m="http://schemas.openxmlformats.org/officeDocument/2006/math">
-                        <m:sSub>
-                          <m:sSubPr>
+                        <m:sSubSup>
+                          <m:sSubSupPr>
                             <m:ctrlPr>
                               <a:rPr lang="fr-FR" sz="1013" i="1" smtClean="0">
                                 <a:solidFill>
@@ -14338,7 +14324,7 @@
                                 <a:latin typeface="Cambria Math" panose="02040503050406030204" pitchFamily="18" charset="0"/>
                               </a:rPr>
                             </m:ctrlPr>
-                          </m:sSubPr>
+                          </m:sSubSupPr>
                           <m:e>
                             <m:r>
                               <a:rPr lang="fr-FR" sz="1013" i="1">
@@ -14360,17 +14346,10 @@
                               </a:rPr>
                               <m:t>𝑒</m:t>
                             </m:r>
+                          </m:sub>
+                          <m:sup>
                             <m:r>
-                              <a:rPr lang="fr-FR" sz="1013" i="1">
-                                <a:solidFill>
-                                  <a:schemeClr val="accent5"/>
-                                </a:solidFill>
-                                <a:latin typeface="Cambria Math" panose="02040503050406030204" pitchFamily="18" charset="0"/>
-                              </a:rPr>
-                              <m:t>,</m:t>
-                            </m:r>
-                            <m:r>
-                              <a:rPr lang="fr-FR" sz="1013" i="1">
+                              <a:rPr lang="fr-FR" sz="1013" b="0" i="1" smtClean="0">
                                 <a:solidFill>
                                   <a:schemeClr val="accent5"/>
                                 </a:solidFill>
@@ -14378,8 +14357,8 @@
                               </a:rPr>
                               <m:t>𝑗</m:t>
                             </m:r>
-                          </m:sub>
-                        </m:sSub>
+                          </m:sup>
+                        </m:sSubSup>
                         <m:d>
                           <m:dPr>
                             <m:ctrlPr>
@@ -14461,16 +14440,13 @@
                           </m:naryPr>
                           <m:sub>
                             <m:r>
-                              <m:rPr>
-                                <m:brk m:alnAt="7"/>
-                              </m:rPr>
-                              <a:rPr lang="fr-FR" sz="1013" i="1">
+                              <a:rPr lang="fr-FR" sz="1013" b="0" i="1" smtClean="0">
                                 <a:solidFill>
                                   <a:schemeClr val="accent5"/>
                                 </a:solidFill>
                                 <a:latin typeface="Cambria Math" panose="02040503050406030204" pitchFamily="18" charset="0"/>
                               </a:rPr>
-                              <m:t>𝑚</m:t>
+                              <m:t>𝑘</m:t>
                             </m:r>
                             <m:r>
                               <a:rPr lang="fr-FR" sz="1013" i="1">
@@ -14481,15 +14457,40 @@
                               </a:rPr>
                               <m:t>∈</m:t>
                             </m:r>
-                            <m:r>
-                              <a:rPr lang="fr-FR" sz="1013" i="1">
-                                <a:solidFill>
-                                  <a:schemeClr val="accent5"/>
-                                </a:solidFill>
-                                <a:latin typeface="Cambria Math" panose="02040503050406030204" pitchFamily="18" charset="0"/>
-                              </a:rPr>
-                              <m:t>𝑅</m:t>
-                            </m:r>
+                            <m:sSup>
+                              <m:sSupPr>
+                                <m:ctrlPr>
+                                  <a:rPr lang="fr-FR" sz="1013" i="1">
+                                    <a:solidFill>
+                                      <a:schemeClr val="accent5"/>
+                                    </a:solidFill>
+                                    <a:latin typeface="Cambria Math" panose="02040503050406030204" pitchFamily="18" charset="0"/>
+                                  </a:rPr>
+                                </m:ctrlPr>
+                              </m:sSupPr>
+                              <m:e>
+                                <m:r>
+                                  <a:rPr lang="fr-FR" sz="1013" i="1">
+                                    <a:solidFill>
+                                      <a:schemeClr val="accent5"/>
+                                    </a:solidFill>
+                                    <a:latin typeface="Cambria Math" panose="02040503050406030204" pitchFamily="18" charset="0"/>
+                                  </a:rPr>
+                                  <m:t>𝑅</m:t>
+                                </m:r>
+                              </m:e>
+                              <m:sup>
+                                <m:r>
+                                  <a:rPr lang="fr-FR" sz="1013" b="0" i="1" smtClean="0">
+                                    <a:solidFill>
+                                      <a:schemeClr val="accent5"/>
+                                    </a:solidFill>
+                                    <a:latin typeface="Cambria Math" panose="02040503050406030204" pitchFamily="18" charset="0"/>
+                                  </a:rPr>
+                                  <m:t>𝑗</m:t>
+                                </m:r>
+                              </m:sup>
+                            </m:sSup>
                           </m:sub>
                           <m:sup/>
                           <m:e>
@@ -14530,20 +14531,20 @@
                                     </m:ctrlPr>
                                   </m:dPr>
                                   <m:e>
-                                    <m:sSub>
-                                      <m:sSubPr>
+                                    <m:sSup>
+                                      <m:sSupPr>
                                         <m:ctrlPr>
-                                          <a:rPr lang="fr-FR" sz="1013" i="1">
+                                          <a:rPr lang="fr-FR" sz="1013" b="0" i="1" smtClean="0">
                                             <a:solidFill>
                                               <a:schemeClr val="accent5"/>
                                             </a:solidFill>
                                             <a:latin typeface="Cambria Math" panose="02040503050406030204" pitchFamily="18" charset="0"/>
                                           </a:rPr>
                                         </m:ctrlPr>
-                                      </m:sSubPr>
+                                      </m:sSupPr>
                                       <m:e>
                                         <m:r>
-                                          <a:rPr lang="fr-FR" sz="1013" i="1">
+                                          <a:rPr lang="fr-FR" sz="1013" b="0" i="1" smtClean="0">
                                             <a:solidFill>
                                               <a:schemeClr val="accent5"/>
                                             </a:solidFill>
@@ -14552,9 +14553,9 @@
                                           <m:t>𝑟</m:t>
                                         </m:r>
                                       </m:e>
-                                      <m:sub>
+                                      <m:sup>
                                         <m:r>
-                                          <a:rPr lang="fr-FR" sz="1013" i="1">
+                                          <a:rPr lang="fr-FR" sz="1013" b="0" i="1" smtClean="0">
                                             <a:solidFill>
                                               <a:schemeClr val="accent5"/>
                                             </a:solidFill>
@@ -14562,8 +14563,8 @@
                                           </a:rPr>
                                           <m:t>𝑗</m:t>
                                         </m:r>
-                                      </m:sub>
-                                    </m:sSub>
+                                      </m:sup>
+                                    </m:sSup>
                                     <m:d>
                                       <m:dPr>
                                         <m:ctrlPr>
@@ -14606,13 +14607,13 @@
                                       <m:t>=</m:t>
                                     </m:r>
                                     <m:r>
-                                      <a:rPr lang="fr-FR" sz="1013" i="1">
+                                      <a:rPr lang="fr-FR" sz="1013" b="0" i="1" smtClean="0">
                                         <a:solidFill>
                                           <a:schemeClr val="accent5"/>
                                         </a:solidFill>
                                         <a:latin typeface="Cambria Math" panose="02040503050406030204" pitchFamily="18" charset="0"/>
                                       </a:rPr>
-                                      <m:t>𝑚</m:t>
+                                      <m:t>𝑘</m:t>
                                     </m:r>
                                   </m:e>
                                 </m:d>
@@ -14639,20 +14640,20 @@
                                 </m:ctrlPr>
                               </m:fPr>
                               <m:num>
-                                <m:sSub>
-                                  <m:sSubPr>
+                                <m:sSup>
+                                  <m:sSupPr>
                                     <m:ctrlPr>
-                                      <a:rPr lang="fr-FR" sz="1013" i="1">
+                                      <a:rPr lang="fr-FR" sz="1013" b="0" i="1" smtClean="0">
                                         <a:solidFill>
                                           <a:schemeClr val="accent5"/>
                                         </a:solidFill>
                                         <a:latin typeface="Cambria Math" panose="02040503050406030204" pitchFamily="18" charset="0"/>
                                       </a:rPr>
                                     </m:ctrlPr>
-                                  </m:sSubPr>
+                                  </m:sSupPr>
                                   <m:e>
                                     <m:r>
-                                      <a:rPr lang="fr-FR" sz="1013" i="1">
+                                      <a:rPr lang="fr-FR" sz="1013" b="0" i="1" smtClean="0">
                                         <a:solidFill>
                                           <a:schemeClr val="accent5"/>
                                         </a:solidFill>
@@ -14661,18 +14662,27 @@
                                       <m:t>𝐸</m:t>
                                     </m:r>
                                   </m:e>
-                                  <m:sub>
+                                  <m:sup>
                                     <m:r>
-                                      <a:rPr lang="fr-FR" sz="1013" i="1">
+                                      <a:rPr lang="fr-FR" sz="1013" b="0" i="1" smtClean="0">
                                         <a:solidFill>
                                           <a:schemeClr val="accent5"/>
                                         </a:solidFill>
                                         <a:latin typeface="Cambria Math" panose="02040503050406030204" pitchFamily="18" charset="0"/>
                                       </a:rPr>
-                                      <m:t>𝑚</m:t>
+                                      <m:t>𝑘</m:t>
                                     </m:r>
-                                  </m:sub>
-                                </m:sSub>
+                                  </m:sup>
+                                </m:sSup>
+                                <m:r>
+                                  <a:rPr lang="fr-FR" sz="1013" i="1" smtClean="0">
+                                    <a:solidFill>
+                                      <a:schemeClr val="accent5"/>
+                                    </a:solidFill>
+                                    <a:latin typeface="Cambria Math" panose="02040503050406030204" pitchFamily="18" charset="0"/>
+                                  </a:rPr>
+                                  <m:t> </m:t>
+                                </m:r>
                                 <m:r>
                                   <a:rPr lang="fr-FR" sz="1013" i="1">
                                     <a:solidFill>
@@ -14702,20 +14712,20 @@
                                 </m:r>
                               </m:num>
                               <m:den>
-                                <m:sSub>
-                                  <m:sSubPr>
+                                <m:sSup>
+                                  <m:sSupPr>
                                     <m:ctrlPr>
-                                      <a:rPr lang="fr-FR" sz="1013" i="1">
+                                      <a:rPr lang="fr-FR" sz="1013" b="0" i="1" smtClean="0">
                                         <a:solidFill>
                                           <a:schemeClr val="accent5"/>
                                         </a:solidFill>
                                         <a:latin typeface="Cambria Math" panose="02040503050406030204" pitchFamily="18" charset="0"/>
                                       </a:rPr>
                                     </m:ctrlPr>
-                                  </m:sSubPr>
+                                  </m:sSupPr>
                                   <m:e>
                                     <m:r>
-                                      <a:rPr lang="fr-FR" sz="1013" i="1">
+                                      <a:rPr lang="fr-FR" sz="1013" b="0" i="1" smtClean="0">
                                         <a:solidFill>
                                           <a:schemeClr val="accent5"/>
                                         </a:solidFill>
@@ -14724,18 +14734,18 @@
                                       <m:t>𝑉</m:t>
                                     </m:r>
                                   </m:e>
-                                  <m:sub>
+                                  <m:sup>
                                     <m:r>
-                                      <a:rPr lang="fr-FR" sz="1013" i="1">
+                                      <a:rPr lang="fr-FR" sz="1013" b="0" i="1" smtClean="0">
                                         <a:solidFill>
                                           <a:schemeClr val="accent5"/>
                                         </a:solidFill>
                                         <a:latin typeface="Cambria Math" panose="02040503050406030204" pitchFamily="18" charset="0"/>
                                       </a:rPr>
-                                      <m:t>𝑚</m:t>
+                                      <m:t>𝑘</m:t>
                                     </m:r>
-                                  </m:sub>
-                                </m:sSub>
+                                  </m:sup>
+                                </m:sSup>
                               </m:den>
                             </m:f>
                           </m:e>
@@ -14770,15 +14780,15 @@
               <p:spPr>
                 <a:xfrm>
                   <a:off x="3224511" y="4295281"/>
-                  <a:ext cx="2468153" cy="477375"/>
+                  <a:ext cx="2468153" cy="511358"/>
                 </a:xfrm>
                 <a:prstGeom prst="rect">
                   <a:avLst/>
                 </a:prstGeom>
                 <a:blipFill>
-                  <a:blip r:embed="rId12"/>
+                  <a:blip r:embed="rId8"/>
                   <a:stretch>
-                    <a:fillRect t="-102632" b="-150000"/>
+                    <a:fillRect t="-92683" b="-134146"/>
                   </a:stretch>
                 </a:blipFill>
               </p:spPr>
@@ -14934,10 +14944,10 @@
             <p:nvPr/>
           </p:nvPicPr>
           <p:blipFill>
-            <a:blip r:embed="rId6">
+            <a:blip>
               <a:extLst>
                 <a:ext uri="{96DAC541-7B7A-43D3-8B79-37D633B846F1}">
-                  <asvg:svgBlip xmlns:asvg="http://schemas.microsoft.com/office/drawing/2016/SVG/main" r:embed="rId7"/>
+                  <asvg:svgBlip xmlns:asvg="http://schemas.microsoft.com/office/drawing/2016/SVG/main" r:embed="rId4"/>
                 </a:ext>
               </a:extLst>
             </a:blip>
@@ -14970,10 +14980,10 @@
             <p:nvPr/>
           </p:nvPicPr>
           <p:blipFill>
-            <a:blip r:embed="rId8">
+            <a:blip>
               <a:extLst>
                 <a:ext uri="{96DAC541-7B7A-43D3-8B79-37D633B846F1}">
-                  <asvg:svgBlip xmlns:asvg="http://schemas.microsoft.com/office/drawing/2016/SVG/main" r:embed="rId9"/>
+                  <asvg:svgBlip xmlns:asvg="http://schemas.microsoft.com/office/drawing/2016/SVG/main" r:embed="rId5"/>
                 </a:ext>
               </a:extLst>
             </a:blip>
@@ -15149,10 +15159,10 @@
           <p:nvPr/>
         </p:nvPicPr>
         <p:blipFill>
-          <a:blip r:embed="rId13">
+          <a:blip>
             <a:extLst>
               <a:ext uri="{96DAC541-7B7A-43D3-8B79-37D633B846F1}">
-                <asvg:svgBlip xmlns:asvg="http://schemas.microsoft.com/office/drawing/2016/SVG/main" r:embed="rId14"/>
+                <asvg:svgBlip xmlns:asvg="http://schemas.microsoft.com/office/drawing/2016/SVG/main" r:embed="rId9"/>
               </a:ext>
             </a:extLst>
           </a:blip>
@@ -15185,10 +15195,10 @@
           <p:nvPr/>
         </p:nvPicPr>
         <p:blipFill>
-          <a:blip r:embed="rId15">
+          <a:blip>
             <a:extLst>
               <a:ext uri="{96DAC541-7B7A-43D3-8B79-37D633B846F1}">
-                <asvg:svgBlip xmlns:asvg="http://schemas.microsoft.com/office/drawing/2016/SVG/main" r:embed="rId16"/>
+                <asvg:svgBlip xmlns:asvg="http://schemas.microsoft.com/office/drawing/2016/SVG/main" r:embed="rId10"/>
               </a:ext>
             </a:extLst>
           </a:blip>
@@ -15938,10 +15948,10 @@
           <p:nvPr/>
         </p:nvPicPr>
         <p:blipFill>
-          <a:blip r:embed="rId20">
+          <a:blip>
             <a:extLst>
               <a:ext uri="{96DAC541-7B7A-43D3-8B79-37D633B846F1}">
-                <asvg:svgBlip xmlns:asvg="http://schemas.microsoft.com/office/drawing/2016/SVG/main" r:embed="rId21"/>
+                <asvg:svgBlip xmlns:asvg="http://schemas.microsoft.com/office/drawing/2016/SVG/main" r:embed="rId20"/>
               </a:ext>
             </a:extLst>
           </a:blip>
@@ -15974,10 +15984,10 @@
           <p:nvPr/>
         </p:nvPicPr>
         <p:blipFill>
-          <a:blip r:embed="rId15">
+          <a:blip>
             <a:extLst>
               <a:ext uri="{96DAC541-7B7A-43D3-8B79-37D633B846F1}">
-                <asvg:svgBlip xmlns:asvg="http://schemas.microsoft.com/office/drawing/2016/SVG/main" r:embed="rId22"/>
+                <asvg:svgBlip xmlns:asvg="http://schemas.microsoft.com/office/drawing/2016/SVG/main" r:embed="rId21"/>
               </a:ext>
             </a:extLst>
           </a:blip>
@@ -16010,10 +16020,10 @@
           <p:nvPr/>
         </p:nvPicPr>
         <p:blipFill>
-          <a:blip r:embed="rId23">
+          <a:blip>
             <a:extLst>
               <a:ext uri="{96DAC541-7B7A-43D3-8B79-37D633B846F1}">
-                <asvg:svgBlip xmlns:asvg="http://schemas.microsoft.com/office/drawing/2016/SVG/main" r:embed="rId24"/>
+                <asvg:svgBlip xmlns:asvg="http://schemas.microsoft.com/office/drawing/2016/SVG/main" r:embed="rId22"/>
               </a:ext>
             </a:extLst>
           </a:blip>
@@ -16296,10 +16306,10 @@
           <p:nvPr/>
         </p:nvPicPr>
         <p:blipFill>
-          <a:blip r:embed="rId26">
+          <a:blip>
             <a:extLst>
               <a:ext uri="{96DAC541-7B7A-43D3-8B79-37D633B846F1}">
-                <asvg:svgBlip xmlns:asvg="http://schemas.microsoft.com/office/drawing/2016/SVG/main" r:embed="rId27"/>
+                <asvg:svgBlip xmlns:asvg="http://schemas.microsoft.com/office/drawing/2016/SVG/main" r:embed="rId26"/>
               </a:ext>
             </a:extLst>
           </a:blip>
@@ -16332,10 +16342,10 @@
           <p:nvPr/>
         </p:nvPicPr>
         <p:blipFill>
-          <a:blip r:embed="rId28">
+          <a:blip>
             <a:extLst>
               <a:ext uri="{96DAC541-7B7A-43D3-8B79-37D633B846F1}">
-                <asvg:svgBlip xmlns:asvg="http://schemas.microsoft.com/office/drawing/2016/SVG/main" r:embed="rId29"/>
+                <asvg:svgBlip xmlns:asvg="http://schemas.microsoft.com/office/drawing/2016/SVG/main" r:embed="rId27"/>
               </a:ext>
             </a:extLst>
           </a:blip>
@@ -16368,10 +16378,10 @@
           <p:nvPr/>
         </p:nvPicPr>
         <p:blipFill>
-          <a:blip r:embed="rId30">
+          <a:blip>
             <a:extLst>
               <a:ext uri="{96DAC541-7B7A-43D3-8B79-37D633B846F1}">
-                <asvg:svgBlip xmlns:asvg="http://schemas.microsoft.com/office/drawing/2016/SVG/main" r:embed="rId31"/>
+                <asvg:svgBlip xmlns:asvg="http://schemas.microsoft.com/office/drawing/2016/SVG/main" r:embed="rId28"/>
               </a:ext>
             </a:extLst>
           </a:blip>

--- a/fig/paper/Figure1.pptx
+++ b/fig/paper/Figure1.pptx
@@ -1294,7 +1294,7 @@
           <a:p>
             <a:fld id="{FC063745-338C-6544-A5D2-E98827DF5448}" type="datetimeFigureOut">
               <a:rPr lang="fr-FR" smtClean="0"/>
-              <a:t>01/04/2026</a:t>
+              <a:t>14/04/2026</a:t>
             </a:fld>
             <a:endParaRPr lang="fr-FR"/>
           </a:p>
@@ -1692,7 +1692,7 @@
           <a:p>
             <a:fld id="{313D89CB-2992-504C-8485-488CC4F9911A}" type="datetime1">
               <a:rPr lang="fr-FR" smtClean="0"/>
-              <a:t>01/04/2026</a:t>
+              <a:t>14/04/2026</a:t>
             </a:fld>
             <a:endParaRPr lang="fr-FR"/>
           </a:p>
@@ -1862,7 +1862,7 @@
           <a:p>
             <a:fld id="{2BD3FA36-0741-BA4C-B4B5-15DB72BF03A1}" type="datetime1">
               <a:rPr lang="fr-FR" smtClean="0"/>
-              <a:t>01/04/2026</a:t>
+              <a:t>14/04/2026</a:t>
             </a:fld>
             <a:endParaRPr lang="fr-FR"/>
           </a:p>
@@ -2042,7 +2042,7 @@
           <a:p>
             <a:fld id="{05CC4263-710C-0844-9D48-8CC43FD5ED7E}" type="datetime1">
               <a:rPr lang="fr-FR" smtClean="0"/>
-              <a:t>01/04/2026</a:t>
+              <a:t>14/04/2026</a:t>
             </a:fld>
             <a:endParaRPr lang="fr-FR"/>
           </a:p>
@@ -2212,7 +2212,7 @@
           <a:p>
             <a:fld id="{6D246230-44E5-7149-A9C0-9697288E77C8}" type="datetime1">
               <a:rPr lang="fr-FR" smtClean="0"/>
-              <a:t>01/04/2026</a:t>
+              <a:t>14/04/2026</a:t>
             </a:fld>
             <a:endParaRPr lang="fr-FR"/>
           </a:p>
@@ -2458,7 +2458,7 @@
           <a:p>
             <a:fld id="{B2E6C6B8-87C5-9042-8379-57F3FAAEA27C}" type="datetime1">
               <a:rPr lang="fr-FR" smtClean="0"/>
-              <a:t>01/04/2026</a:t>
+              <a:t>14/04/2026</a:t>
             </a:fld>
             <a:endParaRPr lang="fr-FR"/>
           </a:p>
@@ -2690,7 +2690,7 @@
           <a:p>
             <a:fld id="{743B3B7F-FB76-574A-A50A-1B727FB2048E}" type="datetime1">
               <a:rPr lang="fr-FR" smtClean="0"/>
-              <a:t>01/04/2026</a:t>
+              <a:t>14/04/2026</a:t>
             </a:fld>
             <a:endParaRPr lang="fr-FR"/>
           </a:p>
@@ -3057,7 +3057,7 @@
           <a:p>
             <a:fld id="{7EC74428-84BA-3B4B-B43B-C65A92789810}" type="datetime1">
               <a:rPr lang="fr-FR" smtClean="0"/>
-              <a:t>01/04/2026</a:t>
+              <a:t>14/04/2026</a:t>
             </a:fld>
             <a:endParaRPr lang="fr-FR"/>
           </a:p>
@@ -3175,7 +3175,7 @@
           <a:p>
             <a:fld id="{45F830CD-A919-E446-A668-AE81763E5C43}" type="datetime1">
               <a:rPr lang="fr-FR" smtClean="0"/>
-              <a:t>01/04/2026</a:t>
+              <a:t>14/04/2026</a:t>
             </a:fld>
             <a:endParaRPr lang="fr-FR"/>
           </a:p>
@@ -3270,7 +3270,7 @@
           <a:p>
             <a:fld id="{71FB997D-B6C7-6B4B-B04D-489C2B815439}" type="datetime1">
               <a:rPr lang="fr-FR" smtClean="0"/>
-              <a:t>01/04/2026</a:t>
+              <a:t>14/04/2026</a:t>
             </a:fld>
             <a:endParaRPr lang="fr-FR"/>
           </a:p>
@@ -3547,7 +3547,7 @@
           <a:p>
             <a:fld id="{58312FBC-18EE-0C4F-A90A-8E31346EA436}" type="datetime1">
               <a:rPr lang="fr-FR" smtClean="0"/>
-              <a:t>01/04/2026</a:t>
+              <a:t>14/04/2026</a:t>
             </a:fld>
             <a:endParaRPr lang="fr-FR"/>
           </a:p>
@@ -3804,7 +3804,7 @@
           <a:p>
             <a:fld id="{507D74E3-20C5-3843-8BB5-9F1E31E1AB26}" type="datetime1">
               <a:rPr lang="fr-FR" smtClean="0"/>
-              <a:t>01/04/2026</a:t>
+              <a:t>14/04/2026</a:t>
             </a:fld>
             <a:endParaRPr lang="fr-FR"/>
           </a:p>
@@ -4017,7 +4017,7 @@
           <a:p>
             <a:fld id="{BFC8098D-FEF3-9840-8384-7EB58056CD3E}" type="datetime1">
               <a:rPr lang="fr-FR" smtClean="0"/>
-              <a:t>01/04/2026</a:t>
+              <a:t>14/04/2026</a:t>
             </a:fld>
             <a:endParaRPr lang="fr-FR"/>
           </a:p>
@@ -11094,42 +11094,6 @@
           </a:fontRef>
         </p:style>
       </p:cxnSp>
-      <p:pic>
-        <p:nvPicPr>
-          <p:cNvPr id="25" name="Graphique 24" descr="Livre ouvert contour">
-            <a:extLst>
-              <a:ext uri="{FF2B5EF4-FFF2-40B4-BE49-F238E27FC236}">
-                <a16:creationId xmlns:a16="http://schemas.microsoft.com/office/drawing/2014/main" id="{18A00BBD-3EE8-D93C-F9B8-4085E2815867}"/>
-              </a:ext>
-            </a:extLst>
-          </p:cNvPr>
-          <p:cNvPicPr>
-            <a:picLocks noChangeAspect="1"/>
-          </p:cNvPicPr>
-          <p:nvPr/>
-        </p:nvPicPr>
-        <p:blipFill>
-          <a:blip>
-            <a:extLst>
-              <a:ext uri="{96DAC541-7B7A-43D3-8B79-37D633B846F1}">
-                <asvg:svgBlip xmlns:asvg="http://schemas.microsoft.com/office/drawing/2016/SVG/main" r:embed="rId2"/>
-              </a:ext>
-            </a:extLst>
-          </a:blip>
-          <a:stretch>
-            <a:fillRect/>
-          </a:stretch>
-        </p:blipFill>
-        <p:spPr>
-          <a:xfrm>
-            <a:off x="613804" y="2398166"/>
-            <a:ext cx="494368" cy="494368"/>
-          </a:xfrm>
-          <a:prstGeom prst="rect">
-            <a:avLst/>
-          </a:prstGeom>
-        </p:spPr>
-      </p:pic>
       <p:sp>
         <p:nvSpPr>
           <p:cNvPr id="26" name="ZoneTexte 25">
@@ -11144,7 +11108,7 @@
         </p:nvSpPr>
         <p:spPr>
           <a:xfrm>
-            <a:off x="474505" y="2236019"/>
+            <a:off x="474505" y="2270525"/>
             <a:ext cx="772969" cy="261610"/>
           </a:xfrm>
           <a:prstGeom prst="rect">
@@ -11181,7 +11145,7 @@
         </p:nvSpPr>
         <p:spPr>
           <a:xfrm>
-            <a:off x="416797" y="3580277"/>
+            <a:off x="416797" y="3517016"/>
             <a:ext cx="888385" cy="261610"/>
           </a:xfrm>
           <a:prstGeom prst="rect">
@@ -11230,7 +11194,7 @@
           <a:blip>
             <a:extLst>
               <a:ext uri="{96DAC541-7B7A-43D3-8B79-37D633B846F1}">
-                <asvg:svgBlip xmlns:asvg="http://schemas.microsoft.com/office/drawing/2016/SVG/main" r:embed="rId3"/>
+                <asvg:svgBlip xmlns:asvg="http://schemas.microsoft.com/office/drawing/2016/SVG/main" r:embed="rId2"/>
               </a:ext>
             </a:extLst>
           </a:blip>
@@ -11240,7 +11204,7 @@
         </p:blipFill>
         <p:spPr>
           <a:xfrm>
-            <a:off x="596100" y="3167763"/>
+            <a:off x="596100" y="3104502"/>
             <a:ext cx="529779" cy="529779"/>
           </a:xfrm>
           <a:prstGeom prst="rect">
@@ -11262,7 +11226,7 @@
         </p:nvGrpSpPr>
         <p:grpSpPr>
           <a:xfrm>
-            <a:off x="639462" y="3277027"/>
+            <a:off x="639462" y="3213766"/>
             <a:ext cx="443052" cy="302232"/>
             <a:chOff x="227635" y="4741765"/>
             <a:chExt cx="496759" cy="338869"/>
@@ -12430,12 +12394,951 @@
           </a:p>
         </p:txBody>
       </p:sp>
+      <p:sp>
+        <p:nvSpPr>
+          <p:cNvPr id="228" name="Rectangle : coins arrondis 227">
+            <a:extLst>
+              <a:ext uri="{FF2B5EF4-FFF2-40B4-BE49-F238E27FC236}">
+                <a16:creationId xmlns:a16="http://schemas.microsoft.com/office/drawing/2014/main" id="{1842A088-D738-CFA1-ED35-32FE01B7110C}"/>
+              </a:ext>
+            </a:extLst>
+          </p:cNvPr>
+          <p:cNvSpPr/>
+          <p:nvPr/>
+        </p:nvSpPr>
+        <p:spPr>
+          <a:xfrm>
+            <a:off x="2395746" y="5140815"/>
+            <a:ext cx="3125183" cy="2734343"/>
+          </a:xfrm>
+          <a:prstGeom prst="roundRect">
+            <a:avLst>
+              <a:gd name="adj" fmla="val 6962"/>
+            </a:avLst>
+          </a:prstGeom>
+          <a:noFill/>
+          <a:ln w="12700">
+            <a:solidFill>
+              <a:schemeClr val="tx1"/>
+            </a:solidFill>
+          </a:ln>
+        </p:spPr>
+        <p:style>
+          <a:lnRef idx="2">
+            <a:schemeClr val="accent1">
+              <a:shade val="15000"/>
+            </a:schemeClr>
+          </a:lnRef>
+          <a:fillRef idx="1">
+            <a:schemeClr val="accent1"/>
+          </a:fillRef>
+          <a:effectRef idx="0">
+            <a:schemeClr val="accent1"/>
+          </a:effectRef>
+          <a:fontRef idx="minor">
+            <a:schemeClr val="lt1"/>
+          </a:fontRef>
+        </p:style>
+        <p:txBody>
+          <a:bodyPr rtlCol="0" anchor="ctr"/>
+          <a:lstStyle/>
+          <a:p>
+            <a:pPr algn="ctr"/>
+            <a:endParaRPr lang="fr-FR" sz="1013"/>
+          </a:p>
+        </p:txBody>
+      </p:sp>
+      <p:sp>
+        <p:nvSpPr>
+          <p:cNvPr id="229" name="ZoneTexte 228">
+            <a:extLst>
+              <a:ext uri="{FF2B5EF4-FFF2-40B4-BE49-F238E27FC236}">
+                <a16:creationId xmlns:a16="http://schemas.microsoft.com/office/drawing/2014/main" id="{111AC8EC-1F98-675C-B687-E139F08686DF}"/>
+              </a:ext>
+            </a:extLst>
+          </p:cNvPr>
+          <p:cNvSpPr txBox="1"/>
+          <p:nvPr/>
+        </p:nvSpPr>
+        <p:spPr>
+          <a:xfrm>
+            <a:off x="3454027" y="5155774"/>
+            <a:ext cx="1008610" cy="246221"/>
+          </a:xfrm>
+          <a:prstGeom prst="rect">
+            <a:avLst/>
+          </a:prstGeom>
+          <a:noFill/>
+        </p:spPr>
+        <p:txBody>
+          <a:bodyPr wrap="none" rtlCol="0">
+            <a:spAutoFit/>
+          </a:bodyPr>
+          <a:lstStyle/>
+          <a:p>
+            <a:pPr algn="ctr"/>
+            <a:r>
+              <a:rPr lang="fr-FR" sz="1000" b="1" dirty="0"/>
+              <a:t>SIMULATIONS</a:t>
+            </a:r>
+          </a:p>
+        </p:txBody>
+      </p:sp>
+      <p:sp>
+        <p:nvSpPr>
+          <p:cNvPr id="266" name="Rectangle : coins arrondis 265">
+            <a:extLst>
+              <a:ext uri="{FF2B5EF4-FFF2-40B4-BE49-F238E27FC236}">
+                <a16:creationId xmlns:a16="http://schemas.microsoft.com/office/drawing/2014/main" id="{198D21E4-44F5-1342-B8CB-75CD37D0118E}"/>
+              </a:ext>
+            </a:extLst>
+          </p:cNvPr>
+          <p:cNvSpPr/>
+          <p:nvPr/>
+        </p:nvSpPr>
+        <p:spPr>
+          <a:xfrm>
+            <a:off x="2519342" y="5379106"/>
+            <a:ext cx="2877978" cy="1161894"/>
+          </a:xfrm>
+          <a:prstGeom prst="roundRect">
+            <a:avLst>
+              <a:gd name="adj" fmla="val 7929"/>
+            </a:avLst>
+          </a:prstGeom>
+          <a:solidFill>
+            <a:schemeClr val="tx2">
+              <a:lumMod val="10000"/>
+              <a:lumOff val="90000"/>
+            </a:schemeClr>
+          </a:solidFill>
+          <a:ln w="12700">
+            <a:solidFill>
+              <a:schemeClr val="tx2"/>
+            </a:solidFill>
+          </a:ln>
+        </p:spPr>
+        <p:style>
+          <a:lnRef idx="2">
+            <a:schemeClr val="accent1">
+              <a:shade val="15000"/>
+            </a:schemeClr>
+          </a:lnRef>
+          <a:fillRef idx="1">
+            <a:schemeClr val="accent1"/>
+          </a:fillRef>
+          <a:effectRef idx="0">
+            <a:schemeClr val="accent1"/>
+          </a:effectRef>
+          <a:fontRef idx="minor">
+            <a:schemeClr val="lt1"/>
+          </a:fontRef>
+        </p:style>
+        <p:txBody>
+          <a:bodyPr rtlCol="0" anchor="ctr"/>
+          <a:lstStyle/>
+          <a:p>
+            <a:pPr algn="ctr"/>
+            <a:endParaRPr lang="fr-FR" sz="1013" dirty="0"/>
+          </a:p>
+        </p:txBody>
+      </p:sp>
+      <p:sp>
+        <p:nvSpPr>
+          <p:cNvPr id="268" name="ZoneTexte 267">
+            <a:extLst>
+              <a:ext uri="{FF2B5EF4-FFF2-40B4-BE49-F238E27FC236}">
+                <a16:creationId xmlns:a16="http://schemas.microsoft.com/office/drawing/2014/main" id="{3C04F15C-5E0C-2155-C152-A8490BFF5E35}"/>
+              </a:ext>
+            </a:extLst>
+          </p:cNvPr>
+          <p:cNvSpPr txBox="1"/>
+          <p:nvPr/>
+        </p:nvSpPr>
+        <p:spPr>
+          <a:xfrm>
+            <a:off x="2675779" y="5379106"/>
+            <a:ext cx="2565126" cy="261610"/>
+          </a:xfrm>
+          <a:prstGeom prst="rect">
+            <a:avLst/>
+          </a:prstGeom>
+          <a:noFill/>
+          <a:ln>
+            <a:noFill/>
+          </a:ln>
+        </p:spPr>
+        <p:txBody>
+          <a:bodyPr wrap="none" rtlCol="0">
+            <a:spAutoFit/>
+          </a:bodyPr>
+          <a:lstStyle>
+            <a:defPPr>
+              <a:defRPr lang="fr-FR"/>
+            </a:defPPr>
+            <a:lvl1pPr algn="ctr">
+              <a:defRPr sz="1000"/>
+            </a:lvl1pPr>
+          </a:lstStyle>
+          <a:p>
+            <a:r>
+              <a:rPr lang="fr-FR" sz="1100" b="1" dirty="0">
+                <a:solidFill>
+                  <a:schemeClr val="tx2"/>
+                </a:solidFill>
+              </a:rPr>
+              <a:t>Exploration or transmission </a:t>
+            </a:r>
+            <a:r>
+              <a:rPr lang="fr-FR" sz="1100" b="1" dirty="0" err="1">
+                <a:solidFill>
+                  <a:schemeClr val="tx2"/>
+                </a:solidFill>
+              </a:rPr>
+              <a:t>schemes</a:t>
+            </a:r>
+            <a:endParaRPr lang="fr-FR" sz="1100" b="1" dirty="0">
+              <a:solidFill>
+                <a:schemeClr val="tx2"/>
+              </a:solidFill>
+            </a:endParaRPr>
+          </a:p>
+        </p:txBody>
+      </p:sp>
+      <p:cxnSp>
+        <p:nvCxnSpPr>
+          <p:cNvPr id="80" name="Connecteur droit avec flèche 79">
+            <a:extLst>
+              <a:ext uri="{FF2B5EF4-FFF2-40B4-BE49-F238E27FC236}">
+                <a16:creationId xmlns:a16="http://schemas.microsoft.com/office/drawing/2014/main" id="{01258CDD-91AA-70E7-BD67-D5C6524200C3}"/>
+              </a:ext>
+            </a:extLst>
+          </p:cNvPr>
+          <p:cNvCxnSpPr>
+            <a:cxnSpLocks/>
+          </p:cNvCxnSpPr>
+          <p:nvPr/>
+        </p:nvCxnSpPr>
+        <p:spPr>
+          <a:xfrm>
+            <a:off x="3736311" y="6345687"/>
+            <a:ext cx="1154051" cy="0"/>
+          </a:xfrm>
+          <a:prstGeom prst="straightConnector1">
+            <a:avLst/>
+          </a:prstGeom>
+          <a:ln w="12700">
+            <a:solidFill>
+              <a:schemeClr val="tx1"/>
+            </a:solidFill>
+            <a:tailEnd type="stealth"/>
+          </a:ln>
+        </p:spPr>
+        <p:style>
+          <a:lnRef idx="2">
+            <a:schemeClr val="accent1"/>
+          </a:lnRef>
+          <a:fillRef idx="0">
+            <a:schemeClr val="accent1"/>
+          </a:fillRef>
+          <a:effectRef idx="1">
+            <a:schemeClr val="accent1"/>
+          </a:effectRef>
+          <a:fontRef idx="minor">
+            <a:schemeClr val="tx1"/>
+          </a:fontRef>
+        </p:style>
+      </p:cxnSp>
+      <p:cxnSp>
+        <p:nvCxnSpPr>
+          <p:cNvPr id="89" name="Connecteur droit avec flèche 88">
+            <a:extLst>
+              <a:ext uri="{FF2B5EF4-FFF2-40B4-BE49-F238E27FC236}">
+                <a16:creationId xmlns:a16="http://schemas.microsoft.com/office/drawing/2014/main" id="{3AD337E3-C3FA-BD51-30E5-52DC6F16CD3F}"/>
+              </a:ext>
+            </a:extLst>
+          </p:cNvPr>
+          <p:cNvCxnSpPr>
+            <a:cxnSpLocks/>
+          </p:cNvCxnSpPr>
+          <p:nvPr/>
+        </p:nvCxnSpPr>
+        <p:spPr>
+          <a:xfrm flipV="1">
+            <a:off x="3736309" y="5752383"/>
+            <a:ext cx="0" cy="593304"/>
+          </a:xfrm>
+          <a:prstGeom prst="straightConnector1">
+            <a:avLst/>
+          </a:prstGeom>
+          <a:ln w="12700">
+            <a:solidFill>
+              <a:schemeClr val="tx1"/>
+            </a:solidFill>
+            <a:tailEnd type="stealth"/>
+          </a:ln>
+        </p:spPr>
+        <p:style>
+          <a:lnRef idx="2">
+            <a:schemeClr val="accent1"/>
+          </a:lnRef>
+          <a:fillRef idx="0">
+            <a:schemeClr val="accent1"/>
+          </a:fillRef>
+          <a:effectRef idx="1">
+            <a:schemeClr val="accent1"/>
+          </a:effectRef>
+          <a:fontRef idx="minor">
+            <a:schemeClr val="tx1"/>
+          </a:fontRef>
+        </p:style>
+      </p:cxnSp>
+      <p:sp>
+        <p:nvSpPr>
+          <p:cNvPr id="98" name="ZoneTexte 97">
+            <a:extLst>
+              <a:ext uri="{FF2B5EF4-FFF2-40B4-BE49-F238E27FC236}">
+                <a16:creationId xmlns:a16="http://schemas.microsoft.com/office/drawing/2014/main" id="{CB20BA7B-6EC3-1664-421B-D0AA6089FBC0}"/>
+              </a:ext>
+            </a:extLst>
+          </p:cNvPr>
+          <p:cNvSpPr txBox="1"/>
+          <p:nvPr/>
+        </p:nvSpPr>
+        <p:spPr>
+          <a:xfrm>
+            <a:off x="4505931" y="6300083"/>
+            <a:ext cx="452368" cy="246221"/>
+          </a:xfrm>
+          <a:prstGeom prst="rect">
+            <a:avLst/>
+          </a:prstGeom>
+          <a:noFill/>
+        </p:spPr>
+        <p:txBody>
+          <a:bodyPr wrap="none" rtlCol="0">
+            <a:spAutoFit/>
+          </a:bodyPr>
+          <a:lstStyle/>
+          <a:p>
+            <a:r>
+              <a:rPr lang="fr-FR" sz="1000" dirty="0"/>
+              <a:t>Time</a:t>
+            </a:r>
+          </a:p>
+        </p:txBody>
+      </p:sp>
+      <p:sp>
+        <p:nvSpPr>
+          <p:cNvPr id="101" name="Forme libre 100">
+            <a:extLst>
+              <a:ext uri="{FF2B5EF4-FFF2-40B4-BE49-F238E27FC236}">
+                <a16:creationId xmlns:a16="http://schemas.microsoft.com/office/drawing/2014/main" id="{3FD14762-5E34-EC7F-5583-A53DB6DBB738}"/>
+              </a:ext>
+            </a:extLst>
+          </p:cNvPr>
+          <p:cNvSpPr/>
+          <p:nvPr/>
+        </p:nvSpPr>
+        <p:spPr>
+          <a:xfrm>
+            <a:off x="3754072" y="6042021"/>
+            <a:ext cx="1012825" cy="280067"/>
+          </a:xfrm>
+          <a:custGeom>
+            <a:avLst/>
+            <a:gdLst>
+              <a:gd name="connsiteX0" fmla="*/ 0 w 1012825"/>
+              <a:gd name="connsiteY0" fmla="*/ 262091 h 280067"/>
+              <a:gd name="connsiteX1" fmla="*/ 101600 w 1012825"/>
+              <a:gd name="connsiteY1" fmla="*/ 214466 h 280067"/>
+              <a:gd name="connsiteX2" fmla="*/ 241300 w 1012825"/>
+              <a:gd name="connsiteY2" fmla="*/ 27141 h 280067"/>
+              <a:gd name="connsiteX3" fmla="*/ 415925 w 1012825"/>
+              <a:gd name="connsiteY3" fmla="*/ 23966 h 280067"/>
+              <a:gd name="connsiteX4" fmla="*/ 777875 w 1012825"/>
+              <a:gd name="connsiteY4" fmla="*/ 243041 h 280067"/>
+              <a:gd name="connsiteX5" fmla="*/ 1012825 w 1012825"/>
+              <a:gd name="connsiteY5" fmla="*/ 277966 h 280067"/>
+            </a:gdLst>
+            <a:ahLst/>
+            <a:cxnLst>
+              <a:cxn ang="0">
+                <a:pos x="connsiteX0" y="connsiteY0"/>
+              </a:cxn>
+              <a:cxn ang="0">
+                <a:pos x="connsiteX1" y="connsiteY1"/>
+              </a:cxn>
+              <a:cxn ang="0">
+                <a:pos x="connsiteX2" y="connsiteY2"/>
+              </a:cxn>
+              <a:cxn ang="0">
+                <a:pos x="connsiteX3" y="connsiteY3"/>
+              </a:cxn>
+              <a:cxn ang="0">
+                <a:pos x="connsiteX4" y="connsiteY4"/>
+              </a:cxn>
+              <a:cxn ang="0">
+                <a:pos x="connsiteX5" y="connsiteY5"/>
+              </a:cxn>
+            </a:cxnLst>
+            <a:rect l="l" t="t" r="r" b="b"/>
+            <a:pathLst>
+              <a:path w="1012825" h="280067">
+                <a:moveTo>
+                  <a:pt x="0" y="262091"/>
+                </a:moveTo>
+                <a:cubicBezTo>
+                  <a:pt x="30691" y="257857"/>
+                  <a:pt x="61383" y="253624"/>
+                  <a:pt x="101600" y="214466"/>
+                </a:cubicBezTo>
+                <a:cubicBezTo>
+                  <a:pt x="141817" y="175308"/>
+                  <a:pt x="188913" y="58891"/>
+                  <a:pt x="241300" y="27141"/>
+                </a:cubicBezTo>
+                <a:cubicBezTo>
+                  <a:pt x="293687" y="-4609"/>
+                  <a:pt x="326496" y="-12017"/>
+                  <a:pt x="415925" y="23966"/>
+                </a:cubicBezTo>
+                <a:cubicBezTo>
+                  <a:pt x="505354" y="59949"/>
+                  <a:pt x="678392" y="200708"/>
+                  <a:pt x="777875" y="243041"/>
+                </a:cubicBezTo>
+                <a:cubicBezTo>
+                  <a:pt x="877358" y="285374"/>
+                  <a:pt x="945091" y="281670"/>
+                  <a:pt x="1012825" y="277966"/>
+                </a:cubicBezTo>
+              </a:path>
+            </a:pathLst>
+          </a:custGeom>
+          <a:noFill/>
+          <a:ln w="6350"/>
+        </p:spPr>
+        <p:style>
+          <a:lnRef idx="2">
+            <a:schemeClr val="accent1">
+              <a:shade val="15000"/>
+            </a:schemeClr>
+          </a:lnRef>
+          <a:fillRef idx="1">
+            <a:schemeClr val="accent1"/>
+          </a:fillRef>
+          <a:effectRef idx="0">
+            <a:schemeClr val="accent1"/>
+          </a:effectRef>
+          <a:fontRef idx="minor">
+            <a:schemeClr val="lt1"/>
+          </a:fontRef>
+        </p:style>
+        <p:txBody>
+          <a:bodyPr rtlCol="0" anchor="ctr"/>
+          <a:lstStyle/>
+          <a:p>
+            <a:pPr algn="ctr"/>
+            <a:endParaRPr lang="fr-FR"/>
+          </a:p>
+        </p:txBody>
+      </p:sp>
+      <p:sp>
+        <p:nvSpPr>
+          <p:cNvPr id="104" name="ZoneTexte 103">
+            <a:extLst>
+              <a:ext uri="{FF2B5EF4-FFF2-40B4-BE49-F238E27FC236}">
+                <a16:creationId xmlns:a16="http://schemas.microsoft.com/office/drawing/2014/main" id="{03E32A25-530B-32EC-0FB5-3A6A75097FDF}"/>
+              </a:ext>
+            </a:extLst>
+          </p:cNvPr>
+          <p:cNvSpPr txBox="1"/>
+          <p:nvPr/>
+        </p:nvSpPr>
+        <p:spPr>
+          <a:xfrm>
+            <a:off x="3685410" y="5649011"/>
+            <a:ext cx="737702" cy="246221"/>
+          </a:xfrm>
+          <a:prstGeom prst="rect">
+            <a:avLst/>
+          </a:prstGeom>
+          <a:noFill/>
+        </p:spPr>
+        <p:txBody>
+          <a:bodyPr wrap="none" rtlCol="0">
+            <a:spAutoFit/>
+          </a:bodyPr>
+          <a:lstStyle/>
+          <a:p>
+            <a:r>
+              <a:rPr lang="fr-FR" sz="1000" dirty="0"/>
+              <a:t>Infections</a:t>
+            </a:r>
+          </a:p>
+        </p:txBody>
+      </p:sp>
+      <p:sp>
+        <p:nvSpPr>
+          <p:cNvPr id="107" name="Forme libre 106">
+            <a:extLst>
+              <a:ext uri="{FF2B5EF4-FFF2-40B4-BE49-F238E27FC236}">
+                <a16:creationId xmlns:a16="http://schemas.microsoft.com/office/drawing/2014/main" id="{7BB99C58-179C-99F2-2784-522C0D52BBAC}"/>
+              </a:ext>
+            </a:extLst>
+          </p:cNvPr>
+          <p:cNvSpPr/>
+          <p:nvPr/>
+        </p:nvSpPr>
+        <p:spPr>
+          <a:xfrm>
+            <a:off x="3754072" y="5900436"/>
+            <a:ext cx="422275" cy="441774"/>
+          </a:xfrm>
+          <a:custGeom>
+            <a:avLst/>
+            <a:gdLst>
+              <a:gd name="connsiteX0" fmla="*/ 0 w 422275"/>
+              <a:gd name="connsiteY0" fmla="*/ 397324 h 441774"/>
+              <a:gd name="connsiteX1" fmla="*/ 101600 w 422275"/>
+              <a:gd name="connsiteY1" fmla="*/ 449 h 441774"/>
+              <a:gd name="connsiteX2" fmla="*/ 298450 w 422275"/>
+              <a:gd name="connsiteY2" fmla="*/ 321124 h 441774"/>
+              <a:gd name="connsiteX3" fmla="*/ 422275 w 422275"/>
+              <a:gd name="connsiteY3" fmla="*/ 441774 h 441774"/>
+            </a:gdLst>
+            <a:ahLst/>
+            <a:cxnLst>
+              <a:cxn ang="0">
+                <a:pos x="connsiteX0" y="connsiteY0"/>
+              </a:cxn>
+              <a:cxn ang="0">
+                <a:pos x="connsiteX1" y="connsiteY1"/>
+              </a:cxn>
+              <a:cxn ang="0">
+                <a:pos x="connsiteX2" y="connsiteY2"/>
+              </a:cxn>
+              <a:cxn ang="0">
+                <a:pos x="connsiteX3" y="connsiteY3"/>
+              </a:cxn>
+            </a:cxnLst>
+            <a:rect l="l" t="t" r="r" b="b"/>
+            <a:pathLst>
+              <a:path w="422275" h="441774">
+                <a:moveTo>
+                  <a:pt x="0" y="397324"/>
+                </a:moveTo>
+                <a:cubicBezTo>
+                  <a:pt x="25929" y="205236"/>
+                  <a:pt x="51858" y="13149"/>
+                  <a:pt x="101600" y="449"/>
+                </a:cubicBezTo>
+                <a:cubicBezTo>
+                  <a:pt x="151342" y="-12251"/>
+                  <a:pt x="245004" y="247570"/>
+                  <a:pt x="298450" y="321124"/>
+                </a:cubicBezTo>
+                <a:cubicBezTo>
+                  <a:pt x="351896" y="394678"/>
+                  <a:pt x="380471" y="420607"/>
+                  <a:pt x="422275" y="441774"/>
+                </a:cubicBezTo>
+              </a:path>
+            </a:pathLst>
+          </a:custGeom>
+          <a:noFill/>
+          <a:ln w="6350"/>
+        </p:spPr>
+        <p:style>
+          <a:lnRef idx="2">
+            <a:schemeClr val="accent1">
+              <a:shade val="15000"/>
+            </a:schemeClr>
+          </a:lnRef>
+          <a:fillRef idx="1">
+            <a:schemeClr val="accent1"/>
+          </a:fillRef>
+          <a:effectRef idx="0">
+            <a:schemeClr val="accent1"/>
+          </a:effectRef>
+          <a:fontRef idx="minor">
+            <a:schemeClr val="lt1"/>
+          </a:fontRef>
+        </p:style>
+        <p:txBody>
+          <a:bodyPr rtlCol="0" anchor="ctr"/>
+          <a:lstStyle/>
+          <a:p>
+            <a:pPr algn="ctr"/>
+            <a:endParaRPr lang="fr-FR"/>
+          </a:p>
+        </p:txBody>
+      </p:sp>
+      <p:sp>
+        <p:nvSpPr>
+          <p:cNvPr id="109" name="Forme libre 108">
+            <a:extLst>
+              <a:ext uri="{FF2B5EF4-FFF2-40B4-BE49-F238E27FC236}">
+                <a16:creationId xmlns:a16="http://schemas.microsoft.com/office/drawing/2014/main" id="{964A8179-8F3F-B6E8-6FAD-A28A80D859A7}"/>
+              </a:ext>
+            </a:extLst>
+          </p:cNvPr>
+          <p:cNvSpPr/>
+          <p:nvPr/>
+        </p:nvSpPr>
+        <p:spPr>
+          <a:xfrm>
+            <a:off x="3760420" y="6303927"/>
+            <a:ext cx="928052" cy="45719"/>
+          </a:xfrm>
+          <a:custGeom>
+            <a:avLst/>
+            <a:gdLst>
+              <a:gd name="connsiteX0" fmla="*/ 0 w 390525"/>
+              <a:gd name="connsiteY0" fmla="*/ 3360 h 38285"/>
+              <a:gd name="connsiteX1" fmla="*/ 152400 w 390525"/>
+              <a:gd name="connsiteY1" fmla="*/ 3360 h 38285"/>
+              <a:gd name="connsiteX2" fmla="*/ 390525 w 390525"/>
+              <a:gd name="connsiteY2" fmla="*/ 38285 h 38285"/>
+            </a:gdLst>
+            <a:ahLst/>
+            <a:cxnLst>
+              <a:cxn ang="0">
+                <a:pos x="connsiteX0" y="connsiteY0"/>
+              </a:cxn>
+              <a:cxn ang="0">
+                <a:pos x="connsiteX1" y="connsiteY1"/>
+              </a:cxn>
+              <a:cxn ang="0">
+                <a:pos x="connsiteX2" y="connsiteY2"/>
+              </a:cxn>
+            </a:cxnLst>
+            <a:rect l="l" t="t" r="r" b="b"/>
+            <a:pathLst>
+              <a:path w="390525" h="38285">
+                <a:moveTo>
+                  <a:pt x="0" y="3360"/>
+                </a:moveTo>
+                <a:cubicBezTo>
+                  <a:pt x="43656" y="449"/>
+                  <a:pt x="87313" y="-2461"/>
+                  <a:pt x="152400" y="3360"/>
+                </a:cubicBezTo>
+                <a:cubicBezTo>
+                  <a:pt x="217487" y="9181"/>
+                  <a:pt x="338138" y="22939"/>
+                  <a:pt x="390525" y="38285"/>
+                </a:cubicBezTo>
+              </a:path>
+            </a:pathLst>
+          </a:custGeom>
+          <a:noFill/>
+          <a:ln w="6350"/>
+        </p:spPr>
+        <p:style>
+          <a:lnRef idx="2">
+            <a:schemeClr val="accent1">
+              <a:shade val="15000"/>
+            </a:schemeClr>
+          </a:lnRef>
+          <a:fillRef idx="1">
+            <a:schemeClr val="accent1"/>
+          </a:fillRef>
+          <a:effectRef idx="0">
+            <a:schemeClr val="accent1"/>
+          </a:effectRef>
+          <a:fontRef idx="minor">
+            <a:schemeClr val="lt1"/>
+          </a:fontRef>
+        </p:style>
+        <p:txBody>
+          <a:bodyPr rtlCol="0" anchor="ctr"/>
+          <a:lstStyle/>
+          <a:p>
+            <a:pPr algn="ctr"/>
+            <a:endParaRPr lang="fr-FR"/>
+          </a:p>
+        </p:txBody>
+      </p:sp>
+      <p:sp>
+        <p:nvSpPr>
+          <p:cNvPr id="110" name="Forme libre 109">
+            <a:extLst>
+              <a:ext uri="{FF2B5EF4-FFF2-40B4-BE49-F238E27FC236}">
+                <a16:creationId xmlns:a16="http://schemas.microsoft.com/office/drawing/2014/main" id="{B0AD613D-F365-97E9-FFC5-28289B13F38B}"/>
+              </a:ext>
+            </a:extLst>
+          </p:cNvPr>
+          <p:cNvSpPr/>
+          <p:nvPr/>
+        </p:nvSpPr>
+        <p:spPr>
+          <a:xfrm>
+            <a:off x="3754072" y="6088060"/>
+            <a:ext cx="1012825" cy="238277"/>
+          </a:xfrm>
+          <a:custGeom>
+            <a:avLst/>
+            <a:gdLst>
+              <a:gd name="connsiteX0" fmla="*/ 0 w 1012825"/>
+              <a:gd name="connsiteY0" fmla="*/ 231927 h 238277"/>
+              <a:gd name="connsiteX1" fmla="*/ 161925 w 1012825"/>
+              <a:gd name="connsiteY1" fmla="*/ 152 h 238277"/>
+              <a:gd name="connsiteX2" fmla="*/ 606425 w 1012825"/>
+              <a:gd name="connsiteY2" fmla="*/ 197002 h 238277"/>
+              <a:gd name="connsiteX3" fmla="*/ 1012825 w 1012825"/>
+              <a:gd name="connsiteY3" fmla="*/ 238277 h 238277"/>
+            </a:gdLst>
+            <a:ahLst/>
+            <a:cxnLst>
+              <a:cxn ang="0">
+                <a:pos x="connsiteX0" y="connsiteY0"/>
+              </a:cxn>
+              <a:cxn ang="0">
+                <a:pos x="connsiteX1" y="connsiteY1"/>
+              </a:cxn>
+              <a:cxn ang="0">
+                <a:pos x="connsiteX2" y="connsiteY2"/>
+              </a:cxn>
+              <a:cxn ang="0">
+                <a:pos x="connsiteX3" y="connsiteY3"/>
+              </a:cxn>
+            </a:cxnLst>
+            <a:rect l="l" t="t" r="r" b="b"/>
+            <a:pathLst>
+              <a:path w="1012825" h="238277">
+                <a:moveTo>
+                  <a:pt x="0" y="231927"/>
+                </a:moveTo>
+                <a:cubicBezTo>
+                  <a:pt x="30427" y="118950"/>
+                  <a:pt x="60854" y="5973"/>
+                  <a:pt x="161925" y="152"/>
+                </a:cubicBezTo>
+                <a:cubicBezTo>
+                  <a:pt x="262996" y="-5669"/>
+                  <a:pt x="464608" y="157315"/>
+                  <a:pt x="606425" y="197002"/>
+                </a:cubicBezTo>
+                <a:cubicBezTo>
+                  <a:pt x="748242" y="236689"/>
+                  <a:pt x="880533" y="237483"/>
+                  <a:pt x="1012825" y="238277"/>
+                </a:cubicBezTo>
+              </a:path>
+            </a:pathLst>
+          </a:custGeom>
+          <a:noFill/>
+          <a:ln w="6350"/>
+        </p:spPr>
+        <p:style>
+          <a:lnRef idx="2">
+            <a:schemeClr val="accent1">
+              <a:shade val="15000"/>
+            </a:schemeClr>
+          </a:lnRef>
+          <a:fillRef idx="1">
+            <a:schemeClr val="accent1"/>
+          </a:fillRef>
+          <a:effectRef idx="0">
+            <a:schemeClr val="accent1"/>
+          </a:effectRef>
+          <a:fontRef idx="minor">
+            <a:schemeClr val="lt1"/>
+          </a:fontRef>
+        </p:style>
+        <p:txBody>
+          <a:bodyPr rtlCol="0" anchor="ctr"/>
+          <a:lstStyle/>
+          <a:p>
+            <a:pPr algn="ctr"/>
+            <a:endParaRPr lang="fr-FR"/>
+          </a:p>
+        </p:txBody>
+      </p:sp>
+      <p:cxnSp>
+        <p:nvCxnSpPr>
+          <p:cNvPr id="29" name="Connecteur droit avec flèche 28">
+            <a:extLst>
+              <a:ext uri="{FF2B5EF4-FFF2-40B4-BE49-F238E27FC236}">
+                <a16:creationId xmlns:a16="http://schemas.microsoft.com/office/drawing/2014/main" id="{187C75C2-AD88-69C2-99ED-301B980FE7D3}"/>
+              </a:ext>
+            </a:extLst>
+          </p:cNvPr>
+          <p:cNvCxnSpPr>
+            <a:cxnSpLocks/>
+          </p:cNvCxnSpPr>
+          <p:nvPr/>
+        </p:nvCxnSpPr>
+        <p:spPr>
+          <a:xfrm>
+            <a:off x="2790284" y="6100571"/>
+            <a:ext cx="0" cy="306000"/>
+          </a:xfrm>
+          <a:prstGeom prst="straightConnector1">
+            <a:avLst/>
+          </a:prstGeom>
+          <a:ln w="12700">
+            <a:solidFill>
+              <a:schemeClr val="accent5"/>
+            </a:solidFill>
+            <a:tailEnd type="stealth" w="sm" len="sm"/>
+          </a:ln>
+        </p:spPr>
+        <p:style>
+          <a:lnRef idx="2">
+            <a:schemeClr val="accent1"/>
+          </a:lnRef>
+          <a:fillRef idx="0">
+            <a:schemeClr val="accent1"/>
+          </a:fillRef>
+          <a:effectRef idx="1">
+            <a:schemeClr val="accent1"/>
+          </a:effectRef>
+          <a:fontRef idx="minor">
+            <a:schemeClr val="tx1"/>
+          </a:fontRef>
+        </p:style>
+      </p:cxnSp>
+      <p:cxnSp>
+        <p:nvCxnSpPr>
+          <p:cNvPr id="30" name="Connecteur droit avec flèche 29">
+            <a:extLst>
+              <a:ext uri="{FF2B5EF4-FFF2-40B4-BE49-F238E27FC236}">
+                <a16:creationId xmlns:a16="http://schemas.microsoft.com/office/drawing/2014/main" id="{85DCDF90-26D5-C3CF-C43A-F2299AB106D6}"/>
+              </a:ext>
+            </a:extLst>
+          </p:cNvPr>
+          <p:cNvCxnSpPr>
+            <a:cxnSpLocks/>
+          </p:cNvCxnSpPr>
+          <p:nvPr/>
+        </p:nvCxnSpPr>
+        <p:spPr>
+          <a:xfrm flipV="1">
+            <a:off x="2833330" y="6100571"/>
+            <a:ext cx="0" cy="306000"/>
+          </a:xfrm>
+          <a:prstGeom prst="straightConnector1">
+            <a:avLst/>
+          </a:prstGeom>
+          <a:ln w="12700">
+            <a:solidFill>
+              <a:schemeClr val="accent5"/>
+            </a:solidFill>
+            <a:tailEnd type="stealth" w="sm" len="sm"/>
+          </a:ln>
+        </p:spPr>
+        <p:style>
+          <a:lnRef idx="2">
+            <a:schemeClr val="accent1"/>
+          </a:lnRef>
+          <a:fillRef idx="0">
+            <a:schemeClr val="accent1"/>
+          </a:fillRef>
+          <a:effectRef idx="1">
+            <a:schemeClr val="accent1"/>
+          </a:effectRef>
+          <a:fontRef idx="minor">
+            <a:schemeClr val="tx1"/>
+          </a:fontRef>
+        </p:style>
+      </p:cxnSp>
+      <p:cxnSp>
+        <p:nvCxnSpPr>
+          <p:cNvPr id="19" name="Connecteur droit avec flèche 18">
+            <a:extLst>
+              <a:ext uri="{FF2B5EF4-FFF2-40B4-BE49-F238E27FC236}">
+                <a16:creationId xmlns:a16="http://schemas.microsoft.com/office/drawing/2014/main" id="{FB71DC50-8D82-94FE-C4E5-4BC3AB899462}"/>
+              </a:ext>
+            </a:extLst>
+          </p:cNvPr>
+          <p:cNvCxnSpPr>
+            <a:cxnSpLocks/>
+          </p:cNvCxnSpPr>
+          <p:nvPr/>
+        </p:nvCxnSpPr>
+        <p:spPr>
+          <a:xfrm>
+            <a:off x="2791349" y="5694633"/>
+            <a:ext cx="0" cy="306000"/>
+          </a:xfrm>
+          <a:prstGeom prst="straightConnector1">
+            <a:avLst/>
+          </a:prstGeom>
+          <a:ln w="12700">
+            <a:solidFill>
+              <a:schemeClr val="accent2"/>
+            </a:solidFill>
+            <a:tailEnd type="stealth" w="sm" len="sm"/>
+          </a:ln>
+        </p:spPr>
+        <p:style>
+          <a:lnRef idx="2">
+            <a:schemeClr val="accent1"/>
+          </a:lnRef>
+          <a:fillRef idx="0">
+            <a:schemeClr val="accent1"/>
+          </a:fillRef>
+          <a:effectRef idx="1">
+            <a:schemeClr val="accent1"/>
+          </a:effectRef>
+          <a:fontRef idx="minor">
+            <a:schemeClr val="tx1"/>
+          </a:fontRef>
+        </p:style>
+      </p:cxnSp>
+      <p:cxnSp>
+        <p:nvCxnSpPr>
+          <p:cNvPr id="21" name="Connecteur droit avec flèche 20">
+            <a:extLst>
+              <a:ext uri="{FF2B5EF4-FFF2-40B4-BE49-F238E27FC236}">
+                <a16:creationId xmlns:a16="http://schemas.microsoft.com/office/drawing/2014/main" id="{BA6A455D-687D-2C28-1B8F-3A1EFE9AF6CE}"/>
+              </a:ext>
+            </a:extLst>
+          </p:cNvPr>
+          <p:cNvCxnSpPr>
+            <a:cxnSpLocks/>
+          </p:cNvCxnSpPr>
+          <p:nvPr/>
+        </p:nvCxnSpPr>
+        <p:spPr>
+          <a:xfrm flipV="1">
+            <a:off x="2834395" y="5694633"/>
+            <a:ext cx="0" cy="306000"/>
+          </a:xfrm>
+          <a:prstGeom prst="straightConnector1">
+            <a:avLst/>
+          </a:prstGeom>
+          <a:ln w="12700">
+            <a:solidFill>
+              <a:schemeClr val="accent2"/>
+            </a:solidFill>
+            <a:tailEnd type="stealth" w="sm" len="sm"/>
+          </a:ln>
+        </p:spPr>
+        <p:style>
+          <a:lnRef idx="2">
+            <a:schemeClr val="accent1"/>
+          </a:lnRef>
+          <a:fillRef idx="0">
+            <a:schemeClr val="accent1"/>
+          </a:fillRef>
+          <a:effectRef idx="1">
+            <a:schemeClr val="accent1"/>
+          </a:effectRef>
+          <a:fontRef idx="minor">
+            <a:schemeClr val="tx1"/>
+          </a:fontRef>
+        </p:style>
+      </p:cxnSp>
       <p:grpSp>
         <p:nvGrpSpPr>
-          <p:cNvPr id="259" name="Groupe 258">
+          <p:cNvPr id="12" name="Groupe 11">
             <a:extLst>
               <a:ext uri="{FF2B5EF4-FFF2-40B4-BE49-F238E27FC236}">
-                <a16:creationId xmlns:a16="http://schemas.microsoft.com/office/drawing/2014/main" id="{94637356-E1C2-3722-7F64-6E6AB2EADD39}"/>
+                <a16:creationId xmlns:a16="http://schemas.microsoft.com/office/drawing/2014/main" id="{E9AFAE50-BF0E-3DC1-199A-C34D4CDB5E0C}"/>
               </a:ext>
             </a:extLst>
           </p:cNvPr>
@@ -12444,18 +13347,18 @@
         </p:nvGrpSpPr>
         <p:grpSpPr>
           <a:xfrm>
-            <a:off x="2395746" y="5140815"/>
-            <a:ext cx="3125183" cy="2734343"/>
-            <a:chOff x="2230106" y="5447088"/>
-            <a:chExt cx="3125183" cy="2734343"/>
+            <a:off x="2456052" y="6630726"/>
+            <a:ext cx="2965230" cy="1199250"/>
+            <a:chOff x="8310219" y="4586848"/>
+            <a:chExt cx="2965230" cy="1199250"/>
           </a:xfrm>
         </p:grpSpPr>
         <p:sp>
           <p:nvSpPr>
-            <p:cNvPr id="228" name="Rectangle : coins arrondis 227">
+            <p:cNvPr id="267" name="Rectangle : coins arrondis 266">
               <a:extLst>
                 <a:ext uri="{FF2B5EF4-FFF2-40B4-BE49-F238E27FC236}">
-                  <a16:creationId xmlns:a16="http://schemas.microsoft.com/office/drawing/2014/main" id="{1842A088-D738-CFA1-ED35-32FE01B7110C}"/>
+                  <a16:creationId xmlns:a16="http://schemas.microsoft.com/office/drawing/2014/main" id="{973002A9-0607-A891-8CB6-22491FDBB6DE}"/>
                 </a:ext>
               </a:extLst>
             </p:cNvPr>
@@ -12464,18 +13367,23 @@
           </p:nvSpPr>
           <p:spPr>
             <a:xfrm>
-              <a:off x="2230106" y="5447088"/>
-              <a:ext cx="3125183" cy="2734343"/>
+              <a:off x="8397471" y="4586848"/>
+              <a:ext cx="2877978" cy="1164782"/>
             </a:xfrm>
             <a:prstGeom prst="roundRect">
               <a:avLst>
-                <a:gd name="adj" fmla="val 6962"/>
+                <a:gd name="adj" fmla="val 7929"/>
               </a:avLst>
             </a:prstGeom>
-            <a:noFill/>
+            <a:solidFill>
+              <a:schemeClr val="tx2">
+                <a:lumMod val="10000"/>
+                <a:lumOff val="90000"/>
+              </a:schemeClr>
+            </a:solidFill>
             <a:ln w="12700">
               <a:solidFill>
-                <a:schemeClr val="tx1"/>
+                <a:schemeClr val="tx2"/>
               </a:solidFill>
             </a:ln>
           </p:spPr>
@@ -12500,16 +13408,16 @@
             <a:lstStyle/>
             <a:p>
               <a:pPr algn="ctr"/>
-              <a:endParaRPr lang="fr-FR" sz="1013"/>
+              <a:endParaRPr lang="fr-FR" sz="1013" dirty="0"/>
             </a:p>
           </p:txBody>
         </p:sp>
         <p:sp>
           <p:nvSpPr>
-            <p:cNvPr id="229" name="ZoneTexte 228">
+            <p:cNvPr id="269" name="ZoneTexte 268">
               <a:extLst>
                 <a:ext uri="{FF2B5EF4-FFF2-40B4-BE49-F238E27FC236}">
-                  <a16:creationId xmlns:a16="http://schemas.microsoft.com/office/drawing/2014/main" id="{111AC8EC-1F98-675C-B687-E139F08686DF}"/>
+                  <a16:creationId xmlns:a16="http://schemas.microsoft.com/office/drawing/2014/main" id="{BA29F100-E9F4-66D0-6375-5174416AAB45}"/>
                 </a:ext>
               </a:extLst>
             </p:cNvPr>
@@ -12518,1185 +13426,82 @@
           </p:nvSpPr>
           <p:spPr>
             <a:xfrm>
-              <a:off x="3288387" y="5462047"/>
-              <a:ext cx="1008610" cy="246221"/>
+              <a:off x="8999532" y="4586848"/>
+              <a:ext cx="1673856" cy="261610"/>
             </a:xfrm>
             <a:prstGeom prst="rect">
               <a:avLst/>
             </a:prstGeom>
             <a:noFill/>
+            <a:ln>
+              <a:noFill/>
+            </a:ln>
           </p:spPr>
           <p:txBody>
             <a:bodyPr wrap="none" rtlCol="0">
               <a:spAutoFit/>
             </a:bodyPr>
-            <a:lstStyle/>
+            <a:lstStyle>
+              <a:defPPr>
+                <a:defRPr lang="fr-FR"/>
+              </a:defPPr>
+              <a:lvl1pPr algn="ctr">
+                <a:defRPr sz="1000"/>
+              </a:lvl1pPr>
+            </a:lstStyle>
             <a:p>
-              <a:pPr algn="ctr"/>
               <a:r>
-                <a:rPr lang="fr-FR" sz="1000" b="1" dirty="0"/>
-                <a:t>SIMULATIONS</a:t>
+                <a:rPr lang="fr-FR" sz="1100" b="1" dirty="0">
+                  <a:solidFill>
+                    <a:schemeClr val="tx2"/>
+                  </a:solidFill>
+                </a:rPr>
+                <a:t>Intervention </a:t>
               </a:r>
+              <a:r>
+                <a:rPr lang="fr-FR" sz="1100" b="1" dirty="0" err="1">
+                  <a:solidFill>
+                    <a:schemeClr val="tx2"/>
+                  </a:solidFill>
+                </a:rPr>
+                <a:t>evaluation</a:t>
+              </a:r>
+              <a:endParaRPr lang="fr-FR" sz="1100" b="1" dirty="0">
+                <a:solidFill>
+                  <a:schemeClr val="tx2"/>
+                </a:solidFill>
+              </a:endParaRPr>
             </a:p>
           </p:txBody>
         </p:sp>
-        <p:grpSp>
-          <p:nvGrpSpPr>
-            <p:cNvPr id="3" name="Groupe 2">
+        <p:graphicFrame>
+          <p:nvGraphicFramePr>
+            <p:cNvPr id="287" name="Graphique 286">
               <a:extLst>
                 <a:ext uri="{FF2B5EF4-FFF2-40B4-BE49-F238E27FC236}">
-                  <a16:creationId xmlns:a16="http://schemas.microsoft.com/office/drawing/2014/main" id="{A9698055-956C-2066-0F61-730AD862C741}"/>
+                  <a16:creationId xmlns:a16="http://schemas.microsoft.com/office/drawing/2014/main" id="{E227E4F4-63AB-B633-B21A-E620A71B3B3D}"/>
                 </a:ext>
               </a:extLst>
             </p:cNvPr>
-            <p:cNvGrpSpPr/>
-            <p:nvPr/>
-          </p:nvGrpSpPr>
-          <p:grpSpPr>
-            <a:xfrm>
-              <a:off x="2353702" y="5685379"/>
-              <a:ext cx="2877978" cy="1167198"/>
-              <a:chOff x="67912" y="5402204"/>
-              <a:chExt cx="2877978" cy="1167198"/>
-            </a:xfrm>
-          </p:grpSpPr>
-          <p:sp>
-            <p:nvSpPr>
-              <p:cNvPr id="266" name="Rectangle : coins arrondis 265">
-                <a:extLst>
-                  <a:ext uri="{FF2B5EF4-FFF2-40B4-BE49-F238E27FC236}">
-                    <a16:creationId xmlns:a16="http://schemas.microsoft.com/office/drawing/2014/main" id="{198D21E4-44F5-1342-B8CB-75CD37D0118E}"/>
-                  </a:ext>
-                </a:extLst>
-              </p:cNvPr>
-              <p:cNvSpPr/>
-              <p:nvPr/>
-            </p:nvSpPr>
-            <p:spPr>
-              <a:xfrm>
-                <a:off x="67912" y="5402204"/>
-                <a:ext cx="2877978" cy="1161894"/>
-              </a:xfrm>
-              <a:prstGeom prst="roundRect">
-                <a:avLst>
-                  <a:gd name="adj" fmla="val 7929"/>
-                </a:avLst>
-              </a:prstGeom>
-              <a:solidFill>
-                <a:schemeClr val="tx2">
-                  <a:lumMod val="10000"/>
-                  <a:lumOff val="90000"/>
-                </a:schemeClr>
-              </a:solidFill>
-              <a:ln w="12700">
-                <a:solidFill>
-                  <a:schemeClr val="tx2"/>
-                </a:solidFill>
-              </a:ln>
-            </p:spPr>
-            <p:style>
-              <a:lnRef idx="2">
-                <a:schemeClr val="accent1">
-                  <a:shade val="15000"/>
-                </a:schemeClr>
-              </a:lnRef>
-              <a:fillRef idx="1">
-                <a:schemeClr val="accent1"/>
-              </a:fillRef>
-              <a:effectRef idx="0">
-                <a:schemeClr val="accent1"/>
-              </a:effectRef>
-              <a:fontRef idx="minor">
-                <a:schemeClr val="lt1"/>
-              </a:fontRef>
-            </p:style>
-            <p:txBody>
-              <a:bodyPr rtlCol="0" anchor="ctr"/>
-              <a:lstStyle/>
-              <a:p>
-                <a:pPr algn="ctr"/>
-                <a:endParaRPr lang="fr-FR" sz="1013" dirty="0"/>
-              </a:p>
-            </p:txBody>
-          </p:sp>
-          <p:sp>
-            <p:nvSpPr>
-              <p:cNvPr id="268" name="ZoneTexte 267">
-                <a:extLst>
-                  <a:ext uri="{FF2B5EF4-FFF2-40B4-BE49-F238E27FC236}">
-                    <a16:creationId xmlns:a16="http://schemas.microsoft.com/office/drawing/2014/main" id="{3C04F15C-5E0C-2155-C152-A8490BFF5E35}"/>
-                  </a:ext>
-                </a:extLst>
-              </p:cNvPr>
-              <p:cNvSpPr txBox="1"/>
-              <p:nvPr/>
-            </p:nvSpPr>
-            <p:spPr>
-              <a:xfrm>
-                <a:off x="277239" y="5402204"/>
-                <a:ext cx="2459328" cy="261610"/>
-              </a:xfrm>
-              <a:prstGeom prst="rect">
-                <a:avLst/>
-              </a:prstGeom>
-              <a:noFill/>
-              <a:ln>
-                <a:noFill/>
-              </a:ln>
-            </p:spPr>
-            <p:txBody>
-              <a:bodyPr wrap="none" rtlCol="0">
-                <a:spAutoFit/>
-              </a:bodyPr>
-              <a:lstStyle>
-                <a:defPPr>
-                  <a:defRPr lang="fr-FR"/>
-                </a:defPPr>
-                <a:lvl1pPr algn="ctr">
-                  <a:defRPr sz="1000"/>
-                </a:lvl1pPr>
-              </a:lstStyle>
-              <a:p>
-                <a:r>
-                  <a:rPr lang="fr-FR" sz="1100" b="1" dirty="0">
-                    <a:solidFill>
-                      <a:schemeClr val="tx2"/>
-                    </a:solidFill>
-                  </a:rPr>
-                  <a:t>Transmission </a:t>
-                </a:r>
-                <a:r>
-                  <a:rPr lang="fr-FR" sz="1100" b="1" dirty="0" err="1">
-                    <a:solidFill>
-                      <a:schemeClr val="tx2"/>
-                    </a:solidFill>
-                  </a:rPr>
-                  <a:t>pathway</a:t>
-                </a:r>
-                <a:r>
-                  <a:rPr lang="fr-FR" sz="1100" b="1" dirty="0">
-                    <a:solidFill>
-                      <a:schemeClr val="tx2"/>
-                    </a:solidFill>
-                  </a:rPr>
-                  <a:t> exploration</a:t>
-                </a:r>
-              </a:p>
-            </p:txBody>
-          </p:sp>
-          <p:cxnSp>
-            <p:nvCxnSpPr>
-              <p:cNvPr id="80" name="Connecteur droit avec flèche 79">
-                <a:extLst>
-                  <a:ext uri="{FF2B5EF4-FFF2-40B4-BE49-F238E27FC236}">
-                    <a16:creationId xmlns:a16="http://schemas.microsoft.com/office/drawing/2014/main" id="{01258CDD-91AA-70E7-BD67-D5C6524200C3}"/>
-                  </a:ext>
-                </a:extLst>
-              </p:cNvPr>
-              <p:cNvCxnSpPr>
-                <a:cxnSpLocks/>
-              </p:cNvCxnSpPr>
-              <p:nvPr/>
-            </p:nvCxnSpPr>
-            <p:spPr>
-              <a:xfrm>
-                <a:off x="1284881" y="6368785"/>
-                <a:ext cx="1154051" cy="0"/>
-              </a:xfrm>
-              <a:prstGeom prst="straightConnector1">
-                <a:avLst/>
-              </a:prstGeom>
-              <a:ln w="12700">
-                <a:solidFill>
-                  <a:schemeClr val="tx1"/>
-                </a:solidFill>
-                <a:tailEnd type="stealth"/>
-              </a:ln>
-            </p:spPr>
-            <p:style>
-              <a:lnRef idx="2">
-                <a:schemeClr val="accent1"/>
-              </a:lnRef>
-              <a:fillRef idx="0">
-                <a:schemeClr val="accent1"/>
-              </a:fillRef>
-              <a:effectRef idx="1">
-                <a:schemeClr val="accent1"/>
-              </a:effectRef>
-              <a:fontRef idx="minor">
-                <a:schemeClr val="tx1"/>
-              </a:fontRef>
-            </p:style>
-          </p:cxnSp>
-          <p:cxnSp>
-            <p:nvCxnSpPr>
-              <p:cNvPr id="89" name="Connecteur droit avec flèche 88">
-                <a:extLst>
-                  <a:ext uri="{FF2B5EF4-FFF2-40B4-BE49-F238E27FC236}">
-                    <a16:creationId xmlns:a16="http://schemas.microsoft.com/office/drawing/2014/main" id="{3AD337E3-C3FA-BD51-30E5-52DC6F16CD3F}"/>
-                  </a:ext>
-                </a:extLst>
-              </p:cNvPr>
-              <p:cNvCxnSpPr>
-                <a:cxnSpLocks/>
-              </p:cNvCxnSpPr>
-              <p:nvPr/>
-            </p:nvCxnSpPr>
-            <p:spPr>
-              <a:xfrm flipV="1">
-                <a:off x="1284879" y="5775481"/>
-                <a:ext cx="0" cy="593304"/>
-              </a:xfrm>
-              <a:prstGeom prst="straightConnector1">
-                <a:avLst/>
-              </a:prstGeom>
-              <a:ln w="12700">
-                <a:solidFill>
-                  <a:schemeClr val="tx1"/>
-                </a:solidFill>
-                <a:tailEnd type="stealth"/>
-              </a:ln>
-            </p:spPr>
-            <p:style>
-              <a:lnRef idx="2">
-                <a:schemeClr val="accent1"/>
-              </a:lnRef>
-              <a:fillRef idx="0">
-                <a:schemeClr val="accent1"/>
-              </a:fillRef>
-              <a:effectRef idx="1">
-                <a:schemeClr val="accent1"/>
-              </a:effectRef>
-              <a:fontRef idx="minor">
-                <a:schemeClr val="tx1"/>
-              </a:fontRef>
-            </p:style>
-          </p:cxnSp>
-          <p:sp>
-            <p:nvSpPr>
-              <p:cNvPr id="98" name="ZoneTexte 97">
-                <a:extLst>
-                  <a:ext uri="{FF2B5EF4-FFF2-40B4-BE49-F238E27FC236}">
-                    <a16:creationId xmlns:a16="http://schemas.microsoft.com/office/drawing/2014/main" id="{CB20BA7B-6EC3-1664-421B-D0AA6089FBC0}"/>
-                  </a:ext>
-                </a:extLst>
-              </p:cNvPr>
-              <p:cNvSpPr txBox="1"/>
-              <p:nvPr/>
-            </p:nvSpPr>
-            <p:spPr>
-              <a:xfrm>
-                <a:off x="2054501" y="6323181"/>
-                <a:ext cx="452368" cy="246221"/>
-              </a:xfrm>
-              <a:prstGeom prst="rect">
-                <a:avLst/>
-              </a:prstGeom>
-              <a:noFill/>
-            </p:spPr>
-            <p:txBody>
-              <a:bodyPr wrap="none" rtlCol="0">
-                <a:spAutoFit/>
-              </a:bodyPr>
-              <a:lstStyle/>
-              <a:p>
-                <a:r>
-                  <a:rPr lang="fr-FR" sz="1000" dirty="0"/>
-                  <a:t>Time</a:t>
-                </a:r>
-              </a:p>
-            </p:txBody>
-          </p:sp>
-          <p:sp>
-            <p:nvSpPr>
-              <p:cNvPr id="101" name="Forme libre 100">
-                <a:extLst>
-                  <a:ext uri="{FF2B5EF4-FFF2-40B4-BE49-F238E27FC236}">
-                    <a16:creationId xmlns:a16="http://schemas.microsoft.com/office/drawing/2014/main" id="{3FD14762-5E34-EC7F-5583-A53DB6DBB738}"/>
-                  </a:ext>
-                </a:extLst>
-              </p:cNvPr>
-              <p:cNvSpPr/>
-              <p:nvPr/>
-            </p:nvSpPr>
-            <p:spPr>
-              <a:xfrm>
-                <a:off x="1302642" y="6065119"/>
-                <a:ext cx="1012825" cy="280067"/>
-              </a:xfrm>
-              <a:custGeom>
-                <a:avLst/>
-                <a:gdLst>
-                  <a:gd name="connsiteX0" fmla="*/ 0 w 1012825"/>
-                  <a:gd name="connsiteY0" fmla="*/ 262091 h 280067"/>
-                  <a:gd name="connsiteX1" fmla="*/ 101600 w 1012825"/>
-                  <a:gd name="connsiteY1" fmla="*/ 214466 h 280067"/>
-                  <a:gd name="connsiteX2" fmla="*/ 241300 w 1012825"/>
-                  <a:gd name="connsiteY2" fmla="*/ 27141 h 280067"/>
-                  <a:gd name="connsiteX3" fmla="*/ 415925 w 1012825"/>
-                  <a:gd name="connsiteY3" fmla="*/ 23966 h 280067"/>
-                  <a:gd name="connsiteX4" fmla="*/ 777875 w 1012825"/>
-                  <a:gd name="connsiteY4" fmla="*/ 243041 h 280067"/>
-                  <a:gd name="connsiteX5" fmla="*/ 1012825 w 1012825"/>
-                  <a:gd name="connsiteY5" fmla="*/ 277966 h 280067"/>
-                </a:gdLst>
-                <a:ahLst/>
-                <a:cxnLst>
-                  <a:cxn ang="0">
-                    <a:pos x="connsiteX0" y="connsiteY0"/>
-                  </a:cxn>
-                  <a:cxn ang="0">
-                    <a:pos x="connsiteX1" y="connsiteY1"/>
-                  </a:cxn>
-                  <a:cxn ang="0">
-                    <a:pos x="connsiteX2" y="connsiteY2"/>
-                  </a:cxn>
-                  <a:cxn ang="0">
-                    <a:pos x="connsiteX3" y="connsiteY3"/>
-                  </a:cxn>
-                  <a:cxn ang="0">
-                    <a:pos x="connsiteX4" y="connsiteY4"/>
-                  </a:cxn>
-                  <a:cxn ang="0">
-                    <a:pos x="connsiteX5" y="connsiteY5"/>
-                  </a:cxn>
-                </a:cxnLst>
-                <a:rect l="l" t="t" r="r" b="b"/>
-                <a:pathLst>
-                  <a:path w="1012825" h="280067">
-                    <a:moveTo>
-                      <a:pt x="0" y="262091"/>
-                    </a:moveTo>
-                    <a:cubicBezTo>
-                      <a:pt x="30691" y="257857"/>
-                      <a:pt x="61383" y="253624"/>
-                      <a:pt x="101600" y="214466"/>
-                    </a:cubicBezTo>
-                    <a:cubicBezTo>
-                      <a:pt x="141817" y="175308"/>
-                      <a:pt x="188913" y="58891"/>
-                      <a:pt x="241300" y="27141"/>
-                    </a:cubicBezTo>
-                    <a:cubicBezTo>
-                      <a:pt x="293687" y="-4609"/>
-                      <a:pt x="326496" y="-12017"/>
-                      <a:pt x="415925" y="23966"/>
-                    </a:cubicBezTo>
-                    <a:cubicBezTo>
-                      <a:pt x="505354" y="59949"/>
-                      <a:pt x="678392" y="200708"/>
-                      <a:pt x="777875" y="243041"/>
-                    </a:cubicBezTo>
-                    <a:cubicBezTo>
-                      <a:pt x="877358" y="285374"/>
-                      <a:pt x="945091" y="281670"/>
-                      <a:pt x="1012825" y="277966"/>
-                    </a:cubicBezTo>
-                  </a:path>
-                </a:pathLst>
-              </a:custGeom>
-              <a:noFill/>
-              <a:ln w="6350"/>
-            </p:spPr>
-            <p:style>
-              <a:lnRef idx="2">
-                <a:schemeClr val="accent1">
-                  <a:shade val="15000"/>
-                </a:schemeClr>
-              </a:lnRef>
-              <a:fillRef idx="1">
-                <a:schemeClr val="accent1"/>
-              </a:fillRef>
-              <a:effectRef idx="0">
-                <a:schemeClr val="accent1"/>
-              </a:effectRef>
-              <a:fontRef idx="minor">
-                <a:schemeClr val="lt1"/>
-              </a:fontRef>
-            </p:style>
-            <p:txBody>
-              <a:bodyPr rtlCol="0" anchor="ctr"/>
-              <a:lstStyle/>
-              <a:p>
-                <a:pPr algn="ctr"/>
-                <a:endParaRPr lang="fr-FR"/>
-              </a:p>
-            </p:txBody>
-          </p:sp>
-          <p:sp>
-            <p:nvSpPr>
-              <p:cNvPr id="104" name="ZoneTexte 103">
-                <a:extLst>
-                  <a:ext uri="{FF2B5EF4-FFF2-40B4-BE49-F238E27FC236}">
-                    <a16:creationId xmlns:a16="http://schemas.microsoft.com/office/drawing/2014/main" id="{03E32A25-530B-32EC-0FB5-3A6A75097FDF}"/>
-                  </a:ext>
-                </a:extLst>
-              </p:cNvPr>
-              <p:cNvSpPr txBox="1"/>
-              <p:nvPr/>
-            </p:nvSpPr>
-            <p:spPr>
-              <a:xfrm>
-                <a:off x="1233980" y="5672109"/>
-                <a:ext cx="737702" cy="246221"/>
-              </a:xfrm>
-              <a:prstGeom prst="rect">
-                <a:avLst/>
-              </a:prstGeom>
-              <a:noFill/>
-            </p:spPr>
-            <p:txBody>
-              <a:bodyPr wrap="none" rtlCol="0">
-                <a:spAutoFit/>
-              </a:bodyPr>
-              <a:lstStyle/>
-              <a:p>
-                <a:r>
-                  <a:rPr lang="fr-FR" sz="1000" dirty="0"/>
-                  <a:t>Infections</a:t>
-                </a:r>
-              </a:p>
-            </p:txBody>
-          </p:sp>
-          <p:sp>
-            <p:nvSpPr>
-              <p:cNvPr id="107" name="Forme libre 106">
-                <a:extLst>
-                  <a:ext uri="{FF2B5EF4-FFF2-40B4-BE49-F238E27FC236}">
-                    <a16:creationId xmlns:a16="http://schemas.microsoft.com/office/drawing/2014/main" id="{7BB99C58-179C-99F2-2784-522C0D52BBAC}"/>
-                  </a:ext>
-                </a:extLst>
-              </p:cNvPr>
-              <p:cNvSpPr/>
-              <p:nvPr/>
-            </p:nvSpPr>
-            <p:spPr>
-              <a:xfrm>
-                <a:off x="1302642" y="5923534"/>
-                <a:ext cx="422275" cy="441774"/>
-              </a:xfrm>
-              <a:custGeom>
-                <a:avLst/>
-                <a:gdLst>
-                  <a:gd name="connsiteX0" fmla="*/ 0 w 422275"/>
-                  <a:gd name="connsiteY0" fmla="*/ 397324 h 441774"/>
-                  <a:gd name="connsiteX1" fmla="*/ 101600 w 422275"/>
-                  <a:gd name="connsiteY1" fmla="*/ 449 h 441774"/>
-                  <a:gd name="connsiteX2" fmla="*/ 298450 w 422275"/>
-                  <a:gd name="connsiteY2" fmla="*/ 321124 h 441774"/>
-                  <a:gd name="connsiteX3" fmla="*/ 422275 w 422275"/>
-                  <a:gd name="connsiteY3" fmla="*/ 441774 h 441774"/>
-                </a:gdLst>
-                <a:ahLst/>
-                <a:cxnLst>
-                  <a:cxn ang="0">
-                    <a:pos x="connsiteX0" y="connsiteY0"/>
-                  </a:cxn>
-                  <a:cxn ang="0">
-                    <a:pos x="connsiteX1" y="connsiteY1"/>
-                  </a:cxn>
-                  <a:cxn ang="0">
-                    <a:pos x="connsiteX2" y="connsiteY2"/>
-                  </a:cxn>
-                  <a:cxn ang="0">
-                    <a:pos x="connsiteX3" y="connsiteY3"/>
-                  </a:cxn>
-                </a:cxnLst>
-                <a:rect l="l" t="t" r="r" b="b"/>
-                <a:pathLst>
-                  <a:path w="422275" h="441774">
-                    <a:moveTo>
-                      <a:pt x="0" y="397324"/>
-                    </a:moveTo>
-                    <a:cubicBezTo>
-                      <a:pt x="25929" y="205236"/>
-                      <a:pt x="51858" y="13149"/>
-                      <a:pt x="101600" y="449"/>
-                    </a:cubicBezTo>
-                    <a:cubicBezTo>
-                      <a:pt x="151342" y="-12251"/>
-                      <a:pt x="245004" y="247570"/>
-                      <a:pt x="298450" y="321124"/>
-                    </a:cubicBezTo>
-                    <a:cubicBezTo>
-                      <a:pt x="351896" y="394678"/>
-                      <a:pt x="380471" y="420607"/>
-                      <a:pt x="422275" y="441774"/>
-                    </a:cubicBezTo>
-                  </a:path>
-                </a:pathLst>
-              </a:custGeom>
-              <a:noFill/>
-              <a:ln w="6350"/>
-            </p:spPr>
-            <p:style>
-              <a:lnRef idx="2">
-                <a:schemeClr val="accent1">
-                  <a:shade val="15000"/>
-                </a:schemeClr>
-              </a:lnRef>
-              <a:fillRef idx="1">
-                <a:schemeClr val="accent1"/>
-              </a:fillRef>
-              <a:effectRef idx="0">
-                <a:schemeClr val="accent1"/>
-              </a:effectRef>
-              <a:fontRef idx="minor">
-                <a:schemeClr val="lt1"/>
-              </a:fontRef>
-            </p:style>
-            <p:txBody>
-              <a:bodyPr rtlCol="0" anchor="ctr"/>
-              <a:lstStyle/>
-              <a:p>
-                <a:pPr algn="ctr"/>
-                <a:endParaRPr lang="fr-FR"/>
-              </a:p>
-            </p:txBody>
-          </p:sp>
-          <p:sp>
-            <p:nvSpPr>
-              <p:cNvPr id="109" name="Forme libre 108">
-                <a:extLst>
-                  <a:ext uri="{FF2B5EF4-FFF2-40B4-BE49-F238E27FC236}">
-                    <a16:creationId xmlns:a16="http://schemas.microsoft.com/office/drawing/2014/main" id="{964A8179-8F3F-B6E8-6FAD-A28A80D859A7}"/>
-                  </a:ext>
-                </a:extLst>
-              </p:cNvPr>
-              <p:cNvSpPr/>
-              <p:nvPr/>
-            </p:nvSpPr>
-            <p:spPr>
-              <a:xfrm>
-                <a:off x="1308990" y="6327025"/>
-                <a:ext cx="928052" cy="45719"/>
-              </a:xfrm>
-              <a:custGeom>
-                <a:avLst/>
-                <a:gdLst>
-                  <a:gd name="connsiteX0" fmla="*/ 0 w 390525"/>
-                  <a:gd name="connsiteY0" fmla="*/ 3360 h 38285"/>
-                  <a:gd name="connsiteX1" fmla="*/ 152400 w 390525"/>
-                  <a:gd name="connsiteY1" fmla="*/ 3360 h 38285"/>
-                  <a:gd name="connsiteX2" fmla="*/ 390525 w 390525"/>
-                  <a:gd name="connsiteY2" fmla="*/ 38285 h 38285"/>
-                </a:gdLst>
-                <a:ahLst/>
-                <a:cxnLst>
-                  <a:cxn ang="0">
-                    <a:pos x="connsiteX0" y="connsiteY0"/>
-                  </a:cxn>
-                  <a:cxn ang="0">
-                    <a:pos x="connsiteX1" y="connsiteY1"/>
-                  </a:cxn>
-                  <a:cxn ang="0">
-                    <a:pos x="connsiteX2" y="connsiteY2"/>
-                  </a:cxn>
-                </a:cxnLst>
-                <a:rect l="l" t="t" r="r" b="b"/>
-                <a:pathLst>
-                  <a:path w="390525" h="38285">
-                    <a:moveTo>
-                      <a:pt x="0" y="3360"/>
-                    </a:moveTo>
-                    <a:cubicBezTo>
-                      <a:pt x="43656" y="449"/>
-                      <a:pt x="87313" y="-2461"/>
-                      <a:pt x="152400" y="3360"/>
-                    </a:cubicBezTo>
-                    <a:cubicBezTo>
-                      <a:pt x="217487" y="9181"/>
-                      <a:pt x="338138" y="22939"/>
-                      <a:pt x="390525" y="38285"/>
-                    </a:cubicBezTo>
-                  </a:path>
-                </a:pathLst>
-              </a:custGeom>
-              <a:noFill/>
-              <a:ln w="6350"/>
-            </p:spPr>
-            <p:style>
-              <a:lnRef idx="2">
-                <a:schemeClr val="accent1">
-                  <a:shade val="15000"/>
-                </a:schemeClr>
-              </a:lnRef>
-              <a:fillRef idx="1">
-                <a:schemeClr val="accent1"/>
-              </a:fillRef>
-              <a:effectRef idx="0">
-                <a:schemeClr val="accent1"/>
-              </a:effectRef>
-              <a:fontRef idx="minor">
-                <a:schemeClr val="lt1"/>
-              </a:fontRef>
-            </p:style>
-            <p:txBody>
-              <a:bodyPr rtlCol="0" anchor="ctr"/>
-              <a:lstStyle/>
-              <a:p>
-                <a:pPr algn="ctr"/>
-                <a:endParaRPr lang="fr-FR"/>
-              </a:p>
-            </p:txBody>
-          </p:sp>
-          <p:sp>
-            <p:nvSpPr>
-              <p:cNvPr id="110" name="Forme libre 109">
-                <a:extLst>
-                  <a:ext uri="{FF2B5EF4-FFF2-40B4-BE49-F238E27FC236}">
-                    <a16:creationId xmlns:a16="http://schemas.microsoft.com/office/drawing/2014/main" id="{B0AD613D-F365-97E9-FFC5-28289B13F38B}"/>
-                  </a:ext>
-                </a:extLst>
-              </p:cNvPr>
-              <p:cNvSpPr/>
-              <p:nvPr/>
-            </p:nvSpPr>
-            <p:spPr>
-              <a:xfrm>
-                <a:off x="1302642" y="6111158"/>
-                <a:ext cx="1012825" cy="238277"/>
-              </a:xfrm>
-              <a:custGeom>
-                <a:avLst/>
-                <a:gdLst>
-                  <a:gd name="connsiteX0" fmla="*/ 0 w 1012825"/>
-                  <a:gd name="connsiteY0" fmla="*/ 231927 h 238277"/>
-                  <a:gd name="connsiteX1" fmla="*/ 161925 w 1012825"/>
-                  <a:gd name="connsiteY1" fmla="*/ 152 h 238277"/>
-                  <a:gd name="connsiteX2" fmla="*/ 606425 w 1012825"/>
-                  <a:gd name="connsiteY2" fmla="*/ 197002 h 238277"/>
-                  <a:gd name="connsiteX3" fmla="*/ 1012825 w 1012825"/>
-                  <a:gd name="connsiteY3" fmla="*/ 238277 h 238277"/>
-                </a:gdLst>
-                <a:ahLst/>
-                <a:cxnLst>
-                  <a:cxn ang="0">
-                    <a:pos x="connsiteX0" y="connsiteY0"/>
-                  </a:cxn>
-                  <a:cxn ang="0">
-                    <a:pos x="connsiteX1" y="connsiteY1"/>
-                  </a:cxn>
-                  <a:cxn ang="0">
-                    <a:pos x="connsiteX2" y="connsiteY2"/>
-                  </a:cxn>
-                  <a:cxn ang="0">
-                    <a:pos x="connsiteX3" y="connsiteY3"/>
-                  </a:cxn>
-                </a:cxnLst>
-                <a:rect l="l" t="t" r="r" b="b"/>
-                <a:pathLst>
-                  <a:path w="1012825" h="238277">
-                    <a:moveTo>
-                      <a:pt x="0" y="231927"/>
-                    </a:moveTo>
-                    <a:cubicBezTo>
-                      <a:pt x="30427" y="118950"/>
-                      <a:pt x="60854" y="5973"/>
-                      <a:pt x="161925" y="152"/>
-                    </a:cubicBezTo>
-                    <a:cubicBezTo>
-                      <a:pt x="262996" y="-5669"/>
-                      <a:pt x="464608" y="157315"/>
-                      <a:pt x="606425" y="197002"/>
-                    </a:cubicBezTo>
-                    <a:cubicBezTo>
-                      <a:pt x="748242" y="236689"/>
-                      <a:pt x="880533" y="237483"/>
-                      <a:pt x="1012825" y="238277"/>
-                    </a:cubicBezTo>
-                  </a:path>
-                </a:pathLst>
-              </a:custGeom>
-              <a:noFill/>
-              <a:ln w="6350"/>
-            </p:spPr>
-            <p:style>
-              <a:lnRef idx="2">
-                <a:schemeClr val="accent1">
-                  <a:shade val="15000"/>
-                </a:schemeClr>
-              </a:lnRef>
-              <a:fillRef idx="1">
-                <a:schemeClr val="accent1"/>
-              </a:fillRef>
-              <a:effectRef idx="0">
-                <a:schemeClr val="accent1"/>
-              </a:effectRef>
-              <a:fontRef idx="minor">
-                <a:schemeClr val="lt1"/>
-              </a:fontRef>
-            </p:style>
-            <p:txBody>
-              <a:bodyPr rtlCol="0" anchor="ctr"/>
-              <a:lstStyle/>
-              <a:p>
-                <a:pPr algn="ctr"/>
-                <a:endParaRPr lang="fr-FR"/>
-              </a:p>
-            </p:txBody>
-          </p:sp>
-          <p:grpSp>
-            <p:nvGrpSpPr>
-              <p:cNvPr id="279" name="Groupe 278">
-                <a:extLst>
-                  <a:ext uri="{FF2B5EF4-FFF2-40B4-BE49-F238E27FC236}">
-                    <a16:creationId xmlns:a16="http://schemas.microsoft.com/office/drawing/2014/main" id="{132E4A79-45A0-2632-E41C-1AEDAB7A804E}"/>
-                  </a:ext>
-                </a:extLst>
-              </p:cNvPr>
-              <p:cNvGrpSpPr/>
-              <p:nvPr/>
-            </p:nvGrpSpPr>
-            <p:grpSpPr>
-              <a:xfrm>
-                <a:off x="338854" y="6071469"/>
-                <a:ext cx="578622" cy="410400"/>
-                <a:chOff x="1310585" y="6120818"/>
-                <a:chExt cx="578622" cy="410400"/>
-              </a:xfrm>
-            </p:grpSpPr>
-            <p:cxnSp>
-              <p:nvCxnSpPr>
-                <p:cNvPr id="29" name="Connecteur droit avec flèche 28">
-                  <a:extLst>
-                    <a:ext uri="{FF2B5EF4-FFF2-40B4-BE49-F238E27FC236}">
-                      <a16:creationId xmlns:a16="http://schemas.microsoft.com/office/drawing/2014/main" id="{187C75C2-AD88-69C2-99ED-301B980FE7D3}"/>
-                    </a:ext>
-                  </a:extLst>
-                </p:cNvPr>
-                <p:cNvCxnSpPr>
-                  <a:cxnSpLocks/>
-                </p:cNvCxnSpPr>
-                <p:nvPr/>
-              </p:nvCxnSpPr>
-              <p:spPr>
-                <a:xfrm>
-                  <a:off x="1310585" y="6173018"/>
-                  <a:ext cx="0" cy="306000"/>
-                </a:xfrm>
-                <a:prstGeom prst="straightConnector1">
-                  <a:avLst/>
-                </a:prstGeom>
-                <a:ln w="12700">
-                  <a:solidFill>
-                    <a:schemeClr val="accent5"/>
-                  </a:solidFill>
-                  <a:tailEnd type="stealth" w="sm" len="sm"/>
-                </a:ln>
-              </p:spPr>
-              <p:style>
-                <a:lnRef idx="2">
-                  <a:schemeClr val="accent1"/>
-                </a:lnRef>
-                <a:fillRef idx="0">
-                  <a:schemeClr val="accent1"/>
-                </a:fillRef>
-                <a:effectRef idx="1">
-                  <a:schemeClr val="accent1"/>
-                </a:effectRef>
-                <a:fontRef idx="minor">
-                  <a:schemeClr val="tx1"/>
-                </a:fontRef>
-              </p:style>
-            </p:cxnSp>
-            <p:cxnSp>
-              <p:nvCxnSpPr>
-                <p:cNvPr id="30" name="Connecteur droit avec flèche 29">
-                  <a:extLst>
-                    <a:ext uri="{FF2B5EF4-FFF2-40B4-BE49-F238E27FC236}">
-                      <a16:creationId xmlns:a16="http://schemas.microsoft.com/office/drawing/2014/main" id="{85DCDF90-26D5-C3CF-C43A-F2299AB106D6}"/>
-                    </a:ext>
-                  </a:extLst>
-                </p:cNvPr>
-                <p:cNvCxnSpPr>
-                  <a:cxnSpLocks/>
-                </p:cNvCxnSpPr>
-                <p:nvPr/>
-              </p:nvCxnSpPr>
-              <p:spPr>
-                <a:xfrm flipV="1">
-                  <a:off x="1353631" y="6173018"/>
-                  <a:ext cx="0" cy="306000"/>
-                </a:xfrm>
-                <a:prstGeom prst="straightConnector1">
-                  <a:avLst/>
-                </a:prstGeom>
-                <a:ln w="12700">
-                  <a:solidFill>
-                    <a:schemeClr val="accent5"/>
-                  </a:solidFill>
-                  <a:tailEnd type="stealth" w="sm" len="sm"/>
-                </a:ln>
-              </p:spPr>
-              <p:style>
-                <a:lnRef idx="2">
-                  <a:schemeClr val="accent1"/>
-                </a:lnRef>
-                <a:fillRef idx="0">
-                  <a:schemeClr val="accent1"/>
-                </a:fillRef>
-                <a:effectRef idx="1">
-                  <a:schemeClr val="accent1"/>
-                </a:effectRef>
-                <a:fontRef idx="minor">
-                  <a:schemeClr val="tx1"/>
-                </a:fontRef>
-              </p:style>
-            </p:cxnSp>
-            <p:pic>
-              <p:nvPicPr>
-                <p:cNvPr id="271" name="Graphique 270" descr="Venteux contour">
-                  <a:extLst>
-                    <a:ext uri="{FF2B5EF4-FFF2-40B4-BE49-F238E27FC236}">
-                      <a16:creationId xmlns:a16="http://schemas.microsoft.com/office/drawing/2014/main" id="{BDE0CC41-FB5E-59BF-9322-490BE874972E}"/>
-                    </a:ext>
-                  </a:extLst>
-                </p:cNvPr>
-                <p:cNvPicPr>
-                  <a:picLocks noChangeAspect="1"/>
-                </p:cNvPicPr>
-                <p:nvPr/>
-              </p:nvPicPr>
-              <p:blipFill>
-                <a:blip>
-                  <a:extLst>
-                    <a:ext uri="{96DAC541-7B7A-43D3-8B79-37D633B846F1}">
-                      <asvg:svgBlip xmlns:asvg="http://schemas.microsoft.com/office/drawing/2016/SVG/main" r:embed="rId4"/>
-                    </a:ext>
-                  </a:extLst>
-                </a:blip>
-                <a:stretch>
-                  <a:fillRect/>
-                </a:stretch>
-              </p:blipFill>
-              <p:spPr>
-                <a:xfrm>
-                  <a:off x="1478807" y="6120818"/>
-                  <a:ext cx="410400" cy="410400"/>
-                </a:xfrm>
-                <a:prstGeom prst="rect">
-                  <a:avLst/>
-                </a:prstGeom>
-              </p:spPr>
-            </p:pic>
-          </p:grpSp>
-          <p:grpSp>
-            <p:nvGrpSpPr>
-              <p:cNvPr id="278" name="Groupe 277">
-                <a:extLst>
-                  <a:ext uri="{FF2B5EF4-FFF2-40B4-BE49-F238E27FC236}">
-                    <a16:creationId xmlns:a16="http://schemas.microsoft.com/office/drawing/2014/main" id="{AA15B6FA-1414-D852-7861-9AB0171D3DCB}"/>
-                  </a:ext>
-                </a:extLst>
-              </p:cNvPr>
-              <p:cNvGrpSpPr/>
-              <p:nvPr/>
-            </p:nvGrpSpPr>
-            <p:grpSpPr>
-              <a:xfrm>
-                <a:off x="339919" y="5663057"/>
-                <a:ext cx="576493" cy="415348"/>
-                <a:chOff x="1315188" y="5655256"/>
-                <a:chExt cx="576493" cy="415348"/>
-              </a:xfrm>
-            </p:grpSpPr>
-            <p:cxnSp>
-              <p:nvCxnSpPr>
-                <p:cNvPr id="19" name="Connecteur droit avec flèche 18">
-                  <a:extLst>
-                    <a:ext uri="{FF2B5EF4-FFF2-40B4-BE49-F238E27FC236}">
-                      <a16:creationId xmlns:a16="http://schemas.microsoft.com/office/drawing/2014/main" id="{FB71DC50-8D82-94FE-C4E5-4BC3AB899462}"/>
-                    </a:ext>
-                  </a:extLst>
-                </p:cNvPr>
-                <p:cNvCxnSpPr>
-                  <a:cxnSpLocks/>
-                </p:cNvCxnSpPr>
-                <p:nvPr/>
-              </p:nvCxnSpPr>
-              <p:spPr>
-                <a:xfrm>
-                  <a:off x="1315188" y="5709930"/>
-                  <a:ext cx="0" cy="306000"/>
-                </a:xfrm>
-                <a:prstGeom prst="straightConnector1">
-                  <a:avLst/>
-                </a:prstGeom>
-                <a:ln w="12700">
-                  <a:solidFill>
-                    <a:schemeClr val="accent2"/>
-                  </a:solidFill>
-                  <a:tailEnd type="stealth" w="sm" len="sm"/>
-                </a:ln>
-              </p:spPr>
-              <p:style>
-                <a:lnRef idx="2">
-                  <a:schemeClr val="accent1"/>
-                </a:lnRef>
-                <a:fillRef idx="0">
-                  <a:schemeClr val="accent1"/>
-                </a:fillRef>
-                <a:effectRef idx="1">
-                  <a:schemeClr val="accent1"/>
-                </a:effectRef>
-                <a:fontRef idx="minor">
-                  <a:schemeClr val="tx1"/>
-                </a:fontRef>
-              </p:style>
-            </p:cxnSp>
-            <p:cxnSp>
-              <p:nvCxnSpPr>
-                <p:cNvPr id="21" name="Connecteur droit avec flèche 20">
-                  <a:extLst>
-                    <a:ext uri="{FF2B5EF4-FFF2-40B4-BE49-F238E27FC236}">
-                      <a16:creationId xmlns:a16="http://schemas.microsoft.com/office/drawing/2014/main" id="{BA6A455D-687D-2C28-1B8F-3A1EFE9AF6CE}"/>
-                    </a:ext>
-                  </a:extLst>
-                </p:cNvPr>
-                <p:cNvCxnSpPr>
-                  <a:cxnSpLocks/>
-                </p:cNvCxnSpPr>
-                <p:nvPr/>
-              </p:nvCxnSpPr>
-              <p:spPr>
-                <a:xfrm flipV="1">
-                  <a:off x="1358234" y="5709930"/>
-                  <a:ext cx="0" cy="306000"/>
-                </a:xfrm>
-                <a:prstGeom prst="straightConnector1">
-                  <a:avLst/>
-                </a:prstGeom>
-                <a:ln w="12700">
-                  <a:solidFill>
-                    <a:schemeClr val="accent2"/>
-                  </a:solidFill>
-                  <a:tailEnd type="stealth" w="sm" len="sm"/>
-                </a:ln>
-              </p:spPr>
-              <p:style>
-                <a:lnRef idx="2">
-                  <a:schemeClr val="accent1"/>
-                </a:lnRef>
-                <a:fillRef idx="0">
-                  <a:schemeClr val="accent1"/>
-                </a:fillRef>
-                <a:effectRef idx="1">
-                  <a:schemeClr val="accent1"/>
-                </a:effectRef>
-                <a:fontRef idx="minor">
-                  <a:schemeClr val="tx1"/>
-                </a:fontRef>
-              </p:style>
-            </p:cxnSp>
-            <p:pic>
-              <p:nvPicPr>
-                <p:cNvPr id="272" name="Graphique 271" descr="Salle de conseil contour">
-                  <a:extLst>
-                    <a:ext uri="{FF2B5EF4-FFF2-40B4-BE49-F238E27FC236}">
-                      <a16:creationId xmlns:a16="http://schemas.microsoft.com/office/drawing/2014/main" id="{7AC04F8E-4B33-A606-0DA2-B4E5B26F2ADE}"/>
-                    </a:ext>
-                  </a:extLst>
-                </p:cNvPr>
-                <p:cNvPicPr>
-                  <a:picLocks noChangeAspect="1"/>
-                </p:cNvPicPr>
-                <p:nvPr/>
-              </p:nvPicPr>
-              <p:blipFill>
-                <a:blip>
-                  <a:extLst>
-                    <a:ext uri="{96DAC541-7B7A-43D3-8B79-37D633B846F1}">
-                      <asvg:svgBlip xmlns:asvg="http://schemas.microsoft.com/office/drawing/2016/SVG/main" r:embed="rId5"/>
-                    </a:ext>
-                  </a:extLst>
-                </a:blip>
-                <a:stretch>
-                  <a:fillRect/>
-                </a:stretch>
-              </p:blipFill>
-              <p:spPr>
-                <a:xfrm>
-                  <a:off x="1476333" y="5655256"/>
-                  <a:ext cx="415348" cy="415348"/>
-                </a:xfrm>
-                <a:prstGeom prst="rect">
-                  <a:avLst/>
-                </a:prstGeom>
-              </p:spPr>
-            </p:pic>
-          </p:grpSp>
-        </p:grpSp>
-        <p:grpSp>
-          <p:nvGrpSpPr>
-            <p:cNvPr id="12" name="Groupe 11">
-              <a:extLst>
-                <a:ext uri="{FF2B5EF4-FFF2-40B4-BE49-F238E27FC236}">
-                  <a16:creationId xmlns:a16="http://schemas.microsoft.com/office/drawing/2014/main" id="{E9AFAE50-BF0E-3DC1-199A-C34D4CDB5E0C}"/>
-                </a:ext>
-              </a:extLst>
-            </p:cNvPr>
-            <p:cNvGrpSpPr/>
-            <p:nvPr/>
-          </p:nvGrpSpPr>
-          <p:grpSpPr>
-            <a:xfrm>
-              <a:off x="2290412" y="6936999"/>
-              <a:ext cx="2965230" cy="1199250"/>
-              <a:chOff x="8310219" y="4586848"/>
-              <a:chExt cx="2965230" cy="1199250"/>
-            </a:xfrm>
-          </p:grpSpPr>
-          <p:sp>
-            <p:nvSpPr>
-              <p:cNvPr id="267" name="Rectangle : coins arrondis 266">
-                <a:extLst>
-                  <a:ext uri="{FF2B5EF4-FFF2-40B4-BE49-F238E27FC236}">
-                    <a16:creationId xmlns:a16="http://schemas.microsoft.com/office/drawing/2014/main" id="{973002A9-0607-A891-8CB6-22491FDBB6DE}"/>
-                  </a:ext>
-                </a:extLst>
-              </p:cNvPr>
-              <p:cNvSpPr/>
-              <p:nvPr/>
-            </p:nvSpPr>
-            <p:spPr>
-              <a:xfrm>
-                <a:off x="8397471" y="4586848"/>
-                <a:ext cx="2877978" cy="1164782"/>
-              </a:xfrm>
-              <a:prstGeom prst="roundRect">
-                <a:avLst>
-                  <a:gd name="adj" fmla="val 7929"/>
-                </a:avLst>
-              </a:prstGeom>
-              <a:solidFill>
-                <a:schemeClr val="tx2">
-                  <a:lumMod val="10000"/>
-                  <a:lumOff val="90000"/>
-                </a:schemeClr>
-              </a:solidFill>
-              <a:ln w="12700">
-                <a:solidFill>
-                  <a:schemeClr val="tx2"/>
-                </a:solidFill>
-              </a:ln>
-            </p:spPr>
-            <p:style>
-              <a:lnRef idx="2">
-                <a:schemeClr val="accent1">
-                  <a:shade val="15000"/>
-                </a:schemeClr>
-              </a:lnRef>
-              <a:fillRef idx="1">
-                <a:schemeClr val="accent1"/>
-              </a:fillRef>
-              <a:effectRef idx="0">
-                <a:schemeClr val="accent1"/>
-              </a:effectRef>
-              <a:fontRef idx="minor">
-                <a:schemeClr val="lt1"/>
-              </a:fontRef>
-            </p:style>
-            <p:txBody>
-              <a:bodyPr rtlCol="0" anchor="ctr"/>
-              <a:lstStyle/>
-              <a:p>
-                <a:pPr algn="ctr"/>
-                <a:endParaRPr lang="fr-FR" sz="1013" dirty="0"/>
-              </a:p>
-            </p:txBody>
-          </p:sp>
-          <p:sp>
-            <p:nvSpPr>
-              <p:cNvPr id="269" name="ZoneTexte 268">
-                <a:extLst>
-                  <a:ext uri="{FF2B5EF4-FFF2-40B4-BE49-F238E27FC236}">
-                    <a16:creationId xmlns:a16="http://schemas.microsoft.com/office/drawing/2014/main" id="{BA29F100-E9F4-66D0-6375-5174416AAB45}"/>
-                  </a:ext>
-                </a:extLst>
-              </p:cNvPr>
-              <p:cNvSpPr txBox="1"/>
-              <p:nvPr/>
-            </p:nvSpPr>
-            <p:spPr>
-              <a:xfrm>
-                <a:off x="8999532" y="4586848"/>
-                <a:ext cx="1673856" cy="261610"/>
-              </a:xfrm>
-              <a:prstGeom prst="rect">
-                <a:avLst/>
-              </a:prstGeom>
-              <a:noFill/>
-              <a:ln>
-                <a:noFill/>
-              </a:ln>
-            </p:spPr>
-            <p:txBody>
-              <a:bodyPr wrap="none" rtlCol="0">
-                <a:spAutoFit/>
-              </a:bodyPr>
-              <a:lstStyle>
-                <a:defPPr>
-                  <a:defRPr lang="fr-FR"/>
-                </a:defPPr>
-                <a:lvl1pPr algn="ctr">
-                  <a:defRPr sz="1000"/>
-                </a:lvl1pPr>
-              </a:lstStyle>
-              <a:p>
-                <a:r>
-                  <a:rPr lang="fr-FR" sz="1100" b="1" dirty="0">
-                    <a:solidFill>
-                      <a:schemeClr val="tx2"/>
-                    </a:solidFill>
-                  </a:rPr>
-                  <a:t>Intervention </a:t>
-                </a:r>
-                <a:r>
-                  <a:rPr lang="fr-FR" sz="1100" b="1" dirty="0" err="1">
-                    <a:solidFill>
-                      <a:schemeClr val="tx2"/>
-                    </a:solidFill>
-                  </a:rPr>
-                  <a:t>evaluation</a:t>
-                </a:r>
-                <a:endParaRPr lang="fr-FR" sz="1100" b="1" dirty="0">
-                  <a:solidFill>
-                    <a:schemeClr val="tx2"/>
-                  </a:solidFill>
-                </a:endParaRPr>
-              </a:p>
-            </p:txBody>
-          </p:sp>
-          <p:graphicFrame>
-            <p:nvGraphicFramePr>
-              <p:cNvPr id="287" name="Graphique 286">
-                <a:extLst>
-                  <a:ext uri="{FF2B5EF4-FFF2-40B4-BE49-F238E27FC236}">
-                    <a16:creationId xmlns:a16="http://schemas.microsoft.com/office/drawing/2014/main" id="{E227E4F4-63AB-B633-B21A-E620A71B3B3D}"/>
-                  </a:ext>
-                </a:extLst>
-              </p:cNvPr>
-              <p:cNvGraphicFramePr/>
-              <p:nvPr>
-                <p:extLst>
-                  <p:ext uri="{D42A27DB-BD31-4B8C-83A1-F6EECF244321}">
-                    <p14:modId xmlns:p14="http://schemas.microsoft.com/office/powerpoint/2010/main" val="3140596778"/>
-                  </p:ext>
-                </p:extLst>
-              </p:nvPr>
-            </p:nvGraphicFramePr>
-            <p:xfrm>
-              <a:off x="8310219" y="4727456"/>
-              <a:ext cx="2912287" cy="1058642"/>
-            </p:xfrm>
-            <a:graphic>
-              <a:graphicData uri="http://schemas.openxmlformats.org/drawingml/2006/chart">
-                <c:chart xmlns:c="http://schemas.openxmlformats.org/drawingml/2006/chart" xmlns:r="http://schemas.openxmlformats.org/officeDocument/2006/relationships" r:id="rId6"/>
-              </a:graphicData>
-            </a:graphic>
-          </p:graphicFrame>
-        </p:grpSp>
+            <p:cNvGraphicFramePr/>
+            <p:nvPr>
+              <p:extLst>
+                <p:ext uri="{D42A27DB-BD31-4B8C-83A1-F6EECF244321}">
+                  <p14:modId xmlns:p14="http://schemas.microsoft.com/office/powerpoint/2010/main" val="3140596778"/>
+                </p:ext>
+              </p:extLst>
+            </p:nvPr>
+          </p:nvGraphicFramePr>
+          <p:xfrm>
+            <a:off x="8310219" y="4727456"/>
+            <a:ext cx="2912287" cy="1058642"/>
+          </p:xfrm>
+          <a:graphic>
+            <a:graphicData uri="http://schemas.openxmlformats.org/drawingml/2006/chart">
+              <c:chart xmlns:c="http://schemas.openxmlformats.org/drawingml/2006/chart" xmlns:r="http://schemas.openxmlformats.org/officeDocument/2006/relationships" r:id="rId3"/>
+            </a:graphicData>
+          </a:graphic>
+        </p:graphicFrame>
       </p:grpSp>
       <p:sp>
         <p:nvSpPr>
@@ -13867,8 +13672,8 @@
             </a:p>
           </p:txBody>
         </p:sp>
-        <mc:AlternateContent xmlns:mc="http://schemas.openxmlformats.org/markup-compatibility/2006">
-          <mc:Choice xmlns:a14="http://schemas.microsoft.com/office/drawing/2010/main" Requires="a14">
+        <mc:AlternateContent xmlns:mc="http://schemas.openxmlformats.org/markup-compatibility/2006" xmlns:a14="http://schemas.microsoft.com/office/drawing/2010/main">
+          <mc:Choice Requires="a14">
             <p:sp>
               <p:nvSpPr>
                 <p:cNvPr id="31" name="ZoneTexte 30">
@@ -14232,7 +14037,7 @@
               </p:txBody>
             </p:sp>
           </mc:Choice>
-          <mc:Fallback>
+          <mc:Fallback xmlns="">
             <p:sp>
               <p:nvSpPr>
                 <p:cNvPr id="31" name="ZoneTexte 30">
@@ -14277,8 +14082,8 @@
             </p:sp>
           </mc:Fallback>
         </mc:AlternateContent>
-        <mc:AlternateContent xmlns:mc="http://schemas.openxmlformats.org/markup-compatibility/2006">
-          <mc:Choice xmlns:a14="http://schemas.microsoft.com/office/drawing/2010/main" Requires="a14">
+        <mc:AlternateContent xmlns:mc="http://schemas.openxmlformats.org/markup-compatibility/2006" xmlns:a14="http://schemas.microsoft.com/office/drawing/2010/main">
+          <mc:Choice Requires="a14">
             <p:sp>
               <p:nvSpPr>
                 <p:cNvPr id="32" name="ZoneTexte 31">
@@ -14762,7 +14567,7 @@
               </p:txBody>
             </p:sp>
           </mc:Choice>
-          <mc:Fallback>
+          <mc:Fallback xmlns="">
             <p:sp>
               <p:nvSpPr>
                 <p:cNvPr id="32" name="ZoneTexte 31">
@@ -14929,78 +14734,6 @@
             </a:p>
           </p:txBody>
         </p:sp>
-        <p:pic>
-          <p:nvPicPr>
-            <p:cNvPr id="36" name="Graphique 35" descr="Venteux contour">
-              <a:extLst>
-                <a:ext uri="{FF2B5EF4-FFF2-40B4-BE49-F238E27FC236}">
-                  <a16:creationId xmlns:a16="http://schemas.microsoft.com/office/drawing/2014/main" id="{23D1ECA3-C4F5-1CB3-1521-64D55297EA36}"/>
-                </a:ext>
-              </a:extLst>
-            </p:cNvPr>
-            <p:cNvPicPr>
-              <a:picLocks noChangeAspect="1"/>
-            </p:cNvPicPr>
-            <p:nvPr/>
-          </p:nvPicPr>
-          <p:blipFill>
-            <a:blip>
-              <a:extLst>
-                <a:ext uri="{96DAC541-7B7A-43D3-8B79-37D633B846F1}">
-                  <asvg:svgBlip xmlns:asvg="http://schemas.microsoft.com/office/drawing/2016/SVG/main" r:embed="rId4"/>
-                </a:ext>
-              </a:extLst>
-            </a:blip>
-            <a:stretch>
-              <a:fillRect/>
-            </a:stretch>
-          </p:blipFill>
-          <p:spPr>
-            <a:xfrm>
-              <a:off x="1923898" y="4325531"/>
-              <a:ext cx="410400" cy="410400"/>
-            </a:xfrm>
-            <a:prstGeom prst="rect">
-              <a:avLst/>
-            </a:prstGeom>
-          </p:spPr>
-        </p:pic>
-        <p:pic>
-          <p:nvPicPr>
-            <p:cNvPr id="38" name="Graphique 37" descr="Salle de conseil contour">
-              <a:extLst>
-                <a:ext uri="{FF2B5EF4-FFF2-40B4-BE49-F238E27FC236}">
-                  <a16:creationId xmlns:a16="http://schemas.microsoft.com/office/drawing/2014/main" id="{CFAA17D9-5BA8-4E34-BB5D-2CD5CF263379}"/>
-                </a:ext>
-              </a:extLst>
-            </p:cNvPr>
-            <p:cNvPicPr>
-              <a:picLocks noChangeAspect="1"/>
-            </p:cNvPicPr>
-            <p:nvPr/>
-          </p:nvPicPr>
-          <p:blipFill>
-            <a:blip>
-              <a:extLst>
-                <a:ext uri="{96DAC541-7B7A-43D3-8B79-37D633B846F1}">
-                  <asvg:svgBlip xmlns:asvg="http://schemas.microsoft.com/office/drawing/2016/SVG/main" r:embed="rId5"/>
-                </a:ext>
-              </a:extLst>
-            </a:blip>
-            <a:stretch>
-              <a:fillRect/>
-            </a:stretch>
-          </p:blipFill>
-          <p:spPr>
-            <a:xfrm>
-              <a:off x="1921424" y="3884427"/>
-              <a:ext cx="415348" cy="415348"/>
-            </a:xfrm>
-            <a:prstGeom prst="rect">
-              <a:avLst/>
-            </a:prstGeom>
-          </p:spPr>
-        </p:pic>
         <p:sp>
           <p:nvSpPr>
             <p:cNvPr id="190" name="ZoneTexte 189">
@@ -15144,78 +14877,6 @@
           </a:fontRef>
         </p:style>
       </p:cxnSp>
-      <p:pic>
-        <p:nvPicPr>
-          <p:cNvPr id="296" name="Graphique 295" descr="Groupe d’hommes contour">
-            <a:extLst>
-              <a:ext uri="{FF2B5EF4-FFF2-40B4-BE49-F238E27FC236}">
-                <a16:creationId xmlns:a16="http://schemas.microsoft.com/office/drawing/2014/main" id="{D08F7996-C284-6EF5-4647-CCE30C554E90}"/>
-              </a:ext>
-            </a:extLst>
-          </p:cNvPr>
-          <p:cNvPicPr>
-            <a:picLocks noChangeAspect="1"/>
-          </p:cNvPicPr>
-          <p:nvPr/>
-        </p:nvPicPr>
-        <p:blipFill>
-          <a:blip>
-            <a:extLst>
-              <a:ext uri="{96DAC541-7B7A-43D3-8B79-37D633B846F1}">
-                <asvg:svgBlip xmlns:asvg="http://schemas.microsoft.com/office/drawing/2016/SVG/main" r:embed="rId9"/>
-              </a:ext>
-            </a:extLst>
-          </a:blip>
-          <a:stretch>
-            <a:fillRect/>
-          </a:stretch>
-        </p:blipFill>
-        <p:spPr>
-          <a:xfrm>
-            <a:off x="242787" y="7328938"/>
-            <a:ext cx="302400" cy="302400"/>
-          </a:xfrm>
-          <a:prstGeom prst="rect">
-            <a:avLst/>
-          </a:prstGeom>
-        </p:spPr>
-      </p:pic>
-      <p:pic>
-        <p:nvPicPr>
-          <p:cNvPr id="297" name="Graphique 296" descr="Homme contour">
-            <a:extLst>
-              <a:ext uri="{FF2B5EF4-FFF2-40B4-BE49-F238E27FC236}">
-                <a16:creationId xmlns:a16="http://schemas.microsoft.com/office/drawing/2014/main" id="{5AC0BB10-D712-4C7A-AA91-D71B54D414A5}"/>
-              </a:ext>
-            </a:extLst>
-          </p:cNvPr>
-          <p:cNvPicPr>
-            <a:picLocks noChangeAspect="1"/>
-          </p:cNvPicPr>
-          <p:nvPr/>
-        </p:nvPicPr>
-        <p:blipFill>
-          <a:blip>
-            <a:extLst>
-              <a:ext uri="{96DAC541-7B7A-43D3-8B79-37D633B846F1}">
-                <asvg:svgBlip xmlns:asvg="http://schemas.microsoft.com/office/drawing/2016/SVG/main" r:embed="rId10"/>
-              </a:ext>
-            </a:extLst>
-          </a:blip>
-          <a:stretch>
-            <a:fillRect/>
-          </a:stretch>
-        </p:blipFill>
-        <p:spPr>
-          <a:xfrm>
-            <a:off x="242787" y="6451653"/>
-            <a:ext cx="302400" cy="302400"/>
-          </a:xfrm>
-          <a:prstGeom prst="rect">
-            <a:avLst/>
-          </a:prstGeom>
-        </p:spPr>
-      </p:pic>
       <p:sp>
         <p:nvSpPr>
           <p:cNvPr id="106" name="Rectangle : coins arrondis 105">
@@ -15329,187 +14990,166 @@
           </a:p>
         </p:txBody>
       </p:sp>
-      <p:grpSp>
-        <p:nvGrpSpPr>
-          <p:cNvPr id="263" name="Groupe 262">
+      <p:sp>
+        <p:nvSpPr>
+          <p:cNvPr id="77" name="Rectangle : coins arrondis 76">
             <a:extLst>
               <a:ext uri="{FF2B5EF4-FFF2-40B4-BE49-F238E27FC236}">
-                <a16:creationId xmlns:a16="http://schemas.microsoft.com/office/drawing/2014/main" id="{7F887A19-F2BA-32B3-54FB-78A8EC76EE0B}"/>
+                <a16:creationId xmlns:a16="http://schemas.microsoft.com/office/drawing/2014/main" id="{18778D5D-0839-ED27-9F6D-1A408B105337}"/>
               </a:ext>
             </a:extLst>
           </p:cNvPr>
-          <p:cNvGrpSpPr/>
+          <p:cNvSpPr/>
           <p:nvPr/>
-        </p:nvGrpSpPr>
-        <p:grpSpPr>
+        </p:nvSpPr>
+        <p:spPr>
           <a:xfrm>
             <a:off x="4175145" y="2376549"/>
             <a:ext cx="1927177" cy="994004"/>
-            <a:chOff x="3741732" y="2443920"/>
-            <a:chExt cx="1927177" cy="555432"/>
           </a:xfrm>
-        </p:grpSpPr>
-        <p:sp>
-          <p:nvSpPr>
-            <p:cNvPr id="77" name="Rectangle : coins arrondis 76">
-              <a:extLst>
-                <a:ext uri="{FF2B5EF4-FFF2-40B4-BE49-F238E27FC236}">
-                  <a16:creationId xmlns:a16="http://schemas.microsoft.com/office/drawing/2014/main" id="{18778D5D-0839-ED27-9F6D-1A408B105337}"/>
-                </a:ext>
-              </a:extLst>
-            </p:cNvPr>
-            <p:cNvSpPr/>
-            <p:nvPr/>
-          </p:nvSpPr>
-          <p:spPr>
-            <a:xfrm>
-              <a:off x="3741732" y="2443920"/>
-              <a:ext cx="1927177" cy="555432"/>
-            </a:xfrm>
-            <a:prstGeom prst="roundRect">
-              <a:avLst>
-                <a:gd name="adj" fmla="val 7929"/>
-              </a:avLst>
-            </a:prstGeom>
+          <a:prstGeom prst="roundRect">
+            <a:avLst>
+              <a:gd name="adj" fmla="val 7929"/>
+            </a:avLst>
+          </a:prstGeom>
+          <a:solidFill>
+            <a:schemeClr val="tx2">
+              <a:lumMod val="10000"/>
+              <a:lumOff val="90000"/>
+            </a:schemeClr>
+          </a:solidFill>
+          <a:ln w="12700">
             <a:solidFill>
-              <a:schemeClr val="tx2">
-                <a:lumMod val="10000"/>
-                <a:lumOff val="90000"/>
-              </a:schemeClr>
+              <a:schemeClr val="tx2"/>
             </a:solidFill>
-            <a:ln w="12700">
+          </a:ln>
+        </p:spPr>
+        <p:style>
+          <a:lnRef idx="2">
+            <a:schemeClr val="accent1">
+              <a:shade val="15000"/>
+            </a:schemeClr>
+          </a:lnRef>
+          <a:fillRef idx="1">
+            <a:schemeClr val="accent1"/>
+          </a:fillRef>
+          <a:effectRef idx="0">
+            <a:schemeClr val="accent1"/>
+          </a:effectRef>
+          <a:fontRef idx="minor">
+            <a:schemeClr val="lt1"/>
+          </a:fontRef>
+        </p:style>
+        <p:txBody>
+          <a:bodyPr rtlCol="0" anchor="ctr"/>
+          <a:lstStyle/>
+          <a:p>
+            <a:pPr algn="r"/>
+            <a:endParaRPr lang="fr-FR" sz="1050" dirty="0">
+              <a:solidFill>
+                <a:schemeClr val="tx1"/>
+              </a:solidFill>
+            </a:endParaRPr>
+          </a:p>
+          <a:p>
+            <a:r>
+              <a:rPr lang="fr-FR" sz="1050" dirty="0">
+                <a:solidFill>
+                  <a:schemeClr val="tx1"/>
+                </a:solidFill>
+              </a:rPr>
+              <a:t>              </a:t>
+            </a:r>
+            <a:r>
+              <a:rPr lang="fr-FR" sz="1050" dirty="0" err="1">
+                <a:solidFill>
+                  <a:schemeClr val="tx1"/>
+                </a:solidFill>
+              </a:rPr>
+              <a:t>Individual</a:t>
+            </a:r>
+            <a:r>
+              <a:rPr lang="fr-FR" sz="1050" dirty="0">
+                <a:solidFill>
+                  <a:schemeClr val="tx1"/>
+                </a:solidFill>
+              </a:rPr>
+              <a:t> locations </a:t>
+            </a:r>
+          </a:p>
+          <a:p>
+            <a:endParaRPr lang="fr-FR" sz="1400" dirty="0">
+              <a:solidFill>
+                <a:schemeClr val="tx1"/>
+              </a:solidFill>
+            </a:endParaRPr>
+          </a:p>
+          <a:p>
+            <a:r>
+              <a:rPr lang="fr-FR" sz="1050" dirty="0">
+                <a:solidFill>
+                  <a:schemeClr val="tx1"/>
+                </a:solidFill>
+              </a:rPr>
+              <a:t>              Contacts</a:t>
+            </a:r>
+          </a:p>
+        </p:txBody>
+      </p:sp>
+      <p:sp>
+        <p:nvSpPr>
+          <p:cNvPr id="79" name="ZoneTexte 78">
+            <a:extLst>
+              <a:ext uri="{FF2B5EF4-FFF2-40B4-BE49-F238E27FC236}">
+                <a16:creationId xmlns:a16="http://schemas.microsoft.com/office/drawing/2014/main" id="{C93BFDBC-D0B2-0856-2F17-5429ED486E88}"/>
+              </a:ext>
+            </a:extLst>
+          </p:cNvPr>
+          <p:cNvSpPr txBox="1"/>
+          <p:nvPr/>
+        </p:nvSpPr>
+        <p:spPr>
+          <a:xfrm>
+            <a:off x="4893313" y="2387591"/>
+            <a:ext cx="490840" cy="261610"/>
+          </a:xfrm>
+          <a:prstGeom prst="rect">
+            <a:avLst/>
+          </a:prstGeom>
+          <a:noFill/>
+          <a:ln>
+            <a:noFill/>
+          </a:ln>
+        </p:spPr>
+        <p:txBody>
+          <a:bodyPr wrap="none" rtlCol="0">
+            <a:spAutoFit/>
+          </a:bodyPr>
+          <a:lstStyle>
+            <a:defPPr>
+              <a:defRPr lang="fr-FR"/>
+            </a:defPPr>
+            <a:lvl1pPr algn="ctr">
+              <a:defRPr sz="1000"/>
+            </a:lvl1pPr>
+          </a:lstStyle>
+          <a:p>
+            <a:r>
+              <a:rPr lang="fr-FR" sz="1100" b="1" dirty="0">
+                <a:solidFill>
+                  <a:schemeClr val="tx2"/>
+                </a:solidFill>
+              </a:rPr>
+              <a:t>Data</a:t>
+            </a:r>
+            <a:endParaRPr lang="fr-FR" b="1" dirty="0">
               <a:solidFill>
                 <a:schemeClr val="tx2"/>
               </a:solidFill>
-            </a:ln>
-          </p:spPr>
-          <p:style>
-            <a:lnRef idx="2">
-              <a:schemeClr val="accent1">
-                <a:shade val="15000"/>
-              </a:schemeClr>
-            </a:lnRef>
-            <a:fillRef idx="1">
-              <a:schemeClr val="accent1"/>
-            </a:fillRef>
-            <a:effectRef idx="0">
-              <a:schemeClr val="accent1"/>
-            </a:effectRef>
-            <a:fontRef idx="minor">
-              <a:schemeClr val="lt1"/>
-            </a:fontRef>
-          </p:style>
-          <p:txBody>
-            <a:bodyPr rtlCol="0" anchor="ctr"/>
-            <a:lstStyle/>
-            <a:p>
-              <a:pPr algn="r"/>
-              <a:endParaRPr lang="fr-FR" sz="1050" dirty="0">
-                <a:solidFill>
-                  <a:schemeClr val="tx1"/>
-                </a:solidFill>
-              </a:endParaRPr>
-            </a:p>
-            <a:p>
-              <a:r>
-                <a:rPr lang="fr-FR" sz="1050" dirty="0">
-                  <a:solidFill>
-                    <a:schemeClr val="tx1"/>
-                  </a:solidFill>
-                </a:rPr>
-                <a:t>              </a:t>
-              </a:r>
-              <a:r>
-                <a:rPr lang="fr-FR" sz="1050" dirty="0" err="1">
-                  <a:solidFill>
-                    <a:schemeClr val="tx1"/>
-                  </a:solidFill>
-                </a:rPr>
-                <a:t>Individual</a:t>
-              </a:r>
-              <a:r>
-                <a:rPr lang="fr-FR" sz="1050" dirty="0">
-                  <a:solidFill>
-                    <a:schemeClr val="tx1"/>
-                  </a:solidFill>
-                </a:rPr>
-                <a:t> locations </a:t>
-              </a:r>
-            </a:p>
-            <a:p>
-              <a:endParaRPr lang="fr-FR" sz="1050" dirty="0">
-                <a:solidFill>
-                  <a:schemeClr val="tx1"/>
-                </a:solidFill>
-              </a:endParaRPr>
-            </a:p>
-            <a:p>
-              <a:r>
-                <a:rPr lang="fr-FR" sz="1050" dirty="0">
-                  <a:solidFill>
-                    <a:schemeClr val="tx1"/>
-                  </a:solidFill>
-                </a:rPr>
-                <a:t>              Contacts</a:t>
-              </a:r>
-            </a:p>
-          </p:txBody>
-        </p:sp>
-        <p:sp>
-          <p:nvSpPr>
-            <p:cNvPr id="79" name="ZoneTexte 78">
-              <a:extLst>
-                <a:ext uri="{FF2B5EF4-FFF2-40B4-BE49-F238E27FC236}">
-                  <a16:creationId xmlns:a16="http://schemas.microsoft.com/office/drawing/2014/main" id="{C93BFDBC-D0B2-0856-2F17-5429ED486E88}"/>
-                </a:ext>
-              </a:extLst>
-            </p:cNvPr>
-            <p:cNvSpPr txBox="1"/>
-            <p:nvPr/>
-          </p:nvSpPr>
-          <p:spPr>
-            <a:xfrm>
-              <a:off x="4459900" y="2450090"/>
-              <a:ext cx="490840" cy="146183"/>
-            </a:xfrm>
-            <a:prstGeom prst="rect">
-              <a:avLst/>
-            </a:prstGeom>
-            <a:noFill/>
-            <a:ln>
-              <a:noFill/>
-            </a:ln>
-          </p:spPr>
-          <p:txBody>
-            <a:bodyPr wrap="none" rtlCol="0">
-              <a:spAutoFit/>
-            </a:bodyPr>
-            <a:lstStyle>
-              <a:defPPr>
-                <a:defRPr lang="fr-FR"/>
-              </a:defPPr>
-              <a:lvl1pPr algn="ctr">
-                <a:defRPr sz="1000"/>
-              </a:lvl1pPr>
-            </a:lstStyle>
-            <a:p>
-              <a:r>
-                <a:rPr lang="fr-FR" sz="1100" b="1" dirty="0">
-                  <a:solidFill>
-                    <a:schemeClr val="tx2"/>
-                  </a:solidFill>
-                </a:rPr>
-                <a:t>Data</a:t>
-              </a:r>
-              <a:endParaRPr lang="fr-FR" b="1" dirty="0">
-                <a:solidFill>
-                  <a:schemeClr val="tx2"/>
-                </a:solidFill>
-              </a:endParaRPr>
-            </a:p>
-          </p:txBody>
-        </p:sp>
-      </p:grpSp>
+            </a:endParaRPr>
+          </a:p>
+        </p:txBody>
+      </p:sp>
       <p:sp>
         <p:nvSpPr>
           <p:cNvPr id="299" name="Rectangle : coins arrondis 298">
@@ -15614,8 +15254,8 @@
           </a:p>
         </p:txBody>
       </p:sp>
-      <mc:AlternateContent xmlns:mc="http://schemas.openxmlformats.org/markup-compatibility/2006" xmlns:a14="http://schemas.microsoft.com/office/drawing/2010/main">
-        <mc:Choice Requires="a14">
+      <mc:AlternateContent xmlns:mc="http://schemas.openxmlformats.org/markup-compatibility/2006">
+        <mc:Choice xmlns:a14="http://schemas.microsoft.com/office/drawing/2010/main" Requires="a14">
           <p:sp>
             <p:nvSpPr>
               <p:cNvPr id="87" name="ZoneTexte 86">
@@ -15630,7 +15270,7 @@
             </p:nvSpPr>
             <p:spPr>
               <a:xfrm>
-                <a:off x="2290752" y="2651610"/>
+                <a:off x="2290752" y="2657971"/>
                 <a:ext cx="410400" cy="261610"/>
               </a:xfrm>
               <a:prstGeom prst="rect">
@@ -15677,7 +15317,7 @@
             </p:txBody>
           </p:sp>
         </mc:Choice>
-        <mc:Fallback xmlns="">
+        <mc:Fallback>
           <p:sp>
             <p:nvSpPr>
               <p:cNvPr id="87" name="ZoneTexte 86">
@@ -15694,16 +15334,16 @@
             </p:nvSpPr>
             <p:spPr>
               <a:xfrm>
-                <a:off x="2290752" y="2651610"/>
+                <a:off x="2290752" y="2657971"/>
                 <a:ext cx="410400" cy="261610"/>
               </a:xfrm>
               <a:prstGeom prst="rect">
                 <a:avLst/>
               </a:prstGeom>
               <a:blipFill>
-                <a:blip r:embed="rId17"/>
+                <a:blip r:embed="rId9"/>
                 <a:stretch>
-                  <a:fillRect b="-4545"/>
+                  <a:fillRect b="-4762"/>
                 </a:stretch>
               </a:blipFill>
             </p:spPr>
@@ -15722,8 +15362,8 @@
           </p:sp>
         </mc:Fallback>
       </mc:AlternateContent>
-      <mc:AlternateContent xmlns:mc="http://schemas.openxmlformats.org/markup-compatibility/2006" xmlns:a14="http://schemas.microsoft.com/office/drawing/2010/main">
-        <mc:Choice Requires="a14">
+      <mc:AlternateContent xmlns:mc="http://schemas.openxmlformats.org/markup-compatibility/2006">
+        <mc:Choice xmlns:a14="http://schemas.microsoft.com/office/drawing/2010/main" Requires="a14">
           <p:sp>
             <p:nvSpPr>
               <p:cNvPr id="37" name="ZoneTexte 36">
@@ -15738,7 +15378,7 @@
             </p:nvSpPr>
             <p:spPr>
               <a:xfrm>
-                <a:off x="2914182" y="2651610"/>
+                <a:off x="2949354" y="2657971"/>
                 <a:ext cx="375557" cy="261610"/>
               </a:xfrm>
               <a:prstGeom prst="rect">
@@ -15773,7 +15413,7 @@
             </p:txBody>
           </p:sp>
         </mc:Choice>
-        <mc:Fallback xmlns="">
+        <mc:Fallback>
           <p:sp>
             <p:nvSpPr>
               <p:cNvPr id="37" name="ZoneTexte 36">
@@ -15790,14 +15430,14 @@
             </p:nvSpPr>
             <p:spPr>
               <a:xfrm>
-                <a:off x="2914182" y="2651610"/>
+                <a:off x="2949354" y="2657971"/>
                 <a:ext cx="375557" cy="261610"/>
               </a:xfrm>
               <a:prstGeom prst="rect">
                 <a:avLst/>
               </a:prstGeom>
               <a:blipFill>
-                <a:blip r:embed="rId18"/>
+                <a:blip r:embed="rId10"/>
                 <a:stretch>
                   <a:fillRect/>
                 </a:stretch>
@@ -15834,7 +15474,7 @@
             </p:nvSpPr>
             <p:spPr>
               <a:xfrm>
-                <a:off x="3663009" y="2704971"/>
+                <a:off x="3663009" y="2657971"/>
                 <a:ext cx="401152" cy="261610"/>
               </a:xfrm>
               <a:prstGeom prst="rect">
@@ -15905,14 +15545,14 @@
             </p:nvSpPr>
             <p:spPr>
               <a:xfrm>
-                <a:off x="3663009" y="2704971"/>
+                <a:off x="3663009" y="2657971"/>
                 <a:ext cx="401152" cy="261610"/>
               </a:xfrm>
               <a:prstGeom prst="rect">
                 <a:avLst/>
               </a:prstGeom>
               <a:blipFill>
-                <a:blip r:embed="rId19"/>
+                <a:blip r:embed="rId11"/>
                 <a:stretch>
                   <a:fillRect/>
                 </a:stretch>
@@ -15933,114 +15573,6 @@
           </p:sp>
         </mc:Fallback>
       </mc:AlternateContent>
-      <p:pic>
-        <p:nvPicPr>
-          <p:cNvPr id="178" name="Graphique 177" descr="Microbe contour">
-            <a:extLst>
-              <a:ext uri="{FF2B5EF4-FFF2-40B4-BE49-F238E27FC236}">
-                <a16:creationId xmlns:a16="http://schemas.microsoft.com/office/drawing/2014/main" id="{430E97F7-B61A-B508-BEAA-0E5175B7A26B}"/>
-              </a:ext>
-            </a:extLst>
-          </p:cNvPr>
-          <p:cNvPicPr>
-            <a:picLocks noChangeAspect="1"/>
-          </p:cNvPicPr>
-          <p:nvPr/>
-        </p:nvPicPr>
-        <p:blipFill>
-          <a:blip>
-            <a:extLst>
-              <a:ext uri="{96DAC541-7B7A-43D3-8B79-37D633B846F1}">
-                <asvg:svgBlip xmlns:asvg="http://schemas.microsoft.com/office/drawing/2016/SVG/main" r:embed="rId20"/>
-              </a:ext>
-            </a:extLst>
-          </a:blip>
-          <a:stretch>
-            <a:fillRect/>
-          </a:stretch>
-        </p:blipFill>
-        <p:spPr>
-          <a:xfrm>
-            <a:off x="2051546" y="2631215"/>
-            <a:ext cx="302400" cy="302400"/>
-          </a:xfrm>
-          <a:prstGeom prst="rect">
-            <a:avLst/>
-          </a:prstGeom>
-        </p:spPr>
-      </p:pic>
-      <p:pic>
-        <p:nvPicPr>
-          <p:cNvPr id="185" name="Graphique 184" descr="Homme contour">
-            <a:extLst>
-              <a:ext uri="{FF2B5EF4-FFF2-40B4-BE49-F238E27FC236}">
-                <a16:creationId xmlns:a16="http://schemas.microsoft.com/office/drawing/2014/main" id="{C5C9A739-62E9-EB52-F4D6-92381C1C8CC7}"/>
-              </a:ext>
-            </a:extLst>
-          </p:cNvPr>
-          <p:cNvPicPr>
-            <a:picLocks noChangeAspect="1"/>
-          </p:cNvPicPr>
-          <p:nvPr/>
-        </p:nvPicPr>
-        <p:blipFill>
-          <a:blip>
-            <a:extLst>
-              <a:ext uri="{96DAC541-7B7A-43D3-8B79-37D633B846F1}">
-                <asvg:svgBlip xmlns:asvg="http://schemas.microsoft.com/office/drawing/2016/SVG/main" r:embed="rId21"/>
-              </a:ext>
-            </a:extLst>
-          </a:blip>
-          <a:stretch>
-            <a:fillRect/>
-          </a:stretch>
-        </p:blipFill>
-        <p:spPr>
-          <a:xfrm>
-            <a:off x="2783538" y="2631215"/>
-            <a:ext cx="302400" cy="302400"/>
-          </a:xfrm>
-          <a:prstGeom prst="rect">
-            <a:avLst/>
-          </a:prstGeom>
-        </p:spPr>
-      </p:pic>
-      <p:pic>
-        <p:nvPicPr>
-          <p:cNvPr id="193" name="Graphique 192" descr="Hôpital contour">
-            <a:extLst>
-              <a:ext uri="{FF2B5EF4-FFF2-40B4-BE49-F238E27FC236}">
-                <a16:creationId xmlns:a16="http://schemas.microsoft.com/office/drawing/2014/main" id="{4AF6CF58-3DD2-41B4-4410-69815AAF605E}"/>
-              </a:ext>
-            </a:extLst>
-          </p:cNvPr>
-          <p:cNvPicPr>
-            <a:picLocks noChangeAspect="1"/>
-          </p:cNvPicPr>
-          <p:nvPr/>
-        </p:nvPicPr>
-        <p:blipFill>
-          <a:blip>
-            <a:extLst>
-              <a:ext uri="{96DAC541-7B7A-43D3-8B79-37D633B846F1}">
-                <asvg:svgBlip xmlns:asvg="http://schemas.microsoft.com/office/drawing/2016/SVG/main" r:embed="rId22"/>
-              </a:ext>
-            </a:extLst>
-          </a:blip>
-          <a:stretch>
-            <a:fillRect/>
-          </a:stretch>
-        </p:blipFill>
-        <p:spPr>
-          <a:xfrm>
-            <a:off x="3446648" y="2631215"/>
-            <a:ext cx="302400" cy="302400"/>
-          </a:xfrm>
-          <a:prstGeom prst="rect">
-            <a:avLst/>
-          </a:prstGeom>
-        </p:spPr>
-      </p:pic>
       <p:sp>
         <p:nvSpPr>
           <p:cNvPr id="300" name="Rectangle : coins arrondis 299">
@@ -16161,7 +15693,7 @@
             </p:nvSpPr>
             <p:spPr>
               <a:xfrm>
-                <a:off x="2273498" y="3030878"/>
+                <a:off x="2227004" y="3030878"/>
                 <a:ext cx="682866" cy="261610"/>
               </a:xfrm>
               <a:prstGeom prst="rect">
@@ -16263,14 +15795,14 @@
             </p:nvSpPr>
             <p:spPr>
               <a:xfrm>
-                <a:off x="2273498" y="3030878"/>
+                <a:off x="2227004" y="3030878"/>
                 <a:ext cx="682866" cy="261610"/>
               </a:xfrm>
               <a:prstGeom prst="rect">
                 <a:avLst/>
               </a:prstGeom>
               <a:blipFill>
-                <a:blip r:embed="rId25"/>
+                <a:blip r:embed="rId12"/>
                 <a:stretch>
                   <a:fillRect b="-4545"/>
                 </a:stretch>
@@ -16291,114 +15823,6 @@
           </p:sp>
         </mc:Fallback>
       </mc:AlternateContent>
-      <p:pic>
-        <p:nvPicPr>
-          <p:cNvPr id="216" name="Graphique 215" descr="Fièvre contour">
-            <a:extLst>
-              <a:ext uri="{FF2B5EF4-FFF2-40B4-BE49-F238E27FC236}">
-                <a16:creationId xmlns:a16="http://schemas.microsoft.com/office/drawing/2014/main" id="{4D7FEFAD-41C4-B0D7-F751-9C8CB42A3111}"/>
-              </a:ext>
-            </a:extLst>
-          </p:cNvPr>
-          <p:cNvPicPr>
-            <a:picLocks noChangeAspect="1"/>
-          </p:cNvPicPr>
-          <p:nvPr/>
-        </p:nvPicPr>
-        <p:blipFill>
-          <a:blip>
-            <a:extLst>
-              <a:ext uri="{96DAC541-7B7A-43D3-8B79-37D633B846F1}">
-                <asvg:svgBlip xmlns:asvg="http://schemas.microsoft.com/office/drawing/2016/SVG/main" r:embed="rId26"/>
-              </a:ext>
-            </a:extLst>
-          </a:blip>
-          <a:stretch>
-            <a:fillRect/>
-          </a:stretch>
-        </p:blipFill>
-        <p:spPr>
-          <a:xfrm>
-            <a:off x="2092821" y="3010483"/>
-            <a:ext cx="302400" cy="302400"/>
-          </a:xfrm>
-          <a:prstGeom prst="rect">
-            <a:avLst/>
-          </a:prstGeom>
-        </p:spPr>
-      </p:pic>
-      <p:pic>
-        <p:nvPicPr>
-          <p:cNvPr id="302" name="Graphique 301" descr="Connexions contour">
-            <a:extLst>
-              <a:ext uri="{FF2B5EF4-FFF2-40B4-BE49-F238E27FC236}">
-                <a16:creationId xmlns:a16="http://schemas.microsoft.com/office/drawing/2014/main" id="{981652DF-EBB8-A3A6-4025-DC6F9527F6AB}"/>
-              </a:ext>
-            </a:extLst>
-          </p:cNvPr>
-          <p:cNvPicPr>
-            <a:picLocks noChangeAspect="1"/>
-          </p:cNvPicPr>
-          <p:nvPr/>
-        </p:nvPicPr>
-        <p:blipFill>
-          <a:blip>
-            <a:extLst>
-              <a:ext uri="{96DAC541-7B7A-43D3-8B79-37D633B846F1}">
-                <asvg:svgBlip xmlns:asvg="http://schemas.microsoft.com/office/drawing/2016/SVG/main" r:embed="rId27"/>
-              </a:ext>
-            </a:extLst>
-          </a:blip>
-          <a:stretch>
-            <a:fillRect/>
-          </a:stretch>
-        </p:blipFill>
-        <p:spPr>
-          <a:xfrm>
-            <a:off x="4339051" y="2958039"/>
-            <a:ext cx="302400" cy="302400"/>
-          </a:xfrm>
-          <a:prstGeom prst="rect">
-            <a:avLst/>
-          </a:prstGeom>
-        </p:spPr>
-      </p:pic>
-      <p:pic>
-        <p:nvPicPr>
-          <p:cNvPr id="304" name="Graphique 303" descr="Carte avec repère contour">
-            <a:extLst>
-              <a:ext uri="{FF2B5EF4-FFF2-40B4-BE49-F238E27FC236}">
-                <a16:creationId xmlns:a16="http://schemas.microsoft.com/office/drawing/2014/main" id="{A86BE7CF-B5C9-7964-402D-9C7ED49D6E1F}"/>
-              </a:ext>
-            </a:extLst>
-          </p:cNvPr>
-          <p:cNvPicPr>
-            <a:picLocks noChangeAspect="1"/>
-          </p:cNvPicPr>
-          <p:nvPr/>
-        </p:nvPicPr>
-        <p:blipFill>
-          <a:blip>
-            <a:extLst>
-              <a:ext uri="{96DAC541-7B7A-43D3-8B79-37D633B846F1}">
-                <asvg:svgBlip xmlns:asvg="http://schemas.microsoft.com/office/drawing/2016/SVG/main" r:embed="rId28"/>
-              </a:ext>
-            </a:extLst>
-          </a:blip>
-          <a:stretch>
-            <a:fillRect/>
-          </a:stretch>
-        </p:blipFill>
-        <p:spPr>
-          <a:xfrm>
-            <a:off x="4342811" y="2639548"/>
-            <a:ext cx="302400" cy="302400"/>
-          </a:xfrm>
-          <a:prstGeom prst="rect">
-            <a:avLst/>
-          </a:prstGeom>
-        </p:spPr>
-      </p:pic>
       <p:cxnSp>
         <p:nvCxnSpPr>
           <p:cNvPr id="82" name="Connecteur droit avec flèche 81">
@@ -16410,7 +15834,6 @@
           </p:cNvPr>
           <p:cNvCxnSpPr>
             <a:cxnSpLocks/>
-            <a:stCxn id="25" idx="3"/>
           </p:cNvCxnSpPr>
           <p:nvPr/>
         </p:nvCxnSpPr>
@@ -16482,6 +15905,2056 @@
           </a:fontRef>
         </p:style>
       </p:cxnSp>
+      <p:cxnSp>
+        <p:nvCxnSpPr>
+          <p:cNvPr id="226" name="Connecteur droit avec flèche 225">
+            <a:extLst>
+              <a:ext uri="{FF2B5EF4-FFF2-40B4-BE49-F238E27FC236}">
+                <a16:creationId xmlns:a16="http://schemas.microsoft.com/office/drawing/2014/main" id="{AD1776D8-9BF8-4B2F-151F-8E9E2F5B16BE}"/>
+              </a:ext>
+            </a:extLst>
+          </p:cNvPr>
+          <p:cNvCxnSpPr>
+            <a:cxnSpLocks/>
+          </p:cNvCxnSpPr>
+          <p:nvPr/>
+        </p:nvCxnSpPr>
+        <p:spPr>
+          <a:xfrm>
+            <a:off x="3064806" y="5839689"/>
+            <a:ext cx="144000" cy="0"/>
+          </a:xfrm>
+          <a:prstGeom prst="straightConnector1">
+            <a:avLst/>
+          </a:prstGeom>
+          <a:ln w="12700" cap="rnd">
+            <a:solidFill>
+              <a:schemeClr val="accent2"/>
+            </a:solidFill>
+            <a:round/>
+            <a:tailEnd type="triangle" w="sm" len="sm"/>
+          </a:ln>
+        </p:spPr>
+        <p:style>
+          <a:lnRef idx="2">
+            <a:schemeClr val="accent1"/>
+          </a:lnRef>
+          <a:fillRef idx="0">
+            <a:schemeClr val="accent1"/>
+          </a:fillRef>
+          <a:effectRef idx="1">
+            <a:schemeClr val="accent1"/>
+          </a:effectRef>
+          <a:fontRef idx="minor">
+            <a:schemeClr val="tx1"/>
+          </a:fontRef>
+        </p:style>
+      </p:cxnSp>
+      <p:cxnSp>
+        <p:nvCxnSpPr>
+          <p:cNvPr id="230" name="Connecteur droit avec flèche 229">
+            <a:extLst>
+              <a:ext uri="{FF2B5EF4-FFF2-40B4-BE49-F238E27FC236}">
+                <a16:creationId xmlns:a16="http://schemas.microsoft.com/office/drawing/2014/main" id="{82D6D2A4-6756-07C1-CE5E-5EAFFF199010}"/>
+              </a:ext>
+            </a:extLst>
+          </p:cNvPr>
+          <p:cNvCxnSpPr>
+            <a:cxnSpLocks/>
+          </p:cNvCxnSpPr>
+          <p:nvPr/>
+        </p:nvCxnSpPr>
+        <p:spPr>
+          <a:xfrm>
+            <a:off x="3050643" y="5900308"/>
+            <a:ext cx="144000" cy="0"/>
+          </a:xfrm>
+          <a:prstGeom prst="straightConnector1">
+            <a:avLst/>
+          </a:prstGeom>
+          <a:ln w="12700" cap="rnd">
+            <a:solidFill>
+              <a:schemeClr val="accent2"/>
+            </a:solidFill>
+            <a:round/>
+            <a:headEnd type="triangle" w="sm" len="sm"/>
+            <a:tailEnd type="none" w="sm" len="sm"/>
+          </a:ln>
+        </p:spPr>
+        <p:style>
+          <a:lnRef idx="2">
+            <a:schemeClr val="accent1"/>
+          </a:lnRef>
+          <a:fillRef idx="0">
+            <a:schemeClr val="accent1"/>
+          </a:fillRef>
+          <a:effectRef idx="1">
+            <a:schemeClr val="accent1"/>
+          </a:effectRef>
+          <a:fontRef idx="minor">
+            <a:schemeClr val="tx1"/>
+          </a:fontRef>
+        </p:style>
+      </p:cxnSp>
+      <p:pic>
+        <p:nvPicPr>
+          <p:cNvPr id="20" name="Graphique 19">
+            <a:extLst>
+              <a:ext uri="{FF2B5EF4-FFF2-40B4-BE49-F238E27FC236}">
+                <a16:creationId xmlns:a16="http://schemas.microsoft.com/office/drawing/2014/main" id="{95691DBB-C105-2DCE-45D4-D6FDE5B42DA0}"/>
+              </a:ext>
+            </a:extLst>
+          </p:cNvPr>
+          <p:cNvPicPr>
+            <a:picLocks noChangeAspect="1"/>
+          </p:cNvPicPr>
+          <p:nvPr/>
+        </p:nvPicPr>
+        <p:blipFill>
+          <a:blip>
+            <a:extLst>
+              <a:ext uri="{96DAC541-7B7A-43D3-8B79-37D633B846F1}">
+                <asvg:svgBlip xmlns:asvg="http://schemas.microsoft.com/office/drawing/2016/SVG/main" r:embed="rId13"/>
+              </a:ext>
+            </a:extLst>
+          </a:blip>
+          <a:stretch>
+            <a:fillRect/>
+          </a:stretch>
+        </p:blipFill>
+        <p:spPr>
+          <a:xfrm>
+            <a:off x="2034623" y="2626930"/>
+            <a:ext cx="324000" cy="324000"/>
+          </a:xfrm>
+          <a:prstGeom prst="rect">
+            <a:avLst/>
+          </a:prstGeom>
+        </p:spPr>
+      </p:pic>
+      <p:pic>
+        <p:nvPicPr>
+          <p:cNvPr id="25" name="Graphique 24">
+            <a:extLst>
+              <a:ext uri="{FF2B5EF4-FFF2-40B4-BE49-F238E27FC236}">
+                <a16:creationId xmlns:a16="http://schemas.microsoft.com/office/drawing/2014/main" id="{2CC78DF7-270E-F326-6F21-B05A29C1D431}"/>
+              </a:ext>
+            </a:extLst>
+          </p:cNvPr>
+          <p:cNvPicPr>
+            <a:picLocks noChangeAspect="1"/>
+          </p:cNvPicPr>
+          <p:nvPr/>
+        </p:nvPicPr>
+        <p:blipFill>
+          <a:blip>
+            <a:extLst>
+              <a:ext uri="{96DAC541-7B7A-43D3-8B79-37D633B846F1}">
+                <asvg:svgBlip xmlns:asvg="http://schemas.microsoft.com/office/drawing/2016/SVG/main" r:embed="rId14"/>
+              </a:ext>
+            </a:extLst>
+          </a:blip>
+          <a:stretch>
+            <a:fillRect/>
+          </a:stretch>
+        </p:blipFill>
+        <p:spPr>
+          <a:xfrm>
+            <a:off x="2807870" y="2626930"/>
+            <a:ext cx="324000" cy="324000"/>
+          </a:xfrm>
+          <a:prstGeom prst="rect">
+            <a:avLst/>
+          </a:prstGeom>
+        </p:spPr>
+      </p:pic>
+      <p:pic>
+        <p:nvPicPr>
+          <p:cNvPr id="28" name="Graphique 27">
+            <a:extLst>
+              <a:ext uri="{FF2B5EF4-FFF2-40B4-BE49-F238E27FC236}">
+                <a16:creationId xmlns:a16="http://schemas.microsoft.com/office/drawing/2014/main" id="{CE9C2A00-8863-55AD-0CA3-674279734AC8}"/>
+              </a:ext>
+            </a:extLst>
+          </p:cNvPr>
+          <p:cNvPicPr>
+            <a:picLocks noChangeAspect="1"/>
+          </p:cNvPicPr>
+          <p:nvPr/>
+        </p:nvPicPr>
+        <p:blipFill>
+          <a:blip>
+            <a:extLst>
+              <a:ext uri="{96DAC541-7B7A-43D3-8B79-37D633B846F1}">
+                <asvg:svgBlip xmlns:asvg="http://schemas.microsoft.com/office/drawing/2016/SVG/main" r:embed="rId15"/>
+              </a:ext>
+            </a:extLst>
+          </a:blip>
+          <a:stretch>
+            <a:fillRect/>
+          </a:stretch>
+        </p:blipFill>
+        <p:spPr>
+          <a:xfrm>
+            <a:off x="2034623" y="3001638"/>
+            <a:ext cx="324000" cy="324000"/>
+          </a:xfrm>
+          <a:prstGeom prst="rect">
+            <a:avLst/>
+          </a:prstGeom>
+        </p:spPr>
+      </p:pic>
+      <p:pic>
+        <p:nvPicPr>
+          <p:cNvPr id="36" name="Graphique 35">
+            <a:extLst>
+              <a:ext uri="{FF2B5EF4-FFF2-40B4-BE49-F238E27FC236}">
+                <a16:creationId xmlns:a16="http://schemas.microsoft.com/office/drawing/2014/main" id="{FD7CC41B-BF8D-2158-66A1-E4D8000847D8}"/>
+              </a:ext>
+            </a:extLst>
+          </p:cNvPr>
+          <p:cNvPicPr>
+            <a:picLocks noChangeAspect="1"/>
+          </p:cNvPicPr>
+          <p:nvPr/>
+        </p:nvPicPr>
+        <p:blipFill>
+          <a:blip>
+            <a:extLst>
+              <a:ext uri="{96DAC541-7B7A-43D3-8B79-37D633B846F1}">
+                <asvg:svgBlip xmlns:asvg="http://schemas.microsoft.com/office/drawing/2016/SVG/main" r:embed="rId16"/>
+              </a:ext>
+            </a:extLst>
+          </a:blip>
+          <a:stretch>
+            <a:fillRect/>
+          </a:stretch>
+        </p:blipFill>
+        <p:spPr>
+          <a:xfrm>
+            <a:off x="4258014" y="2608520"/>
+            <a:ext cx="324000" cy="324000"/>
+          </a:xfrm>
+          <a:prstGeom prst="rect">
+            <a:avLst/>
+          </a:prstGeom>
+        </p:spPr>
+      </p:pic>
+      <p:pic>
+        <p:nvPicPr>
+          <p:cNvPr id="70" name="Graphique 69">
+            <a:extLst>
+              <a:ext uri="{FF2B5EF4-FFF2-40B4-BE49-F238E27FC236}">
+                <a16:creationId xmlns:a16="http://schemas.microsoft.com/office/drawing/2014/main" id="{CD389746-DC8F-607A-C1BF-36CA2FFEB6EF}"/>
+              </a:ext>
+            </a:extLst>
+          </p:cNvPr>
+          <p:cNvPicPr>
+            <a:picLocks noChangeAspect="1"/>
+          </p:cNvPicPr>
+          <p:nvPr/>
+        </p:nvPicPr>
+        <p:blipFill>
+          <a:blip>
+            <a:extLst>
+              <a:ext uri="{96DAC541-7B7A-43D3-8B79-37D633B846F1}">
+                <asvg:svgBlip xmlns:asvg="http://schemas.microsoft.com/office/drawing/2016/SVG/main" r:embed="rId17"/>
+              </a:ext>
+            </a:extLst>
+          </a:blip>
+          <a:stretch>
+            <a:fillRect/>
+          </a:stretch>
+        </p:blipFill>
+        <p:spPr>
+          <a:xfrm>
+            <a:off x="3483139" y="2626930"/>
+            <a:ext cx="324000" cy="324000"/>
+          </a:xfrm>
+          <a:prstGeom prst="rect">
+            <a:avLst/>
+          </a:prstGeom>
+        </p:spPr>
+      </p:pic>
+      <p:pic>
+        <p:nvPicPr>
+          <p:cNvPr id="83" name="Graphique 82">
+            <a:extLst>
+              <a:ext uri="{FF2B5EF4-FFF2-40B4-BE49-F238E27FC236}">
+                <a16:creationId xmlns:a16="http://schemas.microsoft.com/office/drawing/2014/main" id="{98E4D9BB-B66E-CA2C-3EE2-B0CDF0087620}"/>
+              </a:ext>
+            </a:extLst>
+          </p:cNvPr>
+          <p:cNvPicPr>
+            <a:picLocks noChangeAspect="1"/>
+          </p:cNvPicPr>
+          <p:nvPr/>
+        </p:nvPicPr>
+        <p:blipFill>
+          <a:blip>
+            <a:extLst>
+              <a:ext uri="{96DAC541-7B7A-43D3-8B79-37D633B846F1}">
+                <asvg:svgBlip xmlns:asvg="http://schemas.microsoft.com/office/drawing/2016/SVG/main" r:embed="rId18"/>
+              </a:ext>
+            </a:extLst>
+          </a:blip>
+          <a:stretch>
+            <a:fillRect/>
+          </a:stretch>
+        </p:blipFill>
+        <p:spPr>
+          <a:xfrm>
+            <a:off x="680989" y="2438284"/>
+            <a:ext cx="360000" cy="360000"/>
+          </a:xfrm>
+          <a:prstGeom prst="rect">
+            <a:avLst/>
+          </a:prstGeom>
+        </p:spPr>
+      </p:pic>
+      <p:pic>
+        <p:nvPicPr>
+          <p:cNvPr id="90" name="Graphique 89">
+            <a:extLst>
+              <a:ext uri="{FF2B5EF4-FFF2-40B4-BE49-F238E27FC236}">
+                <a16:creationId xmlns:a16="http://schemas.microsoft.com/office/drawing/2014/main" id="{ADDF20DC-90EB-F574-D926-24AB5778A80E}"/>
+              </a:ext>
+            </a:extLst>
+          </p:cNvPr>
+          <p:cNvPicPr>
+            <a:picLocks noChangeAspect="1"/>
+          </p:cNvPicPr>
+          <p:nvPr/>
+        </p:nvPicPr>
+        <p:blipFill>
+          <a:blip>
+            <a:extLst>
+              <a:ext uri="{96DAC541-7B7A-43D3-8B79-37D633B846F1}">
+                <asvg:svgBlip xmlns:asvg="http://schemas.microsoft.com/office/drawing/2016/SVG/main" r:embed="rId19"/>
+              </a:ext>
+            </a:extLst>
+          </a:blip>
+          <a:stretch>
+            <a:fillRect/>
+          </a:stretch>
+        </p:blipFill>
+        <p:spPr>
+          <a:xfrm>
+            <a:off x="3099140" y="5677299"/>
+            <a:ext cx="324000" cy="324000"/>
+          </a:xfrm>
+          <a:prstGeom prst="rect">
+            <a:avLst/>
+          </a:prstGeom>
+        </p:spPr>
+      </p:pic>
+      <p:pic>
+        <p:nvPicPr>
+          <p:cNvPr id="93" name="Graphique 92">
+            <a:extLst>
+              <a:ext uri="{FF2B5EF4-FFF2-40B4-BE49-F238E27FC236}">
+                <a16:creationId xmlns:a16="http://schemas.microsoft.com/office/drawing/2014/main" id="{90D015A3-2F5C-2F4A-42D0-CE5BD4263C29}"/>
+              </a:ext>
+            </a:extLst>
+          </p:cNvPr>
+          <p:cNvPicPr>
+            <a:picLocks noChangeAspect="1"/>
+          </p:cNvPicPr>
+          <p:nvPr/>
+        </p:nvPicPr>
+        <p:blipFill>
+          <a:blip>
+            <a:extLst>
+              <a:ext uri="{96DAC541-7B7A-43D3-8B79-37D633B846F1}">
+                <asvg:svgBlip xmlns:asvg="http://schemas.microsoft.com/office/drawing/2016/SVG/main" r:embed="rId19"/>
+              </a:ext>
+            </a:extLst>
+          </a:blip>
+          <a:stretch>
+            <a:fillRect/>
+          </a:stretch>
+        </p:blipFill>
+        <p:spPr>
+          <a:xfrm>
+            <a:off x="2836973" y="5677299"/>
+            <a:ext cx="324000" cy="324000"/>
+          </a:xfrm>
+          <a:prstGeom prst="rect">
+            <a:avLst/>
+          </a:prstGeom>
+        </p:spPr>
+      </p:pic>
+      <p:cxnSp>
+        <p:nvCxnSpPr>
+          <p:cNvPr id="95" name="Connecteur droit avec flèche 94">
+            <a:extLst>
+              <a:ext uri="{FF2B5EF4-FFF2-40B4-BE49-F238E27FC236}">
+                <a16:creationId xmlns:a16="http://schemas.microsoft.com/office/drawing/2014/main" id="{1973D54B-F513-284F-5447-B0D09DC9F3A3}"/>
+              </a:ext>
+            </a:extLst>
+          </p:cNvPr>
+          <p:cNvCxnSpPr>
+            <a:cxnSpLocks/>
+          </p:cNvCxnSpPr>
+          <p:nvPr/>
+        </p:nvCxnSpPr>
+        <p:spPr>
+          <a:xfrm>
+            <a:off x="2058676" y="3946697"/>
+            <a:ext cx="144000" cy="0"/>
+          </a:xfrm>
+          <a:prstGeom prst="straightConnector1">
+            <a:avLst/>
+          </a:prstGeom>
+          <a:ln w="12700" cap="rnd">
+            <a:solidFill>
+              <a:schemeClr val="accent2"/>
+            </a:solidFill>
+            <a:round/>
+            <a:tailEnd type="triangle" w="sm" len="sm"/>
+          </a:ln>
+        </p:spPr>
+        <p:style>
+          <a:lnRef idx="2">
+            <a:schemeClr val="accent1"/>
+          </a:lnRef>
+          <a:fillRef idx="0">
+            <a:schemeClr val="accent1"/>
+          </a:fillRef>
+          <a:effectRef idx="1">
+            <a:schemeClr val="accent1"/>
+          </a:effectRef>
+          <a:fontRef idx="minor">
+            <a:schemeClr val="tx1"/>
+          </a:fontRef>
+        </p:style>
+      </p:cxnSp>
+      <p:cxnSp>
+        <p:nvCxnSpPr>
+          <p:cNvPr id="103" name="Connecteur droit avec flèche 102">
+            <a:extLst>
+              <a:ext uri="{FF2B5EF4-FFF2-40B4-BE49-F238E27FC236}">
+                <a16:creationId xmlns:a16="http://schemas.microsoft.com/office/drawing/2014/main" id="{6134B728-7021-EA4E-1242-7AE99C9BDEC3}"/>
+              </a:ext>
+            </a:extLst>
+          </p:cNvPr>
+          <p:cNvCxnSpPr>
+            <a:cxnSpLocks/>
+          </p:cNvCxnSpPr>
+          <p:nvPr/>
+        </p:nvCxnSpPr>
+        <p:spPr>
+          <a:xfrm>
+            <a:off x="2044513" y="4007316"/>
+            <a:ext cx="144000" cy="0"/>
+          </a:xfrm>
+          <a:prstGeom prst="straightConnector1">
+            <a:avLst/>
+          </a:prstGeom>
+          <a:ln w="12700" cap="rnd">
+            <a:solidFill>
+              <a:schemeClr val="accent2"/>
+            </a:solidFill>
+            <a:round/>
+            <a:headEnd type="triangle" w="sm" len="sm"/>
+            <a:tailEnd type="none" w="sm" len="sm"/>
+          </a:ln>
+        </p:spPr>
+        <p:style>
+          <a:lnRef idx="2">
+            <a:schemeClr val="accent1"/>
+          </a:lnRef>
+          <a:fillRef idx="0">
+            <a:schemeClr val="accent1"/>
+          </a:fillRef>
+          <a:effectRef idx="1">
+            <a:schemeClr val="accent1"/>
+          </a:effectRef>
+          <a:fontRef idx="minor">
+            <a:schemeClr val="tx1"/>
+          </a:fontRef>
+        </p:style>
+      </p:cxnSp>
+      <p:pic>
+        <p:nvPicPr>
+          <p:cNvPr id="111" name="Graphique 110">
+            <a:extLst>
+              <a:ext uri="{FF2B5EF4-FFF2-40B4-BE49-F238E27FC236}">
+                <a16:creationId xmlns:a16="http://schemas.microsoft.com/office/drawing/2014/main" id="{B6E4A711-8A39-685D-4E75-91EF0FCC716F}"/>
+              </a:ext>
+            </a:extLst>
+          </p:cNvPr>
+          <p:cNvPicPr>
+            <a:picLocks noChangeAspect="1"/>
+          </p:cNvPicPr>
+          <p:nvPr/>
+        </p:nvPicPr>
+        <p:blipFill>
+          <a:blip>
+            <a:extLst>
+              <a:ext uri="{96DAC541-7B7A-43D3-8B79-37D633B846F1}">
+                <asvg:svgBlip xmlns:asvg="http://schemas.microsoft.com/office/drawing/2016/SVG/main" r:embed="rId19"/>
+              </a:ext>
+            </a:extLst>
+          </a:blip>
+          <a:stretch>
+            <a:fillRect/>
+          </a:stretch>
+        </p:blipFill>
+        <p:spPr>
+          <a:xfrm>
+            <a:off x="2093010" y="3784307"/>
+            <a:ext cx="324000" cy="324000"/>
+          </a:xfrm>
+          <a:prstGeom prst="rect">
+            <a:avLst/>
+          </a:prstGeom>
+        </p:spPr>
+      </p:pic>
+      <p:pic>
+        <p:nvPicPr>
+          <p:cNvPr id="178" name="Graphique 177">
+            <a:extLst>
+              <a:ext uri="{FF2B5EF4-FFF2-40B4-BE49-F238E27FC236}">
+                <a16:creationId xmlns:a16="http://schemas.microsoft.com/office/drawing/2014/main" id="{A839A8FE-8B3E-FE38-E249-E8779E801A57}"/>
+              </a:ext>
+            </a:extLst>
+          </p:cNvPr>
+          <p:cNvPicPr>
+            <a:picLocks noChangeAspect="1"/>
+          </p:cNvPicPr>
+          <p:nvPr/>
+        </p:nvPicPr>
+        <p:blipFill>
+          <a:blip>
+            <a:extLst>
+              <a:ext uri="{96DAC541-7B7A-43D3-8B79-37D633B846F1}">
+                <asvg:svgBlip xmlns:asvg="http://schemas.microsoft.com/office/drawing/2016/SVG/main" r:embed="rId19"/>
+              </a:ext>
+            </a:extLst>
+          </a:blip>
+          <a:stretch>
+            <a:fillRect/>
+          </a:stretch>
+        </p:blipFill>
+        <p:spPr>
+          <a:xfrm>
+            <a:off x="1830843" y="3784307"/>
+            <a:ext cx="324000" cy="324000"/>
+          </a:xfrm>
+          <a:prstGeom prst="rect">
+            <a:avLst/>
+          </a:prstGeom>
+        </p:spPr>
+      </p:pic>
+      <p:pic>
+        <p:nvPicPr>
+          <p:cNvPr id="184" name="Graphique 183">
+            <a:extLst>
+              <a:ext uri="{FF2B5EF4-FFF2-40B4-BE49-F238E27FC236}">
+                <a16:creationId xmlns:a16="http://schemas.microsoft.com/office/drawing/2014/main" id="{3182BB17-B09D-9259-3496-23F4FF02747B}"/>
+              </a:ext>
+            </a:extLst>
+          </p:cNvPr>
+          <p:cNvPicPr>
+            <a:picLocks noChangeAspect="1"/>
+          </p:cNvPicPr>
+          <p:nvPr/>
+        </p:nvPicPr>
+        <p:blipFill>
+          <a:blip>
+            <a:extLst>
+              <a:ext uri="{96DAC541-7B7A-43D3-8B79-37D633B846F1}">
+                <asvg:svgBlip xmlns:asvg="http://schemas.microsoft.com/office/drawing/2016/SVG/main" r:embed="rId20"/>
+              </a:ext>
+            </a:extLst>
+          </a:blip>
+          <a:stretch>
+            <a:fillRect/>
+          </a:stretch>
+        </p:blipFill>
+        <p:spPr>
+          <a:xfrm>
+            <a:off x="254797" y="6423193"/>
+            <a:ext cx="324000" cy="324000"/>
+          </a:xfrm>
+          <a:prstGeom prst="rect">
+            <a:avLst/>
+          </a:prstGeom>
+        </p:spPr>
+      </p:pic>
+      <p:pic>
+        <p:nvPicPr>
+          <p:cNvPr id="193" name="Graphique 192">
+            <a:extLst>
+              <a:ext uri="{FF2B5EF4-FFF2-40B4-BE49-F238E27FC236}">
+                <a16:creationId xmlns:a16="http://schemas.microsoft.com/office/drawing/2014/main" id="{0724D4BE-BE41-0AA7-0DCF-2D40F4A14C07}"/>
+              </a:ext>
+            </a:extLst>
+          </p:cNvPr>
+          <p:cNvPicPr>
+            <a:picLocks noChangeAspect="1"/>
+          </p:cNvPicPr>
+          <p:nvPr/>
+        </p:nvPicPr>
+        <p:blipFill>
+          <a:blip>
+            <a:extLst>
+              <a:ext uri="{96DAC541-7B7A-43D3-8B79-37D633B846F1}">
+                <asvg:svgBlip xmlns:asvg="http://schemas.microsoft.com/office/drawing/2016/SVG/main" r:embed="rId21"/>
+              </a:ext>
+            </a:extLst>
+          </a:blip>
+          <a:stretch>
+            <a:fillRect/>
+          </a:stretch>
+        </p:blipFill>
+        <p:spPr>
+          <a:xfrm>
+            <a:off x="121312" y="7279387"/>
+            <a:ext cx="324000" cy="324000"/>
+          </a:xfrm>
+          <a:prstGeom prst="rect">
+            <a:avLst/>
+          </a:prstGeom>
+        </p:spPr>
+      </p:pic>
+      <p:pic>
+        <p:nvPicPr>
+          <p:cNvPr id="200" name="Graphique 199">
+            <a:extLst>
+              <a:ext uri="{FF2B5EF4-FFF2-40B4-BE49-F238E27FC236}">
+                <a16:creationId xmlns:a16="http://schemas.microsoft.com/office/drawing/2014/main" id="{653BBA65-5E6A-807C-A680-46B1650455DD}"/>
+              </a:ext>
+            </a:extLst>
+          </p:cNvPr>
+          <p:cNvPicPr>
+            <a:picLocks noChangeAspect="1"/>
+          </p:cNvPicPr>
+          <p:nvPr/>
+        </p:nvPicPr>
+        <p:blipFill>
+          <a:blip>
+            <a:extLst>
+              <a:ext uri="{96DAC541-7B7A-43D3-8B79-37D633B846F1}">
+                <asvg:svgBlip xmlns:asvg="http://schemas.microsoft.com/office/drawing/2016/SVG/main" r:embed="rId21"/>
+              </a:ext>
+            </a:extLst>
+          </a:blip>
+          <a:stretch>
+            <a:fillRect/>
+          </a:stretch>
+        </p:blipFill>
+        <p:spPr>
+          <a:xfrm>
+            <a:off x="335019" y="7279387"/>
+            <a:ext cx="324000" cy="324000"/>
+          </a:xfrm>
+          <a:prstGeom prst="rect">
+            <a:avLst/>
+          </a:prstGeom>
+        </p:spPr>
+      </p:pic>
+      <p:sp>
+        <p:nvSpPr>
+          <p:cNvPr id="220" name="Rectangle : coins arrondis 219">
+            <a:extLst>
+              <a:ext uri="{FF2B5EF4-FFF2-40B4-BE49-F238E27FC236}">
+                <a16:creationId xmlns:a16="http://schemas.microsoft.com/office/drawing/2014/main" id="{1CF73552-AC6D-D97C-698B-12A1A8BFDA0F}"/>
+              </a:ext>
+            </a:extLst>
+          </p:cNvPr>
+          <p:cNvSpPr/>
+          <p:nvPr/>
+        </p:nvSpPr>
+        <p:spPr>
+          <a:xfrm>
+            <a:off x="279990" y="7449879"/>
+            <a:ext cx="223200" cy="58996"/>
+          </a:xfrm>
+          <a:prstGeom prst="roundRect">
+            <a:avLst/>
+          </a:prstGeom>
+          <a:solidFill>
+            <a:srgbClr val="DDEAF8"/>
+          </a:solidFill>
+          <a:ln>
+            <a:noFill/>
+          </a:ln>
+        </p:spPr>
+        <p:style>
+          <a:lnRef idx="2">
+            <a:schemeClr val="accent1">
+              <a:shade val="15000"/>
+            </a:schemeClr>
+          </a:lnRef>
+          <a:fillRef idx="1">
+            <a:schemeClr val="accent1"/>
+          </a:fillRef>
+          <a:effectRef idx="0">
+            <a:schemeClr val="accent1"/>
+          </a:effectRef>
+          <a:fontRef idx="minor">
+            <a:schemeClr val="lt1"/>
+          </a:fontRef>
+        </p:style>
+        <p:txBody>
+          <a:bodyPr rtlCol="0" anchor="ctr"/>
+          <a:lstStyle/>
+          <a:p>
+            <a:pPr algn="ctr"/>
+            <a:endParaRPr lang="fr-FR"/>
+          </a:p>
+        </p:txBody>
+      </p:sp>
+      <p:sp>
+        <p:nvSpPr>
+          <p:cNvPr id="202" name="Rectangle : coins arrondis 201">
+            <a:extLst>
+              <a:ext uri="{FF2B5EF4-FFF2-40B4-BE49-F238E27FC236}">
+                <a16:creationId xmlns:a16="http://schemas.microsoft.com/office/drawing/2014/main" id="{873B53B1-2A88-2DFF-18F7-624A81D21444}"/>
+              </a:ext>
+            </a:extLst>
+          </p:cNvPr>
+          <p:cNvSpPr/>
+          <p:nvPr/>
+        </p:nvSpPr>
+        <p:spPr>
+          <a:xfrm flipH="1">
+            <a:off x="311149" y="7394132"/>
+            <a:ext cx="162000" cy="57593"/>
+          </a:xfrm>
+          <a:prstGeom prst="roundRect">
+            <a:avLst/>
+          </a:prstGeom>
+          <a:solidFill>
+            <a:srgbClr val="DDEAF8"/>
+          </a:solidFill>
+          <a:ln>
+            <a:noFill/>
+          </a:ln>
+        </p:spPr>
+        <p:style>
+          <a:lnRef idx="2">
+            <a:schemeClr val="accent1">
+              <a:shade val="15000"/>
+            </a:schemeClr>
+          </a:lnRef>
+          <a:fillRef idx="1">
+            <a:schemeClr val="accent1"/>
+          </a:fillRef>
+          <a:effectRef idx="0">
+            <a:schemeClr val="accent1"/>
+          </a:effectRef>
+          <a:fontRef idx="minor">
+            <a:schemeClr val="lt1"/>
+          </a:fontRef>
+        </p:style>
+        <p:txBody>
+          <a:bodyPr rtlCol="0" anchor="ctr"/>
+          <a:lstStyle/>
+          <a:p>
+            <a:pPr algn="ctr"/>
+            <a:endParaRPr lang="fr-FR"/>
+          </a:p>
+        </p:txBody>
+      </p:sp>
+      <p:pic>
+        <p:nvPicPr>
+          <p:cNvPr id="189" name="Graphique 188">
+            <a:extLst>
+              <a:ext uri="{FF2B5EF4-FFF2-40B4-BE49-F238E27FC236}">
+                <a16:creationId xmlns:a16="http://schemas.microsoft.com/office/drawing/2014/main" id="{6A5FE4C8-8412-5B74-0B66-20CC9B2B4C62}"/>
+              </a:ext>
+            </a:extLst>
+          </p:cNvPr>
+          <p:cNvPicPr>
+            <a:picLocks noChangeAspect="1"/>
+          </p:cNvPicPr>
+          <p:nvPr/>
+        </p:nvPicPr>
+        <p:blipFill>
+          <a:blip>
+            <a:extLst>
+              <a:ext uri="{96DAC541-7B7A-43D3-8B79-37D633B846F1}">
+                <asvg:svgBlip xmlns:asvg="http://schemas.microsoft.com/office/drawing/2016/SVG/main" r:embed="rId21"/>
+              </a:ext>
+            </a:extLst>
+          </a:blip>
+          <a:stretch>
+            <a:fillRect/>
+          </a:stretch>
+        </p:blipFill>
+        <p:spPr>
+          <a:xfrm>
+            <a:off x="231144" y="7369926"/>
+            <a:ext cx="324000" cy="324000"/>
+          </a:xfrm>
+          <a:prstGeom prst="rect">
+            <a:avLst/>
+          </a:prstGeom>
+        </p:spPr>
+      </p:pic>
+      <p:grpSp>
+        <p:nvGrpSpPr>
+          <p:cNvPr id="288" name="Groupe 287">
+            <a:extLst>
+              <a:ext uri="{FF2B5EF4-FFF2-40B4-BE49-F238E27FC236}">
+                <a16:creationId xmlns:a16="http://schemas.microsoft.com/office/drawing/2014/main" id="{64C56D5B-5913-E356-218C-4DA5A0E3D9FD}"/>
+              </a:ext>
+            </a:extLst>
+          </p:cNvPr>
+          <p:cNvGrpSpPr/>
+          <p:nvPr/>
+        </p:nvGrpSpPr>
+        <p:grpSpPr>
+          <a:xfrm>
+            <a:off x="4291758" y="2983829"/>
+            <a:ext cx="322006" cy="278226"/>
+            <a:chOff x="6182388" y="2984307"/>
+            <a:chExt cx="376378" cy="325206"/>
+          </a:xfrm>
+        </p:grpSpPr>
+        <p:sp>
+          <p:nvSpPr>
+            <p:cNvPr id="249" name="Ellipse 248">
+              <a:extLst>
+                <a:ext uri="{FF2B5EF4-FFF2-40B4-BE49-F238E27FC236}">
+                  <a16:creationId xmlns:a16="http://schemas.microsoft.com/office/drawing/2014/main" id="{9155E457-544B-3CDC-B7C4-0AEEA703CE0F}"/>
+                </a:ext>
+              </a:extLst>
+            </p:cNvPr>
+            <p:cNvSpPr/>
+            <p:nvPr/>
+          </p:nvSpPr>
+          <p:spPr>
+            <a:xfrm>
+              <a:off x="6292556" y="3089781"/>
+              <a:ext cx="111731" cy="114948"/>
+            </a:xfrm>
+            <a:prstGeom prst="ellipse">
+              <a:avLst/>
+            </a:prstGeom>
+            <a:noFill/>
+            <a:ln w="14604">
+              <a:solidFill>
+                <a:schemeClr val="tx1"/>
+              </a:solidFill>
+            </a:ln>
+          </p:spPr>
+          <p:style>
+            <a:lnRef idx="2">
+              <a:schemeClr val="accent1">
+                <a:shade val="15000"/>
+              </a:schemeClr>
+            </a:lnRef>
+            <a:fillRef idx="1">
+              <a:schemeClr val="accent1"/>
+            </a:fillRef>
+            <a:effectRef idx="0">
+              <a:schemeClr val="accent1"/>
+            </a:effectRef>
+            <a:fontRef idx="minor">
+              <a:schemeClr val="lt1"/>
+            </a:fontRef>
+          </p:style>
+          <p:txBody>
+            <a:bodyPr rtlCol="0" anchor="ctr"/>
+            <a:lstStyle/>
+            <a:p>
+              <a:pPr algn="ctr"/>
+              <a:endParaRPr lang="fr-FR"/>
+            </a:p>
+          </p:txBody>
+        </p:sp>
+        <p:sp>
+          <p:nvSpPr>
+            <p:cNvPr id="255" name="Ellipse 254">
+              <a:extLst>
+                <a:ext uri="{FF2B5EF4-FFF2-40B4-BE49-F238E27FC236}">
+                  <a16:creationId xmlns:a16="http://schemas.microsoft.com/office/drawing/2014/main" id="{48A5DC2A-FFBC-59BC-FB83-201D8ADFAC7A}"/>
+                </a:ext>
+              </a:extLst>
+            </p:cNvPr>
+            <p:cNvSpPr/>
+            <p:nvPr/>
+          </p:nvSpPr>
+          <p:spPr>
+            <a:xfrm>
+              <a:off x="6447035" y="3113337"/>
+              <a:ext cx="111731" cy="114948"/>
+            </a:xfrm>
+            <a:prstGeom prst="ellipse">
+              <a:avLst/>
+            </a:prstGeom>
+            <a:noFill/>
+            <a:ln w="14604">
+              <a:solidFill>
+                <a:schemeClr val="tx1"/>
+              </a:solidFill>
+            </a:ln>
+          </p:spPr>
+          <p:style>
+            <a:lnRef idx="2">
+              <a:schemeClr val="accent1">
+                <a:shade val="15000"/>
+              </a:schemeClr>
+            </a:lnRef>
+            <a:fillRef idx="1">
+              <a:schemeClr val="accent1"/>
+            </a:fillRef>
+            <a:effectRef idx="0">
+              <a:schemeClr val="accent1"/>
+            </a:effectRef>
+            <a:fontRef idx="minor">
+              <a:schemeClr val="lt1"/>
+            </a:fontRef>
+          </p:style>
+          <p:txBody>
+            <a:bodyPr rtlCol="0" anchor="ctr"/>
+            <a:lstStyle/>
+            <a:p>
+              <a:pPr algn="ctr"/>
+              <a:endParaRPr lang="fr-FR"/>
+            </a:p>
+          </p:txBody>
+        </p:sp>
+        <p:sp>
+          <p:nvSpPr>
+            <p:cNvPr id="256" name="Ellipse 255">
+              <a:extLst>
+                <a:ext uri="{FF2B5EF4-FFF2-40B4-BE49-F238E27FC236}">
+                  <a16:creationId xmlns:a16="http://schemas.microsoft.com/office/drawing/2014/main" id="{B622B953-FED4-97BA-0DCE-1CEF4DB8D578}"/>
+                </a:ext>
+              </a:extLst>
+            </p:cNvPr>
+            <p:cNvSpPr/>
+            <p:nvPr/>
+          </p:nvSpPr>
+          <p:spPr>
+            <a:xfrm>
+              <a:off x="6182388" y="2984307"/>
+              <a:ext cx="111731" cy="114948"/>
+            </a:xfrm>
+            <a:prstGeom prst="ellipse">
+              <a:avLst/>
+            </a:prstGeom>
+            <a:noFill/>
+            <a:ln w="14604">
+              <a:solidFill>
+                <a:schemeClr val="tx1"/>
+              </a:solidFill>
+            </a:ln>
+          </p:spPr>
+          <p:style>
+            <a:lnRef idx="2">
+              <a:schemeClr val="accent1">
+                <a:shade val="15000"/>
+              </a:schemeClr>
+            </a:lnRef>
+            <a:fillRef idx="1">
+              <a:schemeClr val="accent1"/>
+            </a:fillRef>
+            <a:effectRef idx="0">
+              <a:schemeClr val="accent1"/>
+            </a:effectRef>
+            <a:fontRef idx="minor">
+              <a:schemeClr val="lt1"/>
+            </a:fontRef>
+          </p:style>
+          <p:txBody>
+            <a:bodyPr rtlCol="0" anchor="ctr"/>
+            <a:lstStyle/>
+            <a:p>
+              <a:pPr algn="ctr"/>
+              <a:endParaRPr lang="fr-FR"/>
+            </a:p>
+          </p:txBody>
+        </p:sp>
+        <p:sp>
+          <p:nvSpPr>
+            <p:cNvPr id="257" name="Ellipse 256">
+              <a:extLst>
+                <a:ext uri="{FF2B5EF4-FFF2-40B4-BE49-F238E27FC236}">
+                  <a16:creationId xmlns:a16="http://schemas.microsoft.com/office/drawing/2014/main" id="{398ABFB5-1653-2A83-DE1D-A51E82A51F3E}"/>
+                </a:ext>
+              </a:extLst>
+            </p:cNvPr>
+            <p:cNvSpPr/>
+            <p:nvPr/>
+          </p:nvSpPr>
+          <p:spPr>
+            <a:xfrm>
+              <a:off x="6210095" y="3210778"/>
+              <a:ext cx="54000" cy="54000"/>
+            </a:xfrm>
+            <a:prstGeom prst="ellipse">
+              <a:avLst/>
+            </a:prstGeom>
+            <a:noFill/>
+            <a:ln w="14604">
+              <a:solidFill>
+                <a:schemeClr val="tx1"/>
+              </a:solidFill>
+            </a:ln>
+          </p:spPr>
+          <p:style>
+            <a:lnRef idx="2">
+              <a:schemeClr val="accent1">
+                <a:shade val="15000"/>
+              </a:schemeClr>
+            </a:lnRef>
+            <a:fillRef idx="1">
+              <a:schemeClr val="accent1"/>
+            </a:fillRef>
+            <a:effectRef idx="0">
+              <a:schemeClr val="accent1"/>
+            </a:effectRef>
+            <a:fontRef idx="minor">
+              <a:schemeClr val="lt1"/>
+            </a:fontRef>
+          </p:style>
+          <p:txBody>
+            <a:bodyPr rtlCol="0" anchor="ctr"/>
+            <a:lstStyle/>
+            <a:p>
+              <a:pPr algn="ctr"/>
+              <a:endParaRPr lang="fr-FR"/>
+            </a:p>
+          </p:txBody>
+        </p:sp>
+        <p:sp>
+          <p:nvSpPr>
+            <p:cNvPr id="258" name="Ellipse 257">
+              <a:extLst>
+                <a:ext uri="{FF2B5EF4-FFF2-40B4-BE49-F238E27FC236}">
+                  <a16:creationId xmlns:a16="http://schemas.microsoft.com/office/drawing/2014/main" id="{0CFE8E69-EB9D-7E7E-19DF-B5943A1F7766}"/>
+                </a:ext>
+              </a:extLst>
+            </p:cNvPr>
+            <p:cNvSpPr/>
+            <p:nvPr/>
+          </p:nvSpPr>
+          <p:spPr>
+            <a:xfrm>
+              <a:off x="6424099" y="3024984"/>
+              <a:ext cx="54000" cy="54000"/>
+            </a:xfrm>
+            <a:prstGeom prst="ellipse">
+              <a:avLst/>
+            </a:prstGeom>
+            <a:noFill/>
+            <a:ln w="14604">
+              <a:solidFill>
+                <a:schemeClr val="tx1"/>
+              </a:solidFill>
+            </a:ln>
+          </p:spPr>
+          <p:style>
+            <a:lnRef idx="2">
+              <a:schemeClr val="accent1">
+                <a:shade val="15000"/>
+              </a:schemeClr>
+            </a:lnRef>
+            <a:fillRef idx="1">
+              <a:schemeClr val="accent1"/>
+            </a:fillRef>
+            <a:effectRef idx="0">
+              <a:schemeClr val="accent1"/>
+            </a:effectRef>
+            <a:fontRef idx="minor">
+              <a:schemeClr val="lt1"/>
+            </a:fontRef>
+          </p:style>
+          <p:txBody>
+            <a:bodyPr rtlCol="0" anchor="ctr"/>
+            <a:lstStyle/>
+            <a:p>
+              <a:pPr algn="ctr"/>
+              <a:endParaRPr lang="fr-FR"/>
+            </a:p>
+          </p:txBody>
+        </p:sp>
+        <p:sp>
+          <p:nvSpPr>
+            <p:cNvPr id="210" name="Ellipse 209">
+              <a:extLst>
+                <a:ext uri="{FF2B5EF4-FFF2-40B4-BE49-F238E27FC236}">
+                  <a16:creationId xmlns:a16="http://schemas.microsoft.com/office/drawing/2014/main" id="{EC138EA1-A993-20D2-6E29-881D341AD1F6}"/>
+                </a:ext>
+              </a:extLst>
+            </p:cNvPr>
+            <p:cNvSpPr/>
+            <p:nvPr/>
+          </p:nvSpPr>
+          <p:spPr>
+            <a:xfrm>
+              <a:off x="6361262" y="3255513"/>
+              <a:ext cx="54000" cy="54000"/>
+            </a:xfrm>
+            <a:prstGeom prst="ellipse">
+              <a:avLst/>
+            </a:prstGeom>
+            <a:noFill/>
+            <a:ln w="14604">
+              <a:solidFill>
+                <a:schemeClr val="tx1"/>
+              </a:solidFill>
+            </a:ln>
+          </p:spPr>
+          <p:style>
+            <a:lnRef idx="2">
+              <a:schemeClr val="accent1">
+                <a:shade val="15000"/>
+              </a:schemeClr>
+            </a:lnRef>
+            <a:fillRef idx="1">
+              <a:schemeClr val="accent1"/>
+            </a:fillRef>
+            <a:effectRef idx="0">
+              <a:schemeClr val="accent1"/>
+            </a:effectRef>
+            <a:fontRef idx="minor">
+              <a:schemeClr val="lt1"/>
+            </a:fontRef>
+          </p:style>
+          <p:txBody>
+            <a:bodyPr rtlCol="0" anchor="ctr"/>
+            <a:lstStyle/>
+            <a:p>
+              <a:pPr algn="ctr"/>
+              <a:endParaRPr lang="fr-FR"/>
+            </a:p>
+          </p:txBody>
+        </p:sp>
+        <p:cxnSp>
+          <p:nvCxnSpPr>
+            <p:cNvPr id="219" name="Connecteur droit 218">
+              <a:extLst>
+                <a:ext uri="{FF2B5EF4-FFF2-40B4-BE49-F238E27FC236}">
+                  <a16:creationId xmlns:a16="http://schemas.microsoft.com/office/drawing/2014/main" id="{FE4B6832-7318-F50A-4BCF-9B06ADE3D349}"/>
+                </a:ext>
+              </a:extLst>
+            </p:cNvPr>
+            <p:cNvCxnSpPr>
+              <a:cxnSpLocks/>
+            </p:cNvCxnSpPr>
+            <p:nvPr/>
+          </p:nvCxnSpPr>
+          <p:spPr>
+            <a:xfrm>
+              <a:off x="6397937" y="3150430"/>
+              <a:ext cx="54269" cy="14428"/>
+            </a:xfrm>
+            <a:prstGeom prst="line">
+              <a:avLst/>
+            </a:prstGeom>
+            <a:ln w="14604">
+              <a:solidFill>
+                <a:schemeClr val="tx1"/>
+              </a:solidFill>
+            </a:ln>
+          </p:spPr>
+          <p:style>
+            <a:lnRef idx="2">
+              <a:schemeClr val="accent1"/>
+            </a:lnRef>
+            <a:fillRef idx="0">
+              <a:schemeClr val="accent1"/>
+            </a:fillRef>
+            <a:effectRef idx="1">
+              <a:schemeClr val="accent1"/>
+            </a:effectRef>
+            <a:fontRef idx="minor">
+              <a:schemeClr val="tx1"/>
+            </a:fontRef>
+          </p:style>
+        </p:cxnSp>
+        <p:cxnSp>
+          <p:nvCxnSpPr>
+            <p:cNvPr id="221" name="Connecteur droit 220">
+              <a:extLst>
+                <a:ext uri="{FF2B5EF4-FFF2-40B4-BE49-F238E27FC236}">
+                  <a16:creationId xmlns:a16="http://schemas.microsoft.com/office/drawing/2014/main" id="{F5FECF17-DABF-C520-8E92-6D2E8B99FDC8}"/>
+                </a:ext>
+              </a:extLst>
+            </p:cNvPr>
+            <p:cNvCxnSpPr>
+              <a:cxnSpLocks/>
+              <a:stCxn id="210" idx="7"/>
+              <a:endCxn id="255" idx="3"/>
+            </p:cNvCxnSpPr>
+            <p:nvPr/>
+          </p:nvCxnSpPr>
+          <p:spPr>
+            <a:xfrm flipV="1">
+              <a:off x="6407354" y="3211451"/>
+              <a:ext cx="56044" cy="51970"/>
+            </a:xfrm>
+            <a:prstGeom prst="line">
+              <a:avLst/>
+            </a:prstGeom>
+            <a:ln w="14604">
+              <a:solidFill>
+                <a:schemeClr val="tx1"/>
+              </a:solidFill>
+            </a:ln>
+          </p:spPr>
+          <p:style>
+            <a:lnRef idx="2">
+              <a:schemeClr val="accent1"/>
+            </a:lnRef>
+            <a:fillRef idx="0">
+              <a:schemeClr val="accent1"/>
+            </a:fillRef>
+            <a:effectRef idx="1">
+              <a:schemeClr val="accent1"/>
+            </a:effectRef>
+            <a:fontRef idx="minor">
+              <a:schemeClr val="tx1"/>
+            </a:fontRef>
+          </p:style>
+        </p:cxnSp>
+        <p:cxnSp>
+          <p:nvCxnSpPr>
+            <p:cNvPr id="261" name="Connecteur droit 260">
+              <a:extLst>
+                <a:ext uri="{FF2B5EF4-FFF2-40B4-BE49-F238E27FC236}">
+                  <a16:creationId xmlns:a16="http://schemas.microsoft.com/office/drawing/2014/main" id="{1142027F-028C-AFBC-C9AF-B3D29F244583}"/>
+                </a:ext>
+              </a:extLst>
+            </p:cNvPr>
+            <p:cNvCxnSpPr>
+              <a:cxnSpLocks/>
+              <a:stCxn id="249" idx="7"/>
+              <a:endCxn id="258" idx="3"/>
+            </p:cNvCxnSpPr>
+            <p:nvPr/>
+          </p:nvCxnSpPr>
+          <p:spPr>
+            <a:xfrm flipV="1">
+              <a:off x="6387924" y="3071076"/>
+              <a:ext cx="44083" cy="35539"/>
+            </a:xfrm>
+            <a:prstGeom prst="line">
+              <a:avLst/>
+            </a:prstGeom>
+            <a:ln w="14604">
+              <a:solidFill>
+                <a:schemeClr val="tx1"/>
+              </a:solidFill>
+            </a:ln>
+          </p:spPr>
+          <p:style>
+            <a:lnRef idx="2">
+              <a:schemeClr val="accent1"/>
+            </a:lnRef>
+            <a:fillRef idx="0">
+              <a:schemeClr val="accent1"/>
+            </a:fillRef>
+            <a:effectRef idx="1">
+              <a:schemeClr val="accent1"/>
+            </a:effectRef>
+            <a:fontRef idx="minor">
+              <a:schemeClr val="tx1"/>
+            </a:fontRef>
+          </p:style>
+        </p:cxnSp>
+        <p:cxnSp>
+          <p:nvCxnSpPr>
+            <p:cNvPr id="265" name="Connecteur droit 264">
+              <a:extLst>
+                <a:ext uri="{FF2B5EF4-FFF2-40B4-BE49-F238E27FC236}">
+                  <a16:creationId xmlns:a16="http://schemas.microsoft.com/office/drawing/2014/main" id="{09B249F0-09C5-0FBF-CE33-5059533F774B}"/>
+                </a:ext>
+              </a:extLst>
+            </p:cNvPr>
+            <p:cNvCxnSpPr>
+              <a:cxnSpLocks/>
+              <a:stCxn id="210" idx="1"/>
+              <a:endCxn id="249" idx="4"/>
+            </p:cNvCxnSpPr>
+            <p:nvPr/>
+          </p:nvCxnSpPr>
+          <p:spPr>
+            <a:xfrm flipH="1" flipV="1">
+              <a:off x="6348422" y="3204729"/>
+              <a:ext cx="20748" cy="58692"/>
+            </a:xfrm>
+            <a:prstGeom prst="line">
+              <a:avLst/>
+            </a:prstGeom>
+            <a:ln w="14604">
+              <a:solidFill>
+                <a:schemeClr val="tx1"/>
+              </a:solidFill>
+            </a:ln>
+          </p:spPr>
+          <p:style>
+            <a:lnRef idx="2">
+              <a:schemeClr val="accent1"/>
+            </a:lnRef>
+            <a:fillRef idx="0">
+              <a:schemeClr val="accent1"/>
+            </a:fillRef>
+            <a:effectRef idx="1">
+              <a:schemeClr val="accent1"/>
+            </a:effectRef>
+            <a:fontRef idx="minor">
+              <a:schemeClr val="tx1"/>
+            </a:fontRef>
+          </p:style>
+        </p:cxnSp>
+        <p:cxnSp>
+          <p:nvCxnSpPr>
+            <p:cNvPr id="272" name="Connecteur droit 271">
+              <a:extLst>
+                <a:ext uri="{FF2B5EF4-FFF2-40B4-BE49-F238E27FC236}">
+                  <a16:creationId xmlns:a16="http://schemas.microsoft.com/office/drawing/2014/main" id="{4E7DBC1C-7D9E-0136-FD4A-F8588E49C623}"/>
+                </a:ext>
+              </a:extLst>
+            </p:cNvPr>
+            <p:cNvCxnSpPr>
+              <a:cxnSpLocks/>
+              <a:stCxn id="257" idx="7"/>
+              <a:endCxn id="249" idx="3"/>
+            </p:cNvCxnSpPr>
+            <p:nvPr/>
+          </p:nvCxnSpPr>
+          <p:spPr>
+            <a:xfrm flipV="1">
+              <a:off x="6256187" y="3187895"/>
+              <a:ext cx="52732" cy="30791"/>
+            </a:xfrm>
+            <a:prstGeom prst="line">
+              <a:avLst/>
+            </a:prstGeom>
+            <a:ln w="14604">
+              <a:solidFill>
+                <a:schemeClr val="tx1"/>
+              </a:solidFill>
+            </a:ln>
+          </p:spPr>
+          <p:style>
+            <a:lnRef idx="2">
+              <a:schemeClr val="accent1"/>
+            </a:lnRef>
+            <a:fillRef idx="0">
+              <a:schemeClr val="accent1"/>
+            </a:fillRef>
+            <a:effectRef idx="1">
+              <a:schemeClr val="accent1"/>
+            </a:effectRef>
+            <a:fontRef idx="minor">
+              <a:schemeClr val="tx1"/>
+            </a:fontRef>
+          </p:style>
+        </p:cxnSp>
+        <p:cxnSp>
+          <p:nvCxnSpPr>
+            <p:cNvPr id="276" name="Connecteur droit 275">
+              <a:extLst>
+                <a:ext uri="{FF2B5EF4-FFF2-40B4-BE49-F238E27FC236}">
+                  <a16:creationId xmlns:a16="http://schemas.microsoft.com/office/drawing/2014/main" id="{50AEA016-44E6-D8CD-FBF8-C4AF1A50ED44}"/>
+                </a:ext>
+              </a:extLst>
+            </p:cNvPr>
+            <p:cNvCxnSpPr>
+              <a:cxnSpLocks/>
+              <a:stCxn id="258" idx="2"/>
+              <a:endCxn id="256" idx="6"/>
+            </p:cNvCxnSpPr>
+            <p:nvPr/>
+          </p:nvCxnSpPr>
+          <p:spPr>
+            <a:xfrm flipH="1" flipV="1">
+              <a:off x="6294119" y="3041781"/>
+              <a:ext cx="129980" cy="10203"/>
+            </a:xfrm>
+            <a:prstGeom prst="line">
+              <a:avLst/>
+            </a:prstGeom>
+            <a:ln w="14604">
+              <a:solidFill>
+                <a:schemeClr val="tx1"/>
+              </a:solidFill>
+            </a:ln>
+          </p:spPr>
+          <p:style>
+            <a:lnRef idx="2">
+              <a:schemeClr val="accent1"/>
+            </a:lnRef>
+            <a:fillRef idx="0">
+              <a:schemeClr val="accent1"/>
+            </a:fillRef>
+            <a:effectRef idx="1">
+              <a:schemeClr val="accent1"/>
+            </a:effectRef>
+            <a:fontRef idx="minor">
+              <a:schemeClr val="tx1"/>
+            </a:fontRef>
+          </p:style>
+        </p:cxnSp>
+        <p:cxnSp>
+          <p:nvCxnSpPr>
+            <p:cNvPr id="279" name="Connecteur droit 278">
+              <a:extLst>
+                <a:ext uri="{FF2B5EF4-FFF2-40B4-BE49-F238E27FC236}">
+                  <a16:creationId xmlns:a16="http://schemas.microsoft.com/office/drawing/2014/main" id="{70471000-D017-6171-D384-EF9943D6C511}"/>
+                </a:ext>
+              </a:extLst>
+            </p:cNvPr>
+            <p:cNvCxnSpPr>
+              <a:cxnSpLocks/>
+              <a:stCxn id="249" idx="1"/>
+              <a:endCxn id="256" idx="5"/>
+            </p:cNvCxnSpPr>
+            <p:nvPr/>
+          </p:nvCxnSpPr>
+          <p:spPr>
+            <a:xfrm flipH="1" flipV="1">
+              <a:off x="6277756" y="3082421"/>
+              <a:ext cx="31163" cy="24194"/>
+            </a:xfrm>
+            <a:prstGeom prst="line">
+              <a:avLst/>
+            </a:prstGeom>
+            <a:ln w="14604">
+              <a:solidFill>
+                <a:schemeClr val="tx1"/>
+              </a:solidFill>
+            </a:ln>
+          </p:spPr>
+          <p:style>
+            <a:lnRef idx="2">
+              <a:schemeClr val="accent1"/>
+            </a:lnRef>
+            <a:fillRef idx="0">
+              <a:schemeClr val="accent1"/>
+            </a:fillRef>
+            <a:effectRef idx="1">
+              <a:schemeClr val="accent1"/>
+            </a:effectRef>
+            <a:fontRef idx="minor">
+              <a:schemeClr val="tx1"/>
+            </a:fontRef>
+          </p:style>
+        </p:cxnSp>
+      </p:grpSp>
+      <p:grpSp>
+        <p:nvGrpSpPr>
+          <p:cNvPr id="315" name="Groupe 314">
+            <a:extLst>
+              <a:ext uri="{FF2B5EF4-FFF2-40B4-BE49-F238E27FC236}">
+                <a16:creationId xmlns:a16="http://schemas.microsoft.com/office/drawing/2014/main" id="{1B550383-8A08-3585-358C-4536EDEF1A90}"/>
+              </a:ext>
+            </a:extLst>
+          </p:cNvPr>
+          <p:cNvGrpSpPr/>
+          <p:nvPr/>
+        </p:nvGrpSpPr>
+        <p:grpSpPr>
+          <a:xfrm>
+            <a:off x="1866993" y="4223380"/>
+            <a:ext cx="413586" cy="300827"/>
+            <a:chOff x="1866993" y="4223380"/>
+            <a:chExt cx="413586" cy="300827"/>
+          </a:xfrm>
+        </p:grpSpPr>
+        <p:sp>
+          <p:nvSpPr>
+            <p:cNvPr id="289" name="Arc 288">
+              <a:extLst>
+                <a:ext uri="{FF2B5EF4-FFF2-40B4-BE49-F238E27FC236}">
+                  <a16:creationId xmlns:a16="http://schemas.microsoft.com/office/drawing/2014/main" id="{6A8087B3-6F4B-7C9D-F045-A08A1B49F60C}"/>
+                </a:ext>
+              </a:extLst>
+            </p:cNvPr>
+            <p:cNvSpPr/>
+            <p:nvPr/>
+          </p:nvSpPr>
+          <p:spPr>
+            <a:xfrm>
+              <a:off x="2000066" y="4423407"/>
+              <a:ext cx="100800" cy="100800"/>
+            </a:xfrm>
+            <a:prstGeom prst="arc">
+              <a:avLst>
+                <a:gd name="adj1" fmla="val 15640526"/>
+                <a:gd name="adj2" fmla="val 11481107"/>
+              </a:avLst>
+            </a:prstGeom>
+            <a:ln w="14604">
+              <a:solidFill>
+                <a:srgbClr val="A02A93"/>
+              </a:solidFill>
+            </a:ln>
+          </p:spPr>
+          <p:style>
+            <a:lnRef idx="2">
+              <a:schemeClr val="accent1"/>
+            </a:lnRef>
+            <a:fillRef idx="0">
+              <a:schemeClr val="accent1"/>
+            </a:fillRef>
+            <a:effectRef idx="1">
+              <a:schemeClr val="accent1"/>
+            </a:effectRef>
+            <a:fontRef idx="minor">
+              <a:schemeClr val="tx1"/>
+            </a:fontRef>
+          </p:style>
+          <p:txBody>
+            <a:bodyPr rtlCol="0" anchor="ctr"/>
+            <a:lstStyle/>
+            <a:p>
+              <a:pPr algn="ctr"/>
+              <a:endParaRPr lang="fr-FR"/>
+            </a:p>
+          </p:txBody>
+        </p:sp>
+        <p:cxnSp>
+          <p:nvCxnSpPr>
+            <p:cNvPr id="291" name="Connecteur droit 290">
+              <a:extLst>
+                <a:ext uri="{FF2B5EF4-FFF2-40B4-BE49-F238E27FC236}">
+                  <a16:creationId xmlns:a16="http://schemas.microsoft.com/office/drawing/2014/main" id="{C525D2F3-A25E-B2C7-0FF7-F8C27CEC2C18}"/>
+                </a:ext>
+              </a:extLst>
+            </p:cNvPr>
+            <p:cNvCxnSpPr>
+              <a:cxnSpLocks/>
+              <a:stCxn id="289" idx="0"/>
+            </p:cNvCxnSpPr>
+            <p:nvPr/>
+          </p:nvCxnSpPr>
+          <p:spPr>
+            <a:xfrm flipH="1" flipV="1">
+              <a:off x="1890818" y="4423721"/>
+              <a:ext cx="151482" cy="352"/>
+            </a:xfrm>
+            <a:prstGeom prst="line">
+              <a:avLst/>
+            </a:prstGeom>
+            <a:ln w="14604">
+              <a:solidFill>
+                <a:srgbClr val="A02A93"/>
+              </a:solidFill>
+            </a:ln>
+          </p:spPr>
+          <p:style>
+            <a:lnRef idx="2">
+              <a:schemeClr val="accent1"/>
+            </a:lnRef>
+            <a:fillRef idx="0">
+              <a:schemeClr val="accent1"/>
+            </a:fillRef>
+            <a:effectRef idx="1">
+              <a:schemeClr val="accent1"/>
+            </a:effectRef>
+            <a:fontRef idx="minor">
+              <a:schemeClr val="tx1"/>
+            </a:fontRef>
+          </p:style>
+        </p:cxnSp>
+        <p:cxnSp>
+          <p:nvCxnSpPr>
+            <p:cNvPr id="298" name="Connecteur droit 297">
+              <a:extLst>
+                <a:ext uri="{FF2B5EF4-FFF2-40B4-BE49-F238E27FC236}">
+                  <a16:creationId xmlns:a16="http://schemas.microsoft.com/office/drawing/2014/main" id="{1875411E-7838-EBD0-0C85-523CFC005235}"/>
+                </a:ext>
+              </a:extLst>
+            </p:cNvPr>
+            <p:cNvCxnSpPr>
+              <a:cxnSpLocks/>
+            </p:cNvCxnSpPr>
+            <p:nvPr/>
+          </p:nvCxnSpPr>
+          <p:spPr>
+            <a:xfrm flipH="1">
+              <a:off x="1866993" y="4376619"/>
+              <a:ext cx="360011" cy="0"/>
+            </a:xfrm>
+            <a:prstGeom prst="line">
+              <a:avLst/>
+            </a:prstGeom>
+            <a:ln w="14604">
+              <a:solidFill>
+                <a:srgbClr val="A02A93"/>
+              </a:solidFill>
+            </a:ln>
+          </p:spPr>
+          <p:style>
+            <a:lnRef idx="2">
+              <a:schemeClr val="accent1"/>
+            </a:lnRef>
+            <a:fillRef idx="0">
+              <a:schemeClr val="accent1"/>
+            </a:fillRef>
+            <a:effectRef idx="1">
+              <a:schemeClr val="accent1"/>
+            </a:effectRef>
+            <a:fontRef idx="minor">
+              <a:schemeClr val="tx1"/>
+            </a:fontRef>
+          </p:style>
+        </p:cxnSp>
+        <p:sp>
+          <p:nvSpPr>
+            <p:cNvPr id="302" name="Arc 301">
+              <a:extLst>
+                <a:ext uri="{FF2B5EF4-FFF2-40B4-BE49-F238E27FC236}">
+                  <a16:creationId xmlns:a16="http://schemas.microsoft.com/office/drawing/2014/main" id="{0B10CDC9-201C-32D4-87FE-75F6A2306FAE}"/>
+                </a:ext>
+              </a:extLst>
+            </p:cNvPr>
+            <p:cNvSpPr/>
+            <p:nvPr/>
+          </p:nvSpPr>
+          <p:spPr>
+            <a:xfrm>
+              <a:off x="2179779" y="4376182"/>
+              <a:ext cx="100800" cy="100800"/>
+            </a:xfrm>
+            <a:prstGeom prst="arc">
+              <a:avLst>
+                <a:gd name="adj1" fmla="val 15640526"/>
+                <a:gd name="adj2" fmla="val 11442570"/>
+              </a:avLst>
+            </a:prstGeom>
+            <a:ln w="14604">
+              <a:solidFill>
+                <a:srgbClr val="A02A93"/>
+              </a:solidFill>
+            </a:ln>
+          </p:spPr>
+          <p:style>
+            <a:lnRef idx="2">
+              <a:schemeClr val="accent1"/>
+            </a:lnRef>
+            <a:fillRef idx="0">
+              <a:schemeClr val="accent1"/>
+            </a:fillRef>
+            <a:effectRef idx="1">
+              <a:schemeClr val="accent1"/>
+            </a:effectRef>
+            <a:fontRef idx="minor">
+              <a:schemeClr val="tx1"/>
+            </a:fontRef>
+          </p:style>
+          <p:txBody>
+            <a:bodyPr rtlCol="0" anchor="ctr"/>
+            <a:lstStyle/>
+            <a:p>
+              <a:pPr algn="ctr"/>
+              <a:endParaRPr lang="fr-FR"/>
+            </a:p>
+          </p:txBody>
+        </p:sp>
+        <p:cxnSp>
+          <p:nvCxnSpPr>
+            <p:cNvPr id="303" name="Connecteur droit 302">
+              <a:extLst>
+                <a:ext uri="{FF2B5EF4-FFF2-40B4-BE49-F238E27FC236}">
+                  <a16:creationId xmlns:a16="http://schemas.microsoft.com/office/drawing/2014/main" id="{7A764C2F-4274-A9DC-3EA2-383A59CF2858}"/>
+                </a:ext>
+              </a:extLst>
+            </p:cNvPr>
+            <p:cNvCxnSpPr>
+              <a:cxnSpLocks/>
+            </p:cNvCxnSpPr>
+            <p:nvPr/>
+          </p:nvCxnSpPr>
+          <p:spPr>
+            <a:xfrm flipH="1">
+              <a:off x="1933668" y="4325819"/>
+              <a:ext cx="237555" cy="0"/>
+            </a:xfrm>
+            <a:prstGeom prst="line">
+              <a:avLst/>
+            </a:prstGeom>
+            <a:ln w="14604">
+              <a:solidFill>
+                <a:srgbClr val="A02A93"/>
+              </a:solidFill>
+            </a:ln>
+          </p:spPr>
+          <p:style>
+            <a:lnRef idx="2">
+              <a:schemeClr val="accent1"/>
+            </a:lnRef>
+            <a:fillRef idx="0">
+              <a:schemeClr val="accent1"/>
+            </a:fillRef>
+            <a:effectRef idx="1">
+              <a:schemeClr val="accent1"/>
+            </a:effectRef>
+            <a:fontRef idx="minor">
+              <a:schemeClr val="tx1"/>
+            </a:fontRef>
+          </p:style>
+        </p:cxnSp>
+        <p:sp>
+          <p:nvSpPr>
+            <p:cNvPr id="305" name="Arc 304">
+              <a:extLst>
+                <a:ext uri="{FF2B5EF4-FFF2-40B4-BE49-F238E27FC236}">
+                  <a16:creationId xmlns:a16="http://schemas.microsoft.com/office/drawing/2014/main" id="{292B170A-51E8-4F27-8E1E-791728DD0857}"/>
+                </a:ext>
+              </a:extLst>
+            </p:cNvPr>
+            <p:cNvSpPr/>
+            <p:nvPr/>
+          </p:nvSpPr>
+          <p:spPr>
+            <a:xfrm>
+              <a:off x="2127578" y="4223380"/>
+              <a:ext cx="100800" cy="100800"/>
+            </a:xfrm>
+            <a:prstGeom prst="arc">
+              <a:avLst>
+                <a:gd name="adj1" fmla="val 10274091"/>
+                <a:gd name="adj2" fmla="val 5925472"/>
+              </a:avLst>
+            </a:prstGeom>
+            <a:ln w="14604">
+              <a:solidFill>
+                <a:srgbClr val="A02A93"/>
+              </a:solidFill>
+            </a:ln>
+          </p:spPr>
+          <p:style>
+            <a:lnRef idx="2">
+              <a:schemeClr val="accent1"/>
+            </a:lnRef>
+            <a:fillRef idx="0">
+              <a:schemeClr val="accent1"/>
+            </a:fillRef>
+            <a:effectRef idx="1">
+              <a:schemeClr val="accent1"/>
+            </a:effectRef>
+            <a:fontRef idx="minor">
+              <a:schemeClr val="tx1"/>
+            </a:fontRef>
+          </p:style>
+          <p:txBody>
+            <a:bodyPr rtlCol="0" anchor="ctr"/>
+            <a:lstStyle/>
+            <a:p>
+              <a:pPr algn="ctr"/>
+              <a:endParaRPr lang="fr-FR"/>
+            </a:p>
+          </p:txBody>
+        </p:sp>
+      </p:grpSp>
+      <p:grpSp>
+        <p:nvGrpSpPr>
+          <p:cNvPr id="314" name="Groupe 313">
+            <a:extLst>
+              <a:ext uri="{FF2B5EF4-FFF2-40B4-BE49-F238E27FC236}">
+                <a16:creationId xmlns:a16="http://schemas.microsoft.com/office/drawing/2014/main" id="{44942FB4-35FB-C532-8607-41A3A1D1581D}"/>
+              </a:ext>
+            </a:extLst>
+          </p:cNvPr>
+          <p:cNvGrpSpPr/>
+          <p:nvPr/>
+        </p:nvGrpSpPr>
+        <p:grpSpPr>
+          <a:xfrm>
+            <a:off x="2912013" y="6105196"/>
+            <a:ext cx="413586" cy="300827"/>
+            <a:chOff x="2019393" y="4375780"/>
+            <a:chExt cx="413586" cy="300827"/>
+          </a:xfrm>
+        </p:grpSpPr>
+        <p:sp>
+          <p:nvSpPr>
+            <p:cNvPr id="307" name="Arc 306">
+              <a:extLst>
+                <a:ext uri="{FF2B5EF4-FFF2-40B4-BE49-F238E27FC236}">
+                  <a16:creationId xmlns:a16="http://schemas.microsoft.com/office/drawing/2014/main" id="{8BD40CFB-0D7A-B841-AA5A-FF1A3C357C7E}"/>
+                </a:ext>
+              </a:extLst>
+            </p:cNvPr>
+            <p:cNvSpPr/>
+            <p:nvPr/>
+          </p:nvSpPr>
+          <p:spPr>
+            <a:xfrm>
+              <a:off x="2152466" y="4575807"/>
+              <a:ext cx="100800" cy="100800"/>
+            </a:xfrm>
+            <a:prstGeom prst="arc">
+              <a:avLst>
+                <a:gd name="adj1" fmla="val 15640526"/>
+                <a:gd name="adj2" fmla="val 11481107"/>
+              </a:avLst>
+            </a:prstGeom>
+            <a:ln w="14604">
+              <a:solidFill>
+                <a:srgbClr val="A02A93"/>
+              </a:solidFill>
+            </a:ln>
+          </p:spPr>
+          <p:style>
+            <a:lnRef idx="2">
+              <a:schemeClr val="accent1"/>
+            </a:lnRef>
+            <a:fillRef idx="0">
+              <a:schemeClr val="accent1"/>
+            </a:fillRef>
+            <a:effectRef idx="1">
+              <a:schemeClr val="accent1"/>
+            </a:effectRef>
+            <a:fontRef idx="minor">
+              <a:schemeClr val="tx1"/>
+            </a:fontRef>
+          </p:style>
+          <p:txBody>
+            <a:bodyPr rtlCol="0" anchor="ctr"/>
+            <a:lstStyle/>
+            <a:p>
+              <a:pPr algn="ctr"/>
+              <a:endParaRPr lang="fr-FR"/>
+            </a:p>
+          </p:txBody>
+        </p:sp>
+        <p:cxnSp>
+          <p:nvCxnSpPr>
+            <p:cNvPr id="309" name="Connecteur droit 308">
+              <a:extLst>
+                <a:ext uri="{FF2B5EF4-FFF2-40B4-BE49-F238E27FC236}">
+                  <a16:creationId xmlns:a16="http://schemas.microsoft.com/office/drawing/2014/main" id="{BB832691-6E2D-7E57-D4C3-DFE09F73C82B}"/>
+                </a:ext>
+              </a:extLst>
+            </p:cNvPr>
+            <p:cNvCxnSpPr>
+              <a:cxnSpLocks/>
+              <a:stCxn id="307" idx="0"/>
+            </p:cNvCxnSpPr>
+            <p:nvPr/>
+          </p:nvCxnSpPr>
+          <p:spPr>
+            <a:xfrm flipH="1" flipV="1">
+              <a:off x="2043218" y="4576121"/>
+              <a:ext cx="151482" cy="352"/>
+            </a:xfrm>
+            <a:prstGeom prst="line">
+              <a:avLst/>
+            </a:prstGeom>
+            <a:ln w="14604">
+              <a:solidFill>
+                <a:srgbClr val="A02A93"/>
+              </a:solidFill>
+            </a:ln>
+          </p:spPr>
+          <p:style>
+            <a:lnRef idx="2">
+              <a:schemeClr val="accent1"/>
+            </a:lnRef>
+            <a:fillRef idx="0">
+              <a:schemeClr val="accent1"/>
+            </a:fillRef>
+            <a:effectRef idx="1">
+              <a:schemeClr val="accent1"/>
+            </a:effectRef>
+            <a:fontRef idx="minor">
+              <a:schemeClr val="tx1"/>
+            </a:fontRef>
+          </p:style>
+        </p:cxnSp>
+        <p:cxnSp>
+          <p:nvCxnSpPr>
+            <p:cNvPr id="310" name="Connecteur droit 309">
+              <a:extLst>
+                <a:ext uri="{FF2B5EF4-FFF2-40B4-BE49-F238E27FC236}">
+                  <a16:creationId xmlns:a16="http://schemas.microsoft.com/office/drawing/2014/main" id="{0D7CEC23-3FBB-F0FE-F5DD-65E14740178D}"/>
+                </a:ext>
+              </a:extLst>
+            </p:cNvPr>
+            <p:cNvCxnSpPr>
+              <a:cxnSpLocks/>
+            </p:cNvCxnSpPr>
+            <p:nvPr/>
+          </p:nvCxnSpPr>
+          <p:spPr>
+            <a:xfrm flipH="1">
+              <a:off x="2019393" y="4529019"/>
+              <a:ext cx="360011" cy="0"/>
+            </a:xfrm>
+            <a:prstGeom prst="line">
+              <a:avLst/>
+            </a:prstGeom>
+            <a:ln w="14604">
+              <a:solidFill>
+                <a:srgbClr val="A02A93"/>
+              </a:solidFill>
+            </a:ln>
+          </p:spPr>
+          <p:style>
+            <a:lnRef idx="2">
+              <a:schemeClr val="accent1"/>
+            </a:lnRef>
+            <a:fillRef idx="0">
+              <a:schemeClr val="accent1"/>
+            </a:fillRef>
+            <a:effectRef idx="1">
+              <a:schemeClr val="accent1"/>
+            </a:effectRef>
+            <a:fontRef idx="minor">
+              <a:schemeClr val="tx1"/>
+            </a:fontRef>
+          </p:style>
+        </p:cxnSp>
+        <p:sp>
+          <p:nvSpPr>
+            <p:cNvPr id="311" name="Arc 310">
+              <a:extLst>
+                <a:ext uri="{FF2B5EF4-FFF2-40B4-BE49-F238E27FC236}">
+                  <a16:creationId xmlns:a16="http://schemas.microsoft.com/office/drawing/2014/main" id="{3D99BB64-B304-CAE4-1DFD-3FDAAC43DA19}"/>
+                </a:ext>
+              </a:extLst>
+            </p:cNvPr>
+            <p:cNvSpPr/>
+            <p:nvPr/>
+          </p:nvSpPr>
+          <p:spPr>
+            <a:xfrm>
+              <a:off x="2332179" y="4528582"/>
+              <a:ext cx="100800" cy="100800"/>
+            </a:xfrm>
+            <a:prstGeom prst="arc">
+              <a:avLst>
+                <a:gd name="adj1" fmla="val 15640526"/>
+                <a:gd name="adj2" fmla="val 11442570"/>
+              </a:avLst>
+            </a:prstGeom>
+            <a:ln w="14604">
+              <a:solidFill>
+                <a:srgbClr val="A02A93"/>
+              </a:solidFill>
+            </a:ln>
+          </p:spPr>
+          <p:style>
+            <a:lnRef idx="2">
+              <a:schemeClr val="accent1"/>
+            </a:lnRef>
+            <a:fillRef idx="0">
+              <a:schemeClr val="accent1"/>
+            </a:fillRef>
+            <a:effectRef idx="1">
+              <a:schemeClr val="accent1"/>
+            </a:effectRef>
+            <a:fontRef idx="minor">
+              <a:schemeClr val="tx1"/>
+            </a:fontRef>
+          </p:style>
+          <p:txBody>
+            <a:bodyPr rtlCol="0" anchor="ctr"/>
+            <a:lstStyle/>
+            <a:p>
+              <a:pPr algn="ctr"/>
+              <a:endParaRPr lang="fr-FR"/>
+            </a:p>
+          </p:txBody>
+        </p:sp>
+        <p:cxnSp>
+          <p:nvCxnSpPr>
+            <p:cNvPr id="312" name="Connecteur droit 311">
+              <a:extLst>
+                <a:ext uri="{FF2B5EF4-FFF2-40B4-BE49-F238E27FC236}">
+                  <a16:creationId xmlns:a16="http://schemas.microsoft.com/office/drawing/2014/main" id="{0F32D37C-940A-F8F1-BEBB-BCF04AC37EE6}"/>
+                </a:ext>
+              </a:extLst>
+            </p:cNvPr>
+            <p:cNvCxnSpPr>
+              <a:cxnSpLocks/>
+            </p:cNvCxnSpPr>
+            <p:nvPr/>
+          </p:nvCxnSpPr>
+          <p:spPr>
+            <a:xfrm flipH="1">
+              <a:off x="2086068" y="4478219"/>
+              <a:ext cx="237555" cy="0"/>
+            </a:xfrm>
+            <a:prstGeom prst="line">
+              <a:avLst/>
+            </a:prstGeom>
+            <a:ln w="14604">
+              <a:solidFill>
+                <a:srgbClr val="A02A93"/>
+              </a:solidFill>
+            </a:ln>
+          </p:spPr>
+          <p:style>
+            <a:lnRef idx="2">
+              <a:schemeClr val="accent1"/>
+            </a:lnRef>
+            <a:fillRef idx="0">
+              <a:schemeClr val="accent1"/>
+            </a:fillRef>
+            <a:effectRef idx="1">
+              <a:schemeClr val="accent1"/>
+            </a:effectRef>
+            <a:fontRef idx="minor">
+              <a:schemeClr val="tx1"/>
+            </a:fontRef>
+          </p:style>
+        </p:cxnSp>
+        <p:sp>
+          <p:nvSpPr>
+            <p:cNvPr id="313" name="Arc 312">
+              <a:extLst>
+                <a:ext uri="{FF2B5EF4-FFF2-40B4-BE49-F238E27FC236}">
+                  <a16:creationId xmlns:a16="http://schemas.microsoft.com/office/drawing/2014/main" id="{EAB72481-F43D-4407-9B5C-97770CDB143D}"/>
+                </a:ext>
+              </a:extLst>
+            </p:cNvPr>
+            <p:cNvSpPr/>
+            <p:nvPr/>
+          </p:nvSpPr>
+          <p:spPr>
+            <a:xfrm>
+              <a:off x="2279978" y="4375780"/>
+              <a:ext cx="100800" cy="100800"/>
+            </a:xfrm>
+            <a:prstGeom prst="arc">
+              <a:avLst>
+                <a:gd name="adj1" fmla="val 10274091"/>
+                <a:gd name="adj2" fmla="val 5925472"/>
+              </a:avLst>
+            </a:prstGeom>
+            <a:ln w="14604">
+              <a:solidFill>
+                <a:srgbClr val="A02A93"/>
+              </a:solidFill>
+            </a:ln>
+          </p:spPr>
+          <p:style>
+            <a:lnRef idx="2">
+              <a:schemeClr val="accent1"/>
+            </a:lnRef>
+            <a:fillRef idx="0">
+              <a:schemeClr val="accent1"/>
+            </a:fillRef>
+            <a:effectRef idx="1">
+              <a:schemeClr val="accent1"/>
+            </a:effectRef>
+            <a:fontRef idx="minor">
+              <a:schemeClr val="tx1"/>
+            </a:fontRef>
+          </p:style>
+          <p:txBody>
+            <a:bodyPr rtlCol="0" anchor="ctr"/>
+            <a:lstStyle/>
+            <a:p>
+              <a:pPr algn="ctr"/>
+              <a:endParaRPr lang="fr-FR"/>
+            </a:p>
+          </p:txBody>
+        </p:sp>
+      </p:grpSp>
     </p:spTree>
     <p:extLst>
       <p:ext uri="{BB962C8B-B14F-4D97-AF65-F5344CB8AC3E}">

--- a/fig/paper/Figure1.pptx
+++ b/fig/paper/Figure1.pptx
@@ -1294,7 +1294,7 @@
           <a:p>
             <a:fld id="{FC063745-338C-6544-A5D2-E98827DF5448}" type="datetimeFigureOut">
               <a:rPr lang="fr-FR" smtClean="0"/>
-              <a:t>14/04/2026</a:t>
+              <a:t>04/06/2026</a:t>
             </a:fld>
             <a:endParaRPr lang="fr-FR"/>
           </a:p>
@@ -1692,7 +1692,7 @@
           <a:p>
             <a:fld id="{313D89CB-2992-504C-8485-488CC4F9911A}" type="datetime1">
               <a:rPr lang="fr-FR" smtClean="0"/>
-              <a:t>14/04/2026</a:t>
+              <a:t>04/06/2026</a:t>
             </a:fld>
             <a:endParaRPr lang="fr-FR"/>
           </a:p>
@@ -1862,7 +1862,7 @@
           <a:p>
             <a:fld id="{2BD3FA36-0741-BA4C-B4B5-15DB72BF03A1}" type="datetime1">
               <a:rPr lang="fr-FR" smtClean="0"/>
-              <a:t>14/04/2026</a:t>
+              <a:t>04/06/2026</a:t>
             </a:fld>
             <a:endParaRPr lang="fr-FR"/>
           </a:p>
@@ -2042,7 +2042,7 @@
           <a:p>
             <a:fld id="{05CC4263-710C-0844-9D48-8CC43FD5ED7E}" type="datetime1">
               <a:rPr lang="fr-FR" smtClean="0"/>
-              <a:t>14/04/2026</a:t>
+              <a:t>04/06/2026</a:t>
             </a:fld>
             <a:endParaRPr lang="fr-FR"/>
           </a:p>
@@ -2212,7 +2212,7 @@
           <a:p>
             <a:fld id="{6D246230-44E5-7149-A9C0-9697288E77C8}" type="datetime1">
               <a:rPr lang="fr-FR" smtClean="0"/>
-              <a:t>14/04/2026</a:t>
+              <a:t>04/06/2026</a:t>
             </a:fld>
             <a:endParaRPr lang="fr-FR"/>
           </a:p>
@@ -2458,7 +2458,7 @@
           <a:p>
             <a:fld id="{B2E6C6B8-87C5-9042-8379-57F3FAAEA27C}" type="datetime1">
               <a:rPr lang="fr-FR" smtClean="0"/>
-              <a:t>14/04/2026</a:t>
+              <a:t>04/06/2026</a:t>
             </a:fld>
             <a:endParaRPr lang="fr-FR"/>
           </a:p>
@@ -2690,7 +2690,7 @@
           <a:p>
             <a:fld id="{743B3B7F-FB76-574A-A50A-1B727FB2048E}" type="datetime1">
               <a:rPr lang="fr-FR" smtClean="0"/>
-              <a:t>14/04/2026</a:t>
+              <a:t>04/06/2026</a:t>
             </a:fld>
             <a:endParaRPr lang="fr-FR"/>
           </a:p>
@@ -3057,7 +3057,7 @@
           <a:p>
             <a:fld id="{7EC74428-84BA-3B4B-B43B-C65A92789810}" type="datetime1">
               <a:rPr lang="fr-FR" smtClean="0"/>
-              <a:t>14/04/2026</a:t>
+              <a:t>04/06/2026</a:t>
             </a:fld>
             <a:endParaRPr lang="fr-FR"/>
           </a:p>
@@ -3175,7 +3175,7 @@
           <a:p>
             <a:fld id="{45F830CD-A919-E446-A668-AE81763E5C43}" type="datetime1">
               <a:rPr lang="fr-FR" smtClean="0"/>
-              <a:t>14/04/2026</a:t>
+              <a:t>04/06/2026</a:t>
             </a:fld>
             <a:endParaRPr lang="fr-FR"/>
           </a:p>
@@ -3270,7 +3270,7 @@
           <a:p>
             <a:fld id="{71FB997D-B6C7-6B4B-B04D-489C2B815439}" type="datetime1">
               <a:rPr lang="fr-FR" smtClean="0"/>
-              <a:t>14/04/2026</a:t>
+              <a:t>04/06/2026</a:t>
             </a:fld>
             <a:endParaRPr lang="fr-FR"/>
           </a:p>
@@ -3547,7 +3547,7 @@
           <a:p>
             <a:fld id="{58312FBC-18EE-0C4F-A90A-8E31346EA436}" type="datetime1">
               <a:rPr lang="fr-FR" smtClean="0"/>
-              <a:t>14/04/2026</a:t>
+              <a:t>04/06/2026</a:t>
             </a:fld>
             <a:endParaRPr lang="fr-FR"/>
           </a:p>
@@ -3804,7 +3804,7 @@
           <a:p>
             <a:fld id="{507D74E3-20C5-3843-8BB5-9F1E31E1AB26}" type="datetime1">
               <a:rPr lang="fr-FR" smtClean="0"/>
-              <a:t>14/04/2026</a:t>
+              <a:t>04/06/2026</a:t>
             </a:fld>
             <a:endParaRPr lang="fr-FR"/>
           </a:p>
@@ -4017,7 +4017,7 @@
           <a:p>
             <a:fld id="{BFC8098D-FEF3-9840-8384-7EB58056CD3E}" type="datetime1">
               <a:rPr lang="fr-FR" smtClean="0"/>
-              <a:t>14/04/2026</a:t>
+              <a:t>04/06/2026</a:t>
             </a:fld>
             <a:endParaRPr lang="fr-FR"/>
           </a:p>
@@ -15254,8 +15254,8 @@
           </a:p>
         </p:txBody>
       </p:sp>
-      <mc:AlternateContent xmlns:mc="http://schemas.openxmlformats.org/markup-compatibility/2006">
-        <mc:Choice xmlns:a14="http://schemas.microsoft.com/office/drawing/2010/main" Requires="a14">
+      <mc:AlternateContent xmlns:mc="http://schemas.openxmlformats.org/markup-compatibility/2006" xmlns:a14="http://schemas.microsoft.com/office/drawing/2010/main">
+        <mc:Choice Requires="a14">
           <p:sp>
             <p:nvSpPr>
               <p:cNvPr id="87" name="ZoneTexte 86">
@@ -15317,7 +15317,7 @@
             </p:txBody>
           </p:sp>
         </mc:Choice>
-        <mc:Fallback>
+        <mc:Fallback xmlns="">
           <p:sp>
             <p:nvSpPr>
               <p:cNvPr id="87" name="ZoneTexte 86">
@@ -15362,8 +15362,8 @@
           </p:sp>
         </mc:Fallback>
       </mc:AlternateContent>
-      <mc:AlternateContent xmlns:mc="http://schemas.openxmlformats.org/markup-compatibility/2006">
-        <mc:Choice xmlns:a14="http://schemas.microsoft.com/office/drawing/2010/main" Requires="a14">
+      <mc:AlternateContent xmlns:mc="http://schemas.openxmlformats.org/markup-compatibility/2006" xmlns:a14="http://schemas.microsoft.com/office/drawing/2010/main">
+        <mc:Choice Requires="a14">
           <p:sp>
             <p:nvSpPr>
               <p:cNvPr id="37" name="ZoneTexte 36">
@@ -15413,7 +15413,7 @@
             </p:txBody>
           </p:sp>
         </mc:Choice>
-        <mc:Fallback>
+        <mc:Fallback xmlns="">
           <p:sp>
             <p:nvSpPr>
               <p:cNvPr id="37" name="ZoneTexte 36">
@@ -15458,8 +15458,8 @@
           </p:sp>
         </mc:Fallback>
       </mc:AlternateContent>
-      <mc:AlternateContent xmlns:mc="http://schemas.openxmlformats.org/markup-compatibility/2006" xmlns:a14="http://schemas.microsoft.com/office/drawing/2010/main">
-        <mc:Choice Requires="a14">
+      <mc:AlternateContent xmlns:mc="http://schemas.openxmlformats.org/markup-compatibility/2006">
+        <mc:Choice xmlns:a14="http://schemas.microsoft.com/office/drawing/2010/main" Requires="a14">
           <p:sp>
             <p:nvSpPr>
               <p:cNvPr id="76" name="ZoneTexte 75">
@@ -15474,7 +15474,7 @@
             </p:nvSpPr>
             <p:spPr>
               <a:xfrm>
-                <a:off x="3663009" y="2657971"/>
+                <a:off x="3621734" y="2657971"/>
                 <a:ext cx="401152" cy="261610"/>
               </a:xfrm>
               <a:prstGeom prst="rect">
@@ -15495,31 +15495,12 @@
                       <m:jc m:val="centerGroup"/>
                     </m:oMathParaPr>
                     <m:oMath xmlns:m="http://schemas.openxmlformats.org/officeDocument/2006/math">
-                      <m:sSub>
-                        <m:sSubPr>
-                          <m:ctrlPr>
-                            <a:rPr lang="fr-FR" sz="1100" i="1">
-                              <a:latin typeface="Cambria Math" panose="02040503050406030204" pitchFamily="18" charset="0"/>
-                            </a:rPr>
-                          </m:ctrlPr>
-                        </m:sSubPr>
-                        <m:e>
-                          <m:r>
-                            <a:rPr lang="fr-FR" sz="1100" i="1">
-                              <a:latin typeface="Cambria Math" panose="02040503050406030204" pitchFamily="18" charset="0"/>
-                            </a:rPr>
-                            <m:t>𝑉</m:t>
-                          </m:r>
-                        </m:e>
-                        <m:sub>
-                          <m:r>
-                            <a:rPr lang="fr-FR" sz="1100" i="1">
-                              <a:latin typeface="Cambria Math" panose="02040503050406030204" pitchFamily="18" charset="0"/>
-                            </a:rPr>
-                            <m:t>𝑚</m:t>
-                          </m:r>
-                        </m:sub>
-                      </m:sSub>
+                      <m:r>
+                        <a:rPr lang="fr-FR" sz="1100" b="0" i="1" smtClean="0">
+                          <a:latin typeface="Cambria Math" panose="02040503050406030204" pitchFamily="18" charset="0"/>
+                        </a:rPr>
+                        <m:t>𝑉</m:t>
+                      </m:r>
                     </m:oMath>
                   </m:oMathPara>
                 </a14:m>
@@ -15528,7 +15509,7 @@
             </p:txBody>
           </p:sp>
         </mc:Choice>
-        <mc:Fallback xmlns="">
+        <mc:Fallback>
           <p:sp>
             <p:nvSpPr>
               <p:cNvPr id="76" name="ZoneTexte 75">
@@ -15545,7 +15526,7 @@
             </p:nvSpPr>
             <p:spPr>
               <a:xfrm>
-                <a:off x="3663009" y="2657971"/>
+                <a:off x="3621734" y="2657971"/>
                 <a:ext cx="401152" cy="261610"/>
               </a:xfrm>
               <a:prstGeom prst="rect">
